--- a/team_solar/release/Haearim_deck.pptx
+++ b/team_solar/release/Haearim_deck.pptx
@@ -126,7 +126,7 @@
 <file path=ppt/charts/chart1.xml><?xml version="1.0" encoding="utf-8"?>
 <c:chartSpace xmlns:c="http://schemas.openxmlformats.org/drawingml/2006/chart" xmlns:a="http://schemas.openxmlformats.org/drawingml/2006/main" xmlns:r="http://schemas.openxmlformats.org/officeDocument/2006/relationships">
   <c:date1904 val="0"/>
-  <c:roundedCorners val="1"/>
+  <c:roundedCorners val="0"/>
   <c:chart>
     <c:title>
       <c:tx>
@@ -135,21 +135,21 @@
           <a:lstStyle/>
           <a:p>
             <a:pPr>
-              <a:defRPr sz="1100" b="0" i="0" u="none" strike="noStrike">
+              <a:defRPr sz="1200" b="1" i="0" u="none" strike="noStrike">
                 <a:solidFill>
-                  <a:srgbClr val="5B6478"/>
+                  <a:srgbClr val="1A1F2B"/>
                 </a:solidFill>
                 <a:latin typeface="Malgun Gothic"/>
               </a:defRPr>
             </a:pPr>
             <a:r>
-              <a:rPr sz="1100" b="0" i="0" u="none" strike="noStrike">
+              <a:rPr sz="1200" b="1" i="0" u="none" strike="noStrike">
                 <a:solidFill>
-                  <a:srgbClr val="5B6478"/>
+                  <a:srgbClr val="1A1F2B"/>
                 </a:solidFill>
                 <a:latin typeface="Malgun Gothic"/>
               </a:rPr>
-              <a:t>모델별 일 오차율 평균 (%)</a:t>
+              <a:t>모델별 일 오차율 평균 (낮을수록 좋음)</a:t>
             </a:r>
           </a:p>
         </c:rich>
@@ -186,13 +186,13 @@
           </c:spPr>
           <c:invertIfNegative val="0"/>
           <c:dLbls>
-            <c:numFmt formatCode="#,##0" sourceLinked="0"/>
+            <c:numFmt formatCode="0.00&quot;%&quot;" sourceLinked="0"/>
             <c:txPr>
               <a:bodyPr/>
               <a:lstStyle/>
               <a:p>
                 <a:pPr>
-                  <a:defRPr b="0" i="0" strike="noStrike" sz="1000" u="none">
+                  <a:defRPr b="0" i="0" strike="noStrike" sz="1100" u="none">
                     <a:solidFill>
                       <a:srgbClr val="1A1F2B"/>
                     </a:solidFill>
@@ -216,22 +216,22 @@
                 <c:ptCount val="6"/>
                 <c:lvl>
                   <c:pt idx="0">
-                    <c:v>전날 그대로</c:v>
+                    <c:v>같은 모델 + 하루 전 예보 입력 (서빙 조건)</c:v>
                   </c:pt>
                   <c:pt idx="1">
-                    <c:v>일사량 선형</c:v>
+                    <c:v>발전소 임베딩 추가 (운영 모델 v1)</c:v>
                   </c:pt>
                   <c:pt idx="2">
-                    <c:v>LSTM (mse)</c:v>
+                    <c:v>낮 시간 가중 MAE</c:v>
                   </c:pt>
                   <c:pt idx="3">
-                    <c:v>+ 낮 가중 MAE</c:v>
+                    <c:v>LSTM + 기상 (mse)</c:v>
                   </c:pt>
                   <c:pt idx="4">
-                    <c:v>+ 발전소 임베딩 (운영 v1)</c:v>
+                    <c:v>일사량 선형 비례</c:v>
                   </c:pt>
                   <c:pt idx="5">
-                    <c:v>같은 모델, 하루 전 예보 입력</c:v>
+                    <c:v>전날 같은 시간 그대로</c:v>
                   </c:pt>
                 </c:lvl>
               </c:multiLvlStrCache>
@@ -244,35 +244,35 @@
                 <c:formatCode>General</c:formatCode>
                 <c:ptCount val="6"/>
                 <c:pt idx="0">
-                  <c:v>16</c:v>
+                  <c:v>9.85</c:v>
                 </c:pt>
                 <c:pt idx="1">
+                  <c:v>8.29</c:v>
+                </c:pt>
+                <c:pt idx="2">
+                  <c:v>8.33</c:v>
+                </c:pt>
+                <c:pt idx="3">
+                  <c:v>8.98</c:v>
+                </c:pt>
+                <c:pt idx="4">
                   <c:v>12</c:v>
                 </c:pt>
-                <c:pt idx="2">
-                  <c:v>8.98</c:v>
-                </c:pt>
-                <c:pt idx="3">
-                  <c:v>8.33</c:v>
-                </c:pt>
-                <c:pt idx="4">
-                  <c:v>8.29</c:v>
-                </c:pt>
                 <c:pt idx="5">
-                  <c:v>9.85</c:v>
+                  <c:v>16</c:v>
                 </c:pt>
               </c:numCache>
             </c:numRef>
           </c:val>
         </c:ser>
         <c:dLbls>
-          <c:numFmt formatCode="#,##0" sourceLinked="0"/>
+          <c:numFmt formatCode="0.00&quot;%&quot;" sourceLinked="0"/>
           <c:txPr>
             <a:bodyPr/>
             <a:lstStyle/>
             <a:p>
               <a:pPr>
-                <a:defRPr b="0" i="0" strike="noStrike" sz="1000" u="none">
+                <a:defRPr b="0" i="0" strike="noStrike" sz="1100" u="none">
                   <a:solidFill>
                     <a:srgbClr val="1A1F2B"/>
                   </a:solidFill>
@@ -289,7 +289,7 @@
           <c:showBubbleSize val="0"/>
           <c:showLeaderLines val="0"/>
         </c:dLbls>
-        <c:gapWidth val="150"/>
+        <c:gapWidth val="60"/>
         <c:overlap val="0"/>
         <c:axId val="2094734554"/>
         <c:axId val="2094734552"/>
@@ -308,9 +308,7 @@
         <c:tickLblPos val="nextTo"/>
         <c:spPr>
           <a:ln w="12700" cap="flat">
-            <a:solidFill>
-              <a:srgbClr val="888888"/>
-            </a:solidFill>
+            <a:noFill/>
             <a:prstDash val="solid"/>
             <a:round/>
           </a:ln>
@@ -320,7 +318,7 @@
           <a:lstStyle/>
           <a:p>
             <a:pPr>
-              <a:defRPr sz="1000" b="0" i="0" u="none" strike="noStrike">
+              <a:defRPr sz="1100" b="0" i="0" u="none" strike="noStrike">
                 <a:solidFill>
                   <a:srgbClr val="1A1F2B"/>
                 </a:solidFill>
@@ -341,14 +339,15 @@
         <c:scaling>
           <c:orientation val="minMax"/>
           <c:max val="18"/>
+          <c:min val="0"/>
         </c:scaling>
         <c:delete val="0"/>
         <c:axPos val="b"/>
         <c:majorGridlines>
           <c:spPr>
-            <a:ln w="6350" cap="flat">
+            <a:ln w="9525" cap="flat">
               <a:solidFill>
-                <a:srgbClr val="DDE2EC"/>
+                <a:srgbClr val="E3E7EE"/>
               </a:solidFill>
               <a:prstDash val="solid"/>
               <a:round/>
@@ -361,9 +360,7 @@
         <c:tickLblPos val="low"/>
         <c:spPr>
           <a:ln w="12700" cap="flat">
-            <a:solidFill>
-              <a:srgbClr val="888888"/>
-            </a:solidFill>
+            <a:noFill/>
             <a:prstDash val="solid"/>
             <a:round/>
           </a:ln>
@@ -373,11 +370,11 @@
           <a:lstStyle/>
           <a:p>
             <a:pPr>
-              <a:defRPr sz="900" b="0" i="0" u="none" strike="noStrike">
+              <a:defRPr sz="1000" b="0" i="0" u="none" strike="noStrike">
                 <a:solidFill>
                   <a:srgbClr val="5B6478"/>
                 </a:solidFill>
-                <a:latin typeface="Arial"/>
+                <a:latin typeface="Malgun Gothic"/>
               </a:defRPr>
             </a:pPr>
             <a:endParaRPr lang="en-US"/>
@@ -418,7 +415,7 @@
 <file path=ppt/charts/chart2.xml><?xml version="1.0" encoding="utf-8"?>
 <c:chartSpace xmlns:c="http://schemas.openxmlformats.org/drawingml/2006/chart" xmlns:a="http://schemas.openxmlformats.org/drawingml/2006/main" xmlns:r="http://schemas.openxmlformats.org/officeDocument/2006/relationships">
   <c:date1904 val="0"/>
-  <c:roundedCorners val="1"/>
+  <c:roundedCorners val="0"/>
   <c:chart>
     <c:title>
       <c:tx>
@@ -427,21 +424,21 @@
           <a:lstStyle/>
           <a:p>
             <a:pPr>
-              <a:defRPr sz="1000" b="0" i="0" u="none" strike="noStrike">
+              <a:defRPr sz="1200" b="1" i="0" u="none" strike="noStrike">
                 <a:solidFill>
-                  <a:srgbClr val="5B6478"/>
+                  <a:srgbClr val="1A1F2B"/>
                 </a:solidFill>
                 <a:latin typeface="Malgun Gothic"/>
               </a:defRPr>
             </a:pPr>
             <a:r>
-              <a:rPr sz="1000" b="0" i="0" u="none" strike="noStrike">
+              <a:rPr sz="1200" b="1" i="0" u="none" strike="noStrike">
                 <a:solidFill>
-                  <a:srgbClr val="5B6478"/>
+                  <a:srgbClr val="1A1F2B"/>
                 </a:solidFill>
                 <a:latin typeface="Malgun Gothic"/>
               </a:rPr>
-              <a:t>월별 8% 통과율 - 장마(7월) 0.45, 가을 0.71. 계절 차이는 모델이 아는 변동</a:t>
+              <a:t>월별 8% 통과율: 장마(7월) 0.45, 가을(11월) 0.71. 계절 차이는 모델이 이미 아는 변동이다</a:t>
             </a:r>
           </a:p>
         </c:rich>
@@ -472,7 +469,7 @@
             <a:solidFill>
               <a:srgbClr val="1B9E6A"/>
             </a:solidFill>
-            <a:ln w="25400" cap="flat">
+            <a:ln w="31750" cap="flat">
               <a:solidFill>
                 <a:srgbClr val="1B9E6A"/>
               </a:solidFill>
@@ -483,23 +480,24 @@
           </c:spPr>
           <c:invertIfNegative val="0"/>
           <c:dLbls>
-            <c:numFmt formatCode="#,##0" sourceLinked="0"/>
+            <c:numFmt formatCode="0.00" sourceLinked="0"/>
             <c:txPr>
               <a:bodyPr/>
               <a:lstStyle/>
               <a:p>
                 <a:pPr>
-                  <a:defRPr b="0" i="0" strike="noStrike" sz="1200" u="none">
+                  <a:defRPr b="0" i="0" strike="noStrike" sz="900" u="none">
                     <a:solidFill>
-                      <a:srgbClr val="000000"/>
+                      <a:srgbClr val="5B6478"/>
                     </a:solidFill>
-                    <a:latin typeface="Arial"/>
+                    <a:latin typeface="Malgun Gothic"/>
                   </a:defRPr>
                 </a:pPr>
               </a:p>
             </c:txPr>
+            <c:dLblPos val="t"/>
             <c:showLegendKey val="0"/>
-            <c:showVal val="0"/>
+            <c:showVal val="1"/>
             <c:showCatName val="0"/>
             <c:showSerName val="0"/>
             <c:showPercent val="0"/>
@@ -508,7 +506,7 @@
           </c:dLbls>
           <c:marker>
             <c:symbol val="circle"/>
-            <c:size val="5"/>
+            <c:size val="6"/>
             <c:spPr>
               <a:solidFill>
                 <a:srgbClr val="1B9E6A"/>
@@ -617,23 +615,24 @@
           <c:smooth val="0"/>
         </c:ser>
         <c:dLbls>
-          <c:numFmt formatCode="#,##0" sourceLinked="0"/>
+          <c:numFmt formatCode="0.00" sourceLinked="0"/>
           <c:txPr>
             <a:bodyPr/>
             <a:lstStyle/>
             <a:p>
               <a:pPr>
-                <a:defRPr b="0" i="0" strike="noStrike" sz="1200" u="none">
+                <a:defRPr b="0" i="0" strike="noStrike" sz="900" u="none">
                   <a:solidFill>
-                    <a:srgbClr val="000000"/>
+                    <a:srgbClr val="5B6478"/>
                   </a:solidFill>
-                  <a:latin typeface="Arial"/>
+                  <a:latin typeface="Malgun Gothic"/>
                 </a:defRPr>
               </a:pPr>
             </a:p>
           </c:txPr>
+          <c:dLblPos val="t"/>
           <c:showLegendKey val="0"/>
-          <c:showVal val="0"/>
+          <c:showVal val="1"/>
           <c:showCatName val="0"/>
           <c:showSerName val="0"/>
           <c:showPercent val="0"/>
@@ -658,9 +657,7 @@
         <c:tickLblPos val="low"/>
         <c:spPr>
           <a:ln w="12700" cap="flat">
-            <a:solidFill>
-              <a:srgbClr val="888888"/>
-            </a:solidFill>
+            <a:noFill/>
             <a:prstDash val="solid"/>
             <a:round/>
           </a:ln>
@@ -670,11 +667,11 @@
           <a:lstStyle/>
           <a:p>
             <a:pPr>
-              <a:defRPr sz="900" b="0" i="0" u="none" strike="noStrike">
+              <a:defRPr sz="1000" b="0" i="0" u="none" strike="noStrike">
                 <a:solidFill>
-                  <a:srgbClr val="5B6478"/>
+                  <a:srgbClr val="1A1F2B"/>
                 </a:solidFill>
-                <a:latin typeface="Arial"/>
+                <a:latin typeface="Malgun Gothic"/>
               </a:defRPr>
             </a:pPr>
             <a:endParaRPr lang="en-US"/>
@@ -697,9 +694,9 @@
         <c:axPos val="l"/>
         <c:majorGridlines>
           <c:spPr>
-            <a:ln w="6350" cap="flat">
+            <a:ln w="9525" cap="flat">
               <a:solidFill>
-                <a:srgbClr val="DDE2EC"/>
+                <a:srgbClr val="E3E7EE"/>
               </a:solidFill>
               <a:prstDash val="solid"/>
               <a:round/>
@@ -712,9 +709,7 @@
         <c:tickLblPos val="nextTo"/>
         <c:spPr>
           <a:ln w="12700" cap="flat">
-            <a:solidFill>
-              <a:srgbClr val="888888"/>
-            </a:solidFill>
+            <a:noFill/>
             <a:prstDash val="solid"/>
             <a:round/>
           </a:ln>
@@ -724,11 +719,11 @@
           <a:lstStyle/>
           <a:p>
             <a:pPr>
-              <a:defRPr sz="800" b="0" i="0" u="none" strike="noStrike">
+              <a:defRPr sz="900" b="0" i="0" u="none" strike="noStrike">
                 <a:solidFill>
                   <a:srgbClr val="5B6478"/>
                 </a:solidFill>
-                <a:latin typeface="Arial"/>
+                <a:latin typeface="Malgun Gothic"/>
               </a:defRPr>
             </a:pPr>
             <a:endParaRPr lang="en-US"/>
@@ -737,6 +732,7 @@
         <c:crossAx val="2094734554"/>
         <c:crosses val="autoZero"/>
         <c:crossBetween val="between"/>
+        <c:majorUnit val="0.1"/>
       </c:valAx>
       <c:spPr>
         <a:solidFill>
@@ -1161,7 +1157,7 @@
           <a:p>
             <a:r>
               <a:rPr lang="en-US" dirty="0"/>
-              <a:t/>
+              <a:t>해아림은 전력중개사업자를 위한 다음 날 24시간 태양광 발전량 예측 API입니다. 핵심은 예측 자체보다 운영입니다. 오차가 커졌을 때 원인을 가려 모델 탓일 때만 재학습합니다.</a:t>
             </a:r>
             <a:endParaRPr lang="en-US" dirty="0"/>
           </a:p>
@@ -1249,7 +1245,7 @@
           <a:p>
             <a:r>
               <a:rPr lang="en-US" dirty="0"/>
-              <a:t/>
+              <a:t>표의 위 세 줄은 재학습하지 않는 날씨 변동, 가운데 네 줄은 설비 이상(실제 사례 3건 포함), 아래 두 줄만 재학습입니다.</a:t>
             </a:r>
             <a:endParaRPr lang="en-US" dirty="0"/>
           </a:p>
@@ -1337,7 +1333,7 @@
           <a:p>
             <a:r>
               <a:rPr lang="en-US" dirty="0"/>
-              <a:t/>
+              <a:t>세 건은 주입 없는 실제 데이터입니다. 모양이 다릅니다. 광양항은 정지 후 복구, 삼천포2는 하루 만에 계단형 급락, 영흥#5는 6개월 점진 하락입니다. 감지기는 세 건 모두 재학습을 막았습니다.</a:t>
             </a:r>
             <a:endParaRPr lang="en-US" dirty="0"/>
           </a:p>
@@ -1425,7 +1421,7 @@
           <a:p>
             <a:r>
               <a:rPr lang="en-US" dirty="0"/>
-              <a:t/>
+              <a:t>왼쪽은 모의 시나리오 기후 B입니다. 더운 경남 4곳만 임계값을 넘고 경북 2곳은 이내라 동시성 0.67로 모델 드리프트가 됩니다. 오른쪽 아래는 실제 광양항입니다. 실제가 기대보다 20% 많으면 설비 탓일 수 없으니 모델을 의심합니다.</a:t>
             </a:r>
             <a:endParaRPr lang="en-US" dirty="0"/>
           </a:p>
@@ -1953,7 +1949,7 @@
           <a:p>
             <a:r>
               <a:rPr lang="en-US" dirty="0"/>
-              <a:t/>
+              <a:t>제도 요약. 오차 8% 이내인 날만 정산되고 6% 이하면 단가가 더 높습니다. 제출은 하루 전 10시이므로 그 시각에 아는 것은 과거 실적과 기상 예보뿐입니다.</a:t>
             </a:r>
             <a:endParaRPr lang="en-US" dirty="0"/>
           </a:p>
@@ -2129,7 +2125,7 @@
           <a:p>
             <a:r>
               <a:rPr lang="en-US" dirty="0"/>
-              <a:t/>
+              <a:t>7곳을 제외한 이유를 물으면: 시간별 계측이 급변하거나 피크가 3~4시간 늦게 찍히는 발전소는 모델이 아니라 계측의 문제라 학습에서 뺐습니다.</a:t>
             </a:r>
             <a:endParaRPr lang="en-US" dirty="0"/>
           </a:p>
@@ -2305,7 +2301,7 @@
           <a:p>
             <a:r>
               <a:rPr lang="en-US" dirty="0"/>
-              <a:t/>
+              <a:t>왼쪽 막대: 전날 그대로 쓰는 기준선 16%에서 운영 모델 8.29%까지. 맨 아래는 같은 모델에 하루 전 예보를 넣은 서빙 조건 9.85%입니다. 이 1.5%p 차이는 드리프트가 아니라 입력 품질의 몫입니다.</a:t>
             </a:r>
             <a:endParaRPr lang="en-US" dirty="0"/>
           </a:p>
@@ -2481,7 +2477,7 @@
           <a:p>
             <a:r>
               <a:rPr lang="en-US" dirty="0"/>
-              <a:t/>
+              <a:t>순서가 중요합니다. 동시성을 먼저 보고, 장기 추세, 급락, 나머지 순입니다. 설비와 오염은 재학습하면 안 되는 경우이고 모델 드리프트만 재학습으로 갑니다.</a:t>
             </a:r>
             <a:endParaRPr lang="en-US" dirty="0"/>
           </a:p>
@@ -2924,7 +2920,7 @@
     <p:bg>
       <p:bgPr>
         <a:solidFill>
-          <a:srgbClr val="F6F7FB"/>
+          <a:srgbClr val="FFFFFF"/>
         </a:solidFill>
       </p:bgPr>
     </p:bg>
@@ -2950,8 +2946,8 @@
         </p:nvSpPr>
         <p:spPr>
           <a:xfrm>
-            <a:off x="8412480" y="-1463040"/>
-            <a:ext cx="5943600" cy="5943600"/>
+            <a:off x="8138160" y="-1645920"/>
+            <a:ext cx="6400800" cy="6400800"/>
           </a:xfrm>
           <a:prstGeom prst="ellipse">
             <a:avLst/>
@@ -2975,8 +2971,8 @@
         </p:nvSpPr>
         <p:spPr>
           <a:xfrm>
-            <a:off x="-1645920" y="4754880"/>
-            <a:ext cx="4114800" cy="4114800"/>
+            <a:off x="-1463040" y="4572000"/>
+            <a:ext cx="4206240" cy="4206240"/>
           </a:xfrm>
           <a:prstGeom prst="ellipse">
             <a:avLst/>
@@ -3000,7 +2996,7 @@
         </p:nvSpPr>
         <p:spPr>
           <a:xfrm>
-            <a:off x="731520" y="1280160"/>
+            <a:off x="731520" y="1234440"/>
             <a:ext cx="822960" cy="822960"/>
           </a:xfrm>
           <a:prstGeom prst="ellipse">
@@ -3033,8 +3029,8 @@
         </p:blipFill>
         <p:spPr>
           <a:xfrm>
-            <a:off x="929030" y="1477670"/>
-            <a:ext cx="427939" cy="427939"/>
+            <a:off x="937260" y="1440180"/>
+            <a:ext cx="411480" cy="411480"/>
           </a:xfrm>
           <a:prstGeom prst="rect">
             <a:avLst/>
@@ -3049,8 +3045,8 @@
         </p:nvSpPr>
         <p:spPr>
           <a:xfrm>
-            <a:off x="731520" y="2286000"/>
-            <a:ext cx="9144000" cy="914400"/>
+            <a:off x="731520" y="2194560"/>
+            <a:ext cx="9144000" cy="1005840"/>
           </a:xfrm>
           <a:prstGeom prst="rect">
             <a:avLst/>
@@ -3066,7 +3062,7 @@
               <a:buNone/>
             </a:pPr>
             <a:r>
-              <a:rPr lang="en-US" sz="4800" b="1" dirty="0">
+              <a:rPr lang="en-US" sz="5200" b="1" dirty="0">
                 <a:solidFill>
                   <a:srgbClr val="1A1F2B"/>
                 </a:solidFill>
@@ -3076,7 +3072,7 @@
               </a:rPr>
               <a:t>해아림</a:t>
             </a:r>
-            <a:endParaRPr lang="en-US" sz="4800" dirty="0"/>
+            <a:endParaRPr lang="en-US" sz="5200" dirty="0"/>
           </a:p>
         </p:txBody>
       </p:sp>
@@ -3152,7 +3148,7 @@
                 <a:ea typeface="Malgun Gothic" pitchFamily="34" charset="-122"/>
                 <a:cs typeface="Malgun Gothic" pitchFamily="34" charset="-120"/>
               </a:rPr>
-              <a:t>서빙 → MLOps → AIOps 루프 위에서, 오차의 원인을 가려 재학습하는 운영 설계</a:t>
+              <a:t>서빙 → MLOps → AIOps 루프 위에서, 오차의 원인을 가려낸 뒤에만 재학습하는 운영 설계</a:t>
             </a:r>
             <a:endParaRPr lang="en-US" sz="1500" dirty="0"/>
           </a:p>
@@ -3167,7 +3163,7 @@
         <p:spPr>
           <a:xfrm>
             <a:off x="731520" y="4663440"/>
-            <a:ext cx="3749040" cy="310896"/>
+            <a:ext cx="4572000" cy="329184"/>
           </a:xfrm>
           <a:prstGeom prst="roundRect">
             <a:avLst>
@@ -3193,7 +3189,7 @@
         </p:nvSpPr>
         <p:spPr>
           <a:xfrm>
-            <a:off x="859536" y="4773168"/>
+            <a:off x="868680" y="4782312"/>
             <a:ext cx="91440" cy="91440"/>
           </a:xfrm>
           <a:prstGeom prst="ellipse">
@@ -3218,8 +3214,8 @@
         </p:nvSpPr>
         <p:spPr>
           <a:xfrm>
-            <a:off x="1005840" y="4663440"/>
-            <a:ext cx="3419856" cy="310896"/>
+            <a:off x="1024128" y="4663440"/>
+            <a:ext cx="4206240" cy="329184"/>
           </a:xfrm>
           <a:prstGeom prst="rect">
             <a:avLst/>
@@ -3235,7 +3231,7 @@
               <a:buNone/>
             </a:pPr>
             <a:r>
-              <a:rPr lang="en-US" sz="1050" b="1" dirty="0">
+              <a:rPr lang="en-US" sz="1100" b="1" dirty="0">
                 <a:solidFill>
                   <a:srgbClr val="1B9E6A"/>
                 </a:solidFill>
@@ -3243,9 +3239,9 @@
                 <a:ea typeface="Malgun Gothic" pitchFamily="34" charset="-122"/>
                 <a:cs typeface="Malgun Gothic" pitchFamily="34" charset="-120"/>
               </a:rPr>
-              <a:t>실제 발전소 10곳 · 3.7년 · Open-Meteo 기상</a:t>
+              <a:t>실제 발전소 10곳 · 3.7년 실적 · Open-Meteo 기상</a:t>
             </a:r>
-            <a:endParaRPr lang="en-US" sz="1050" dirty="0"/>
+            <a:endParaRPr lang="en-US" sz="1100" dirty="0"/>
           </a:p>
         </p:txBody>
       </p:sp>
@@ -3257,8 +3253,8 @@
         </p:nvSpPr>
         <p:spPr>
           <a:xfrm>
-            <a:off x="4617720" y="4663440"/>
-            <a:ext cx="3566160" cy="310896"/>
+            <a:off x="5440680" y="4663440"/>
+            <a:ext cx="4206240" cy="329184"/>
           </a:xfrm>
           <a:prstGeom prst="roundRect">
             <a:avLst>
@@ -3284,7 +3280,7 @@
         </p:nvSpPr>
         <p:spPr>
           <a:xfrm>
-            <a:off x="4745736" y="4773168"/>
+            <a:off x="5577840" y="4782312"/>
             <a:ext cx="91440" cy="91440"/>
           </a:xfrm>
           <a:prstGeom prst="ellipse">
@@ -3309,8 +3305,8 @@
         </p:nvSpPr>
         <p:spPr>
           <a:xfrm>
-            <a:off x="4892040" y="4663440"/>
-            <a:ext cx="3236976" cy="310896"/>
+            <a:off x="5733288" y="4663440"/>
+            <a:ext cx="3840480" cy="329184"/>
           </a:xfrm>
           <a:prstGeom prst="rect">
             <a:avLst/>
@@ -3326,7 +3322,7 @@
               <a:buNone/>
             </a:pPr>
             <a:r>
-              <a:rPr lang="en-US" sz="1050" b="1" dirty="0">
+              <a:rPr lang="en-US" sz="1100" b="1" dirty="0">
                 <a:solidFill>
                   <a:srgbClr val="B8781B"/>
                 </a:solidFill>
@@ -3334,9 +3330,9 @@
                 <a:ea typeface="Malgun Gothic" pitchFamily="34" charset="-122"/>
                 <a:cs typeface="Malgun Gothic" pitchFamily="34" charset="-120"/>
               </a:rPr>
-              <a:t>시나리오 9개 · 재학습 2회 · 새 클론 재현</a:t>
+              <a:t>시나리오 9개 · 재학습 2회 · 새 클론에서 재현</a:t>
             </a:r>
-            <a:endParaRPr lang="en-US" sz="1050" dirty="0"/>
+            <a:endParaRPr lang="en-US" sz="1100" dirty="0"/>
           </a:p>
         </p:txBody>
       </p:sp>
@@ -3373,7 +3369,7 @@
                 <a:ea typeface="Malgun Gothic" pitchFamily="34" charset="-122"/>
                 <a:cs typeface="Malgun Gothic" pitchFamily="34" charset="-120"/>
               </a:rPr>
-              <a:t>HAIC 조별 과제 · 2026-10</a:t>
+              <a:t>HAIC 조별 과제 · 2026년 10월</a:t>
             </a:r>
             <a:endParaRPr lang="en-US" sz="1200" dirty="0"/>
           </a:p>
@@ -3393,7 +3389,7 @@
     <p:bg>
       <p:bgPr>
         <a:solidFill>
-          <a:srgbClr val="F6F7FB"/>
+          <a:srgbClr val="FFFFFF"/>
         </a:solidFill>
       </p:bgPr>
     </p:bg>
@@ -3419,8 +3415,8 @@
         </p:nvSpPr>
         <p:spPr>
           <a:xfrm>
-            <a:off x="548640" y="347472"/>
-            <a:ext cx="10241280" cy="640080"/>
+            <a:off x="548640" y="365760"/>
+            <a:ext cx="10332720" cy="640080"/>
           </a:xfrm>
           <a:prstGeom prst="rect">
             <a:avLst/>
@@ -3436,7 +3432,7 @@
               <a:buNone/>
             </a:pPr>
             <a:r>
-              <a:rPr lang="en-US" sz="2600" b="1" dirty="0">
+              <a:rPr lang="en-US" sz="2700" b="1" dirty="0">
                 <a:solidFill>
                   <a:srgbClr val="1A1F2B"/>
                 </a:solidFill>
@@ -3446,7 +3442,7 @@
               </a:rPr>
               <a:t>시나리오 9개: 날씨 3 · 설비 4 · 모델 드리프트 2</a:t>
             </a:r>
-            <a:endParaRPr lang="en-US" sz="2600" dirty="0"/>
+            <a:endParaRPr lang="en-US" sz="2700" dirty="0"/>
           </a:p>
         </p:txBody>
       </p:sp>
@@ -3458,8 +3454,8 @@
         </p:nvSpPr>
         <p:spPr>
           <a:xfrm>
-            <a:off x="548640" y="960120"/>
-            <a:ext cx="10607040" cy="384048"/>
+            <a:off x="548640" y="987552"/>
+            <a:ext cx="10789920" cy="384048"/>
           </a:xfrm>
           <a:prstGeom prst="rect">
             <a:avLst/>
@@ -3483,7 +3479,7 @@
                 <a:ea typeface="Malgun Gothic" pitchFamily="34" charset="-122"/>
                 <a:cs typeface="Malgun Gothic" pitchFamily="34" charset="-120"/>
               </a:rPr>
-              <a:t>실제 실적 구간을 그대로 또는 변형해 투입. 재학습은 두 번만 걸렸고 둘 다 게이트를 통과했다 (새 클론 재현 로그 동일)</a:t>
+              <a:t>실제 실적 구간을 그대로 또는 변형해 투입했다. 재학습은 두 번만 걸렸고 둘 다 게이트를 통과했다 (새 클론 재현 로그와 동일)</a:t>
             </a:r>
             <a:endParaRPr lang="en-US" sz="1300" dirty="0"/>
           </a:p>
@@ -3497,8 +3493,8 @@
         </p:nvSpPr>
         <p:spPr>
           <a:xfrm>
-            <a:off x="11155680" y="384048"/>
-            <a:ext cx="548640" cy="365760"/>
+            <a:off x="11155680" y="411480"/>
+            <a:ext cx="502920" cy="365760"/>
           </a:xfrm>
           <a:prstGeom prst="rect">
             <a:avLst/>
@@ -3514,7 +3510,7 @@
               <a:buNone/>
             </a:pPr>
             <a:r>
-              <a:rPr lang="en-US" sz="1200" dirty="0">
+              <a:rPr lang="en-US" sz="1100" dirty="0">
                 <a:solidFill>
                   <a:srgbClr val="8A93A6"/>
                 </a:solidFill>
@@ -3524,7 +3520,7 @@
               </a:rPr>
               <a:t>10</a:t>
             </a:r>
-            <a:endParaRPr lang="en-US" sz="1200" dirty="0"/>
+            <a:endParaRPr lang="en-US" sz="1100" dirty="0"/>
           </a:p>
         </p:txBody>
       </p:sp>
@@ -3537,7 +3533,7 @@
         <p:spPr>
           <a:xfrm>
             <a:off x="548640" y="6446520"/>
-            <a:ext cx="5486400" cy="274320"/>
+            <a:ext cx="6400800" cy="274320"/>
           </a:xfrm>
           <a:prstGeom prst="rect">
             <a:avLst/>
@@ -3561,7 +3557,7 @@
                 <a:ea typeface="Malgun Gothic" pitchFamily="34" charset="-122"/>
                 <a:cs typeface="Malgun Gothic" pitchFamily="34" charset="-120"/>
               </a:rPr>
-              <a:t>해아림 · 서빙 → MLOps → AIOps</a:t>
+              <a:t>해아림 · 태양광 시간별 발전량 예측 · 서빙 → MLOps → AIOps</a:t>
             </a:r>
             <a:endParaRPr lang="en-US" sz="900" dirty="0"/>
           </a:p>
@@ -3662,7 +3658,7 @@
                       <a:tailEnd type="none" w="med" len="med"/>
                     </a:lnB>
                     <a:solidFill>
-                      <a:srgbClr val="F0F2F7"/>
+                      <a:srgbClr val="F3F5F9"/>
                     </a:solidFill>
                   </a:tcPr>
                 </a:tc>
@@ -3730,7 +3726,7 @@
                       <a:tailEnd type="none" w="med" len="med"/>
                     </a:lnB>
                     <a:solidFill>
-                      <a:srgbClr val="F0F2F7"/>
+                      <a:srgbClr val="F3F5F9"/>
                     </a:solidFill>
                   </a:tcPr>
                 </a:tc>
@@ -3798,7 +3794,7 @@
                       <a:tailEnd type="none" w="med" len="med"/>
                     </a:lnB>
                     <a:solidFill>
-                      <a:srgbClr val="F0F2F7"/>
+                      <a:srgbClr val="F3F5F9"/>
                     </a:solidFill>
                   </a:tcPr>
                 </a:tc>
@@ -3866,7 +3862,7 @@
                       <a:tailEnd type="none" w="med" len="med"/>
                     </a:lnB>
                     <a:solidFill>
-                      <a:srgbClr val="F0F2F7"/>
+                      <a:srgbClr val="F3F5F9"/>
                     </a:solidFill>
                   </a:tcPr>
                 </a:tc>
@@ -3934,7 +3930,7 @@
                       <a:tailEnd type="none" w="med" len="med"/>
                     </a:lnB>
                     <a:solidFill>
-                      <a:srgbClr val="F0F2F7"/>
+                      <a:srgbClr val="F3F5F9"/>
                     </a:solidFill>
                   </a:tcPr>
                 </a:tc>
@@ -4002,7 +3998,7 @@
                       <a:tailEnd type="none" w="med" len="med"/>
                     </a:lnB>
                     <a:solidFill>
-                      <a:srgbClr val="F0F2F7"/>
+                      <a:srgbClr val="F3F5F9"/>
                     </a:solidFill>
                   </a:tcPr>
                 </a:tc>
@@ -4365,7 +4361,7 @@
                           <a:ea typeface="Malgun Gothic" pitchFamily="34" charset="-122"/>
                           <a:cs typeface="Malgun Gothic" pitchFamily="34" charset="-120"/>
                         </a:rPr>
-                        <a:t>ok</a:t>
+                        <a:t>정상</a:t>
                       </a:r>
                       <a:endParaRPr lang="en-US" sz="1000" dirty="0">
                         <a:latin typeface="Malgun Gothic" charset="0"/>
@@ -4775,7 +4771,7 @@
                           <a:ea typeface="Malgun Gothic" pitchFamily="34" charset="-122"/>
                           <a:cs typeface="Malgun Gothic" pitchFamily="34" charset="-120"/>
                         </a:rPr>
-                        <a:t>ok (임계값 이내, 모델이 아는 계절)</a:t>
+                        <a:t>정상 (임계값 이내, 모델이 아는 계절)</a:t>
                       </a:r>
                       <a:endParaRPr lang="en-US" sz="1000" dirty="0">
                         <a:latin typeface="Malgun Gothic" charset="0"/>
@@ -4913,7 +4909,7 @@
                           <a:ea typeface="Malgun Gothic" pitchFamily="34" charset="-122"/>
                           <a:cs typeface="Malgun Gothic" pitchFamily="34" charset="-120"/>
                         </a:rPr>
-                        <a:t>기후 A 우기 패턴만</a:t>
+                        <a:t>기후 A: 우기 패턴만</a:t>
                       </a:r>
                       <a:endParaRPr lang="en-US" sz="1000" dirty="0">
                         <a:latin typeface="Malgun Gothic" charset="0"/>
@@ -5185,7 +5181,7 @@
                           <a:ea typeface="Malgun Gothic" pitchFamily="34" charset="-122"/>
                           <a:cs typeface="Malgun Gothic" pitchFamily="34" charset="-120"/>
                         </a:rPr>
-                        <a:t>ok (입력 분포만 변화)</a:t>
+                        <a:t>정상 (입력 분포만 변화)</a:t>
                       </a:r>
                       <a:endParaRPr lang="en-US" sz="1000" dirty="0">
                         <a:latin typeface="Malgun Gothic" charset="0"/>
@@ -5595,7 +5591,7 @@
                           <a:ea typeface="Malgun Gothic" pitchFamily="34" charset="-122"/>
                           <a:cs typeface="Malgun Gothic" pitchFamily="34" charset="-120"/>
                         </a:rPr>
-                        <a:t>equipment → [ALERT], 재학습 차단</a:t>
+                        <a:t>설비 이상 → [ALERT], 재학습 차단</a:t>
                       </a:r>
                       <a:endParaRPr lang="en-US" sz="1000" dirty="0">
                         <a:latin typeface="Malgun Gothic" charset="0"/>
@@ -6005,7 +6001,7 @@
                           <a:ea typeface="Malgun Gothic" pitchFamily="34" charset="-122"/>
                           <a:cs typeface="Malgun Gothic" pitchFamily="34" charset="-120"/>
                         </a:rPr>
-                        <a:t>equipment → [ALERT]</a:t>
+                        <a:t>설비 이상 → [ALERT]</a:t>
                       </a:r>
                       <a:endParaRPr lang="en-US" sz="1000" dirty="0">
                         <a:latin typeface="Malgun Gothic" charset="0"/>
@@ -6415,7 +6411,7 @@
                           <a:ea typeface="Malgun Gothic" pitchFamily="34" charset="-122"/>
                           <a:cs typeface="Malgun Gothic" pitchFamily="34" charset="-120"/>
                         </a:rPr>
-                        <a:t>equipment → [ALERT]</a:t>
+                        <a:t>설비 이상 → [ALERT]</a:t>
                       </a:r>
                       <a:endParaRPr lang="en-US" sz="1000" dirty="0">
                         <a:latin typeface="Malgun Gothic" charset="0"/>
@@ -6825,7 +6821,7 @@
                           <a:ea typeface="Malgun Gothic" pitchFamily="34" charset="-122"/>
                           <a:cs typeface="Malgun Gothic" pitchFamily="34" charset="-120"/>
                         </a:rPr>
-                        <a:t>equipment → [ALERT] (60일+면 soiling)</a:t>
+                        <a:t>설비 이상 → [ALERT] (60일 이상이면 오염)</a:t>
                       </a:r>
                       <a:endParaRPr lang="en-US" sz="1000" dirty="0">
                         <a:latin typeface="Malgun Gothic" charset="0"/>
@@ -6963,7 +6959,7 @@
                           <a:ea typeface="Malgun Gothic" pitchFamily="34" charset="-122"/>
                           <a:cs typeface="Malgun Gothic" pitchFamily="34" charset="-120"/>
                         </a:rPr>
-                        <a:t>기후 B 폭염화 (모의)</a:t>
+                        <a:t>기후 B: 폭염화 (모의)</a:t>
                       </a:r>
                       <a:endParaRPr lang="en-US" sz="1000" dirty="0">
                         <a:latin typeface="Malgun Gothic" charset="0"/>
@@ -7235,7 +7231,7 @@
                           <a:ea typeface="Malgun Gothic" pitchFamily="34" charset="-122"/>
                           <a:cs typeface="Malgun Gothic" pitchFamily="34" charset="-120"/>
                         </a:rPr>
-                        <a:t>model_drift (동시성 0.67) → fine-tune 8.39% → v2 승격</a:t>
+                        <a:t>모델 드리프트 (동시성 0.67) → fine-tune 8.39% → v2 승격</a:t>
                       </a:r>
                       <a:endParaRPr lang="en-US" sz="1000" dirty="0">
                         <a:latin typeface="Malgun Gothic" charset="0"/>
@@ -7645,7 +7641,7 @@
                           <a:ea typeface="Malgun Gothic" pitchFamily="34" charset="-122"/>
                           <a:cs typeface="Malgun Gothic" pitchFamily="34" charset="-120"/>
                         </a:rPr>
-                        <a:t>model_drift → fine-tune → v3 승격</a:t>
+                        <a:t>모델 드리프트 → fine-tune → v3 승격</a:t>
                       </a:r>
                       <a:endParaRPr lang="en-US" sz="1000" dirty="0">
                         <a:latin typeface="Malgun Gothic" charset="0"/>
@@ -7703,14 +7699,14 @@
       </p:graphicFrame>
       <p:sp>
         <p:nvSpPr>
-          <p:cNvPr id="7" name="Shape 4"/>
+          <p:cNvPr id="8" name="Shape 4"/>
           <p:cNvSpPr/>
           <p:nvPr/>
         </p:nvSpPr>
         <p:spPr>
           <a:xfrm>
             <a:off x="548640" y="5623560"/>
-            <a:ext cx="11064240" cy="310896"/>
+            <a:ext cx="11064240" cy="329184"/>
           </a:xfrm>
           <a:prstGeom prst="roundRect">
             <a:avLst>
@@ -7730,13 +7726,13 @@
       </p:sp>
       <p:sp>
         <p:nvSpPr>
-          <p:cNvPr id="8" name="Shape 5"/>
+          <p:cNvPr id="9" name="Shape 5"/>
           <p:cNvSpPr/>
           <p:nvPr/>
         </p:nvSpPr>
         <p:spPr>
           <a:xfrm>
-            <a:off x="676656" y="5733288"/>
+            <a:off x="685800" y="5742432"/>
             <a:ext cx="91440" cy="91440"/>
           </a:xfrm>
           <a:prstGeom prst="ellipse">
@@ -7755,14 +7751,14 @@
       </p:sp>
       <p:sp>
         <p:nvSpPr>
-          <p:cNvPr id="9" name="Text 6"/>
+          <p:cNvPr id="10" name="Text 6"/>
           <p:cNvSpPr txBox="1"/>
           <p:nvPr/>
         </p:nvSpPr>
         <p:spPr>
           <a:xfrm>
-            <a:off x="822960" y="5623560"/>
-            <a:ext cx="10735056" cy="310896"/>
+            <a:off x="841248" y="5623560"/>
+            <a:ext cx="10698480" cy="329184"/>
           </a:xfrm>
           <a:prstGeom prst="rect">
             <a:avLst/>
@@ -7786,7 +7782,7 @@
                 <a:ea typeface="Malgun Gothic" pitchFamily="34" charset="-122"/>
                 <a:cs typeface="Malgun Gothic" pitchFamily="34" charset="-120"/>
               </a:rPr>
-              <a:t>같은 20% 손실을 장마 창에 넣으면 오차 8.5~9.2% 로 임계값 미달 — 제도 오차는 용량 대비 절대값이라 흐린 날의 비례 손실은 작게 잡힌다</a:t>
+              <a:t>같은 20% 손실을 장마 창에 넣으면 오차가 8.5~9.2%에 그쳐 임계값에 못 미친다. 제도 오차는 용량 대비 절대값이라 흐린 날의 비례 손실은 작게 잡힌다.</a:t>
             </a:r>
             <a:endParaRPr lang="en-US" sz="1050" dirty="0"/>
           </a:p>
@@ -7806,7 +7802,7 @@
     <p:bg>
       <p:bgPr>
         <a:solidFill>
-          <a:srgbClr val="F6F7FB"/>
+          <a:srgbClr val="FFFFFF"/>
         </a:solidFill>
       </p:bgPr>
     </p:bg>
@@ -7832,8 +7828,8 @@
         </p:nvSpPr>
         <p:spPr>
           <a:xfrm>
-            <a:off x="548640" y="347472"/>
-            <a:ext cx="10241280" cy="640080"/>
+            <a:off x="548640" y="365760"/>
+            <a:ext cx="10332720" cy="640080"/>
           </a:xfrm>
           <a:prstGeom prst="rect">
             <a:avLst/>
@@ -7849,7 +7845,7 @@
               <a:buNone/>
             </a:pPr>
             <a:r>
-              <a:rPr lang="en-US" sz="2600" b="1" dirty="0">
+              <a:rPr lang="en-US" sz="2700" b="1" dirty="0">
                 <a:solidFill>
                   <a:srgbClr val="1A1F2B"/>
                 </a:solidFill>
@@ -7859,7 +7855,7 @@
               </a:rPr>
               <a:t>실제 데이터에서 찾은 이상 3건은 전부 설비였다</a:t>
             </a:r>
-            <a:endParaRPr lang="en-US" sz="2600" dirty="0"/>
+            <a:endParaRPr lang="en-US" sz="2700" dirty="0"/>
           </a:p>
         </p:txBody>
       </p:sp>
@@ -7871,8 +7867,8 @@
         </p:nvSpPr>
         <p:spPr>
           <a:xfrm>
-            <a:off x="548640" y="960120"/>
-            <a:ext cx="10607040" cy="384048"/>
+            <a:off x="548640" y="987552"/>
+            <a:ext cx="10789920" cy="384048"/>
           </a:xfrm>
           <a:prstGeom prst="rect">
             <a:avLst/>
@@ -7910,8 +7906,8 @@
         </p:nvSpPr>
         <p:spPr>
           <a:xfrm>
-            <a:off x="11155680" y="384048"/>
-            <a:ext cx="548640" cy="365760"/>
+            <a:off x="11155680" y="411480"/>
+            <a:ext cx="502920" cy="365760"/>
           </a:xfrm>
           <a:prstGeom prst="rect">
             <a:avLst/>
@@ -7927,7 +7923,7 @@
               <a:buNone/>
             </a:pPr>
             <a:r>
-              <a:rPr lang="en-US" sz="1200" dirty="0">
+              <a:rPr lang="en-US" sz="1100" dirty="0">
                 <a:solidFill>
                   <a:srgbClr val="8A93A6"/>
                 </a:solidFill>
@@ -7937,7 +7933,7 @@
               </a:rPr>
               <a:t>11</a:t>
             </a:r>
-            <a:endParaRPr lang="en-US" sz="1200" dirty="0"/>
+            <a:endParaRPr lang="en-US" sz="1100" dirty="0"/>
           </a:p>
         </p:txBody>
       </p:sp>
@@ -7950,7 +7946,7 @@
         <p:spPr>
           <a:xfrm>
             <a:off x="548640" y="6446520"/>
-            <a:ext cx="5486400" cy="274320"/>
+            <a:ext cx="6400800" cy="274320"/>
           </a:xfrm>
           <a:prstGeom prst="rect">
             <a:avLst/>
@@ -7974,7 +7970,7 @@
                 <a:ea typeface="Malgun Gothic" pitchFamily="34" charset="-122"/>
                 <a:cs typeface="Malgun Gothic" pitchFamily="34" charset="-120"/>
               </a:rPr>
-              <a:t>해아림 · 서빙 → MLOps → AIOps</a:t>
+              <a:t>해아림 · 태양광 시간별 발전량 예측 · 서빙 → MLOps → AIOps</a:t>
             </a:r>
             <a:endParaRPr lang="en-US" sz="900" dirty="0"/>
           </a:p>
@@ -7982,7 +7978,7 @@
       </p:sp>
       <p:pic>
         <p:nvPicPr>
-          <p:cNvPr id="6" name="Image 0" descr="preencoded.png">    </p:cNvPr>
+          <p:cNvPr id="7" name="Image 0" descr="preencoded.png">    </p:cNvPr>
           <p:cNvPicPr>
             <a:picLocks noChangeAspect="1"/>
           </p:cNvPicPr>
@@ -7997,7 +7993,7 @@
         <p:spPr>
           <a:xfrm>
             <a:off x="548640" y="1463040"/>
-            <a:ext cx="7680960" cy="4663440"/>
+            <a:ext cx="7772400" cy="4543865"/>
           </a:xfrm>
           <a:prstGeom prst="rect">
             <a:avLst/>
@@ -8006,14 +8002,14 @@
       </p:pic>
       <p:sp>
         <p:nvSpPr>
-          <p:cNvPr id="7" name="Shape 4"/>
+          <p:cNvPr id="8" name="Shape 4"/>
           <p:cNvSpPr/>
           <p:nvPr/>
         </p:nvSpPr>
         <p:spPr>
           <a:xfrm>
-            <a:off x="8458200" y="1463040"/>
-            <a:ext cx="3154680" cy="1097280"/>
+            <a:off x="8503920" y="1463040"/>
+            <a:ext cx="3108960" cy="1097280"/>
           </a:xfrm>
           <a:prstGeom prst="roundRect">
             <a:avLst>
@@ -8040,13 +8036,13 @@
       </p:sp>
       <p:sp>
         <p:nvSpPr>
-          <p:cNvPr id="8" name="Text 5"/>
+          <p:cNvPr id="9" name="Text 5"/>
           <p:cNvSpPr txBox="1"/>
           <p:nvPr/>
         </p:nvSpPr>
         <p:spPr>
           <a:xfrm>
-            <a:off x="8613648" y="1554480"/>
+            <a:off x="8659368" y="1554480"/>
             <a:ext cx="2834640" cy="274320"/>
           </a:xfrm>
           <a:prstGeom prst="rect">
@@ -8079,14 +8075,14 @@
       </p:sp>
       <p:sp>
         <p:nvSpPr>
-          <p:cNvPr id="9" name="Text 6"/>
+          <p:cNvPr id="10" name="Text 6"/>
           <p:cNvSpPr txBox="1"/>
           <p:nvPr/>
         </p:nvSpPr>
         <p:spPr>
           <a:xfrm>
-            <a:off x="8613648" y="1847088"/>
-            <a:ext cx="2880360" cy="685800"/>
+            <a:off x="8659368" y="1847088"/>
+            <a:ext cx="2834640" cy="685800"/>
           </a:xfrm>
           <a:prstGeom prst="rect">
             <a:avLst/>
@@ -8110,7 +8106,7 @@
                 <a:ea typeface="Malgun Gothic" pitchFamily="34" charset="-122"/>
                 <a:cs typeface="Malgun Gothic" pitchFamily="34" charset="-120"/>
               </a:rPr>
-              <a:t>저성능 지속 → 10/6~11 완전 정지 → 11월 복구. sudden + recurring</a:t>
+              <a:t>저성능 지속 → 10/6~11 완전 정지 → 11월 복구. 급작스럽고 되돌아오는 모양</a:t>
             </a:r>
             <a:endParaRPr lang="en-US" sz="980" dirty="0"/>
           </a:p>
@@ -8118,14 +8114,14 @@
       </p:sp>
       <p:sp>
         <p:nvSpPr>
-          <p:cNvPr id="10" name="Shape 7"/>
+          <p:cNvPr id="11" name="Shape 7"/>
           <p:cNvSpPr/>
           <p:nvPr/>
         </p:nvSpPr>
         <p:spPr>
           <a:xfrm>
-            <a:off x="8458200" y="2679192"/>
-            <a:ext cx="3154680" cy="1097280"/>
+            <a:off x="8503920" y="2679192"/>
+            <a:ext cx="3108960" cy="1097280"/>
           </a:xfrm>
           <a:prstGeom prst="roundRect">
             <a:avLst>
@@ -8152,13 +8148,13 @@
       </p:sp>
       <p:sp>
         <p:nvSpPr>
-          <p:cNvPr id="11" name="Text 8"/>
+          <p:cNvPr id="12" name="Text 8"/>
           <p:cNvSpPr txBox="1"/>
           <p:nvPr/>
         </p:nvSpPr>
         <p:spPr>
           <a:xfrm>
-            <a:off x="8613648" y="2770632"/>
+            <a:off x="8659368" y="2770632"/>
             <a:ext cx="2834640" cy="274320"/>
           </a:xfrm>
           <a:prstGeom prst="rect">
@@ -8191,14 +8187,14 @@
       </p:sp>
       <p:sp>
         <p:nvSpPr>
-          <p:cNvPr id="12" name="Text 9"/>
+          <p:cNvPr id="13" name="Text 9"/>
           <p:cNvSpPr txBox="1"/>
           <p:nvPr/>
         </p:nvSpPr>
         <p:spPr>
           <a:xfrm>
-            <a:off x="8613648" y="3063240"/>
-            <a:ext cx="2880360" cy="685800"/>
+            <a:off x="8659368" y="3063240"/>
+            <a:ext cx="2834640" cy="685800"/>
           </a:xfrm>
           <a:prstGeom prst="rect">
             <a:avLst/>
@@ -8222,7 +8218,7 @@
                 <a:ea typeface="Malgun Gothic" pitchFamily="34" charset="-122"/>
                 <a:cs typeface="Malgun Gothic" pitchFamily="34" charset="-120"/>
               </a:rPr>
-              <a:t>12/16 PR 0.96 → 0.46 하루 만에, 1/9 복구. sudden, 일시적</a:t>
+              <a:t>12/16 PR 0.96 → 0.46 하루 만에 급락, 1/9 복구. 일시적 계단형</a:t>
             </a:r>
             <a:endParaRPr lang="en-US" sz="980" dirty="0"/>
           </a:p>
@@ -8230,14 +8226,14 @@
       </p:sp>
       <p:sp>
         <p:nvSpPr>
-          <p:cNvPr id="13" name="Shape 10"/>
+          <p:cNvPr id="14" name="Shape 10"/>
           <p:cNvSpPr/>
           <p:nvPr/>
         </p:nvSpPr>
         <p:spPr>
           <a:xfrm>
-            <a:off x="8458200" y="3895344"/>
-            <a:ext cx="3154680" cy="1097280"/>
+            <a:off x="8503920" y="3895344"/>
+            <a:ext cx="3108960" cy="1097280"/>
           </a:xfrm>
           <a:prstGeom prst="roundRect">
             <a:avLst>
@@ -8264,13 +8260,13 @@
       </p:sp>
       <p:sp>
         <p:nvSpPr>
-          <p:cNvPr id="14" name="Text 11"/>
+          <p:cNvPr id="15" name="Text 11"/>
           <p:cNvSpPr txBox="1"/>
           <p:nvPr/>
         </p:nvSpPr>
         <p:spPr>
           <a:xfrm>
-            <a:off x="8613648" y="3986784"/>
+            <a:off x="8659368" y="3986784"/>
             <a:ext cx="2834640" cy="274320"/>
           </a:xfrm>
           <a:prstGeom prst="rect">
@@ -8303,14 +8299,14 @@
       </p:sp>
       <p:sp>
         <p:nvSpPr>
-          <p:cNvPr id="15" name="Text 12"/>
+          <p:cNvPr id="16" name="Text 12"/>
           <p:cNvSpPr txBox="1"/>
           <p:nvPr/>
         </p:nvSpPr>
         <p:spPr>
           <a:xfrm>
-            <a:off x="8613648" y="4279392"/>
-            <a:ext cx="2880360" cy="685800"/>
+            <a:off x="8659368" y="4279392"/>
+            <a:ext cx="2834640" cy="685800"/>
           </a:xfrm>
           <a:prstGeom prst="rect">
             <a:avLst/>
@@ -8334,7 +8330,7 @@
                 <a:ea typeface="Malgun Gothic" pitchFamily="34" charset="-122"/>
                 <a:cs typeface="Malgun Gothic" pitchFamily="34" charset="-120"/>
               </a:rPr>
-              <a:t>3→8월 0.96 → 0.64 점진 하락, 같은 부지 영흥2는 정상 → 날씨 아님. incremental</a:t>
+              <a:t>3월 0.96 → 8월 0.64 점진 하락. 같은 부지 영흥2는 정상이라 날씨가 아니다</a:t>
             </a:r>
             <a:endParaRPr lang="en-US" sz="980" dirty="0"/>
           </a:p>
@@ -8342,14 +8338,14 @@
       </p:sp>
       <p:sp>
         <p:nvSpPr>
-          <p:cNvPr id="16" name="Shape 13"/>
+          <p:cNvPr id="17" name="Shape 13"/>
           <p:cNvSpPr/>
           <p:nvPr/>
         </p:nvSpPr>
         <p:spPr>
           <a:xfrm>
-            <a:off x="8458200" y="5111496"/>
-            <a:ext cx="3154680" cy="1097280"/>
+            <a:off x="8503920" y="5111496"/>
+            <a:ext cx="3108960" cy="1097280"/>
           </a:xfrm>
           <a:prstGeom prst="roundRect">
             <a:avLst>
@@ -8376,13 +8372,13 @@
       </p:sp>
       <p:sp>
         <p:nvSpPr>
-          <p:cNvPr id="17" name="Text 14"/>
+          <p:cNvPr id="18" name="Text 14"/>
           <p:cNvSpPr txBox="1"/>
           <p:nvPr/>
         </p:nvSpPr>
         <p:spPr>
           <a:xfrm>
-            <a:off x="8613648" y="5202936"/>
+            <a:off x="8659368" y="5202936"/>
             <a:ext cx="2834640" cy="274320"/>
           </a:xfrm>
           <a:prstGeom prst="rect">
@@ -8415,14 +8411,14 @@
       </p:sp>
       <p:sp>
         <p:nvSpPr>
-          <p:cNvPr id="18" name="Text 15"/>
+          <p:cNvPr id="19" name="Text 15"/>
           <p:cNvSpPr txBox="1"/>
           <p:nvPr/>
         </p:nvSpPr>
         <p:spPr>
           <a:xfrm>
-            <a:off x="8613648" y="5495544"/>
-            <a:ext cx="2880360" cy="685800"/>
+            <a:off x="8659368" y="5495544"/>
+            <a:ext cx="2834640" cy="685800"/>
           </a:xfrm>
           <a:prstGeom prst="rect">
             <a:avLst/>
@@ -8446,7 +8442,7 @@
                 <a:ea typeface="Malgun Gothic" pitchFamily="34" charset="-122"/>
                 <a:cs typeface="Malgun Gothic" pitchFamily="34" charset="-120"/>
               </a:rPr>
-              <a:t>세 건 모두 [ALERT] 만 남기고 재학습 차단. 규칙 3개를 이 사례로 보강 (창 전 하락, ±7일 동시성, 60일 추세)</a:t>
+              <a:t>세 건 모두 [ALERT]만 남기고 재학습을 막았다. 이 사례로 규칙 3개를 보강했다 (창 전 하락, ±7일 동시성, 60일 추세)</a:t>
             </a:r>
             <a:endParaRPr lang="en-US" sz="980" dirty="0"/>
           </a:p>
@@ -8466,7 +8462,7 @@
     <p:bg>
       <p:bgPr>
         <a:solidFill>
-          <a:srgbClr val="F6F7FB"/>
+          <a:srgbClr val="FFFFFF"/>
         </a:solidFill>
       </p:bgPr>
     </p:bg>
@@ -8492,8 +8488,8 @@
         </p:nvSpPr>
         <p:spPr>
           <a:xfrm>
-            <a:off x="548640" y="347472"/>
-            <a:ext cx="10241280" cy="640080"/>
+            <a:off x="548640" y="365760"/>
+            <a:ext cx="10332720" cy="640080"/>
           </a:xfrm>
           <a:prstGeom prst="rect">
             <a:avLst/>
@@ -8509,7 +8505,7 @@
               <a:buNone/>
             </a:pPr>
             <a:r>
-              <a:rPr lang="en-US" sz="2600" b="1" dirty="0">
+              <a:rPr lang="en-US" sz="2700" b="1" dirty="0">
                 <a:solidFill>
                   <a:srgbClr val="1A1F2B"/>
                 </a:solidFill>
@@ -8519,7 +8515,7 @@
               </a:rPr>
               <a:t>모델 드리프트: 여러 곳이 같이 틀리거나, 위로 틀리거나</a:t>
             </a:r>
-            <a:endParaRPr lang="en-US" sz="2600" dirty="0"/>
+            <a:endParaRPr lang="en-US" sz="2700" dirty="0"/>
           </a:p>
         </p:txBody>
       </p:sp>
@@ -8531,8 +8527,8 @@
         </p:nvSpPr>
         <p:spPr>
           <a:xfrm>
-            <a:off x="548640" y="960120"/>
-            <a:ext cx="10607040" cy="384048"/>
+            <a:off x="548640" y="987552"/>
+            <a:ext cx="10789920" cy="384048"/>
           </a:xfrm>
           <a:prstGeom prst="rect">
             <a:avLst/>
@@ -8556,7 +8552,7 @@
                 <a:ea typeface="Malgun Gothic" pitchFamily="34" charset="-122"/>
                 <a:cs typeface="Malgun Gothic" pitchFamily="34" charset="-120"/>
               </a:rPr>
-              <a:t>재학습이 정답인 경우는 "같은 입력에서 발전 패턴이 바뀌었는데 메타데이터 수정으로 못 고치는" 경우</a:t>
+              <a:t>재학습이 정답인 경우는 "같은 입력에서 발전 패턴이 바뀌었는데 메타데이터 수정으로는 못 고치는" 경우다</a:t>
             </a:r>
             <a:endParaRPr lang="en-US" sz="1300" dirty="0"/>
           </a:p>
@@ -8570,8 +8566,8 @@
         </p:nvSpPr>
         <p:spPr>
           <a:xfrm>
-            <a:off x="11155680" y="384048"/>
-            <a:ext cx="548640" cy="365760"/>
+            <a:off x="11155680" y="411480"/>
+            <a:ext cx="502920" cy="365760"/>
           </a:xfrm>
           <a:prstGeom prst="rect">
             <a:avLst/>
@@ -8587,7 +8583,7 @@
               <a:buNone/>
             </a:pPr>
             <a:r>
-              <a:rPr lang="en-US" sz="1200" dirty="0">
+              <a:rPr lang="en-US" sz="1100" dirty="0">
                 <a:solidFill>
                   <a:srgbClr val="8A93A6"/>
                 </a:solidFill>
@@ -8597,7 +8593,7 @@
               </a:rPr>
               <a:t>12</a:t>
             </a:r>
-            <a:endParaRPr lang="en-US" sz="1200" dirty="0"/>
+            <a:endParaRPr lang="en-US" sz="1100" dirty="0"/>
           </a:p>
         </p:txBody>
       </p:sp>
@@ -8610,7 +8606,7 @@
         <p:spPr>
           <a:xfrm>
             <a:off x="548640" y="6446520"/>
-            <a:ext cx="5486400" cy="274320"/>
+            <a:ext cx="6400800" cy="274320"/>
           </a:xfrm>
           <a:prstGeom prst="rect">
             <a:avLst/>
@@ -8634,7 +8630,7 @@
                 <a:ea typeface="Malgun Gothic" pitchFamily="34" charset="-122"/>
                 <a:cs typeface="Malgun Gothic" pitchFamily="34" charset="-120"/>
               </a:rPr>
-              <a:t>해아림 · 서빙 → MLOps → AIOps</a:t>
+              <a:t>해아림 · 태양광 시간별 발전량 예측 · 서빙 → MLOps → AIOps</a:t>
             </a:r>
             <a:endParaRPr lang="en-US" sz="900" dirty="0"/>
           </a:p>
@@ -8642,7 +8638,7 @@
       </p:sp>
       <p:pic>
         <p:nvPicPr>
-          <p:cNvPr id="6" name="Image 0" descr="preencoded.png">    </p:cNvPr>
+          <p:cNvPr id="7" name="Image 0" descr="preencoded.png">    </p:cNvPr>
           <p:cNvPicPr>
             <a:picLocks noChangeAspect="1"/>
           </p:cNvPicPr>
@@ -8666,7 +8662,7 @@
       </p:pic>
       <p:sp>
         <p:nvSpPr>
-          <p:cNvPr id="7" name="Shape 4"/>
+          <p:cNvPr id="8" name="Shape 4"/>
           <p:cNvSpPr/>
           <p:nvPr/>
         </p:nvSpPr>
@@ -8700,7 +8696,7 @@
       </p:sp>
       <p:sp>
         <p:nvSpPr>
-          <p:cNvPr id="8" name="Text 5"/>
+          <p:cNvPr id="9" name="Text 5"/>
           <p:cNvSpPr txBox="1"/>
           <p:nvPr/>
         </p:nvSpPr>
@@ -8739,7 +8735,7 @@
       </p:sp>
       <p:sp>
         <p:nvSpPr>
-          <p:cNvPr id="9" name="Text 6"/>
+          <p:cNvPr id="10" name="Text 6"/>
           <p:cNvSpPr txBox="1"/>
           <p:nvPr/>
         </p:nvSpPr>
@@ -8770,7 +8766,7 @@
                 <a:ea typeface="Malgun Gothic" pitchFamily="34" charset="-122"/>
                 <a:cs typeface="Malgun Gothic" pitchFamily="34" charset="-120"/>
               </a:rPr>
-              <a:t>같은 일사량에서 더운 시간대 발전이 과거보다 줄어든 상태가 3주 지속. 더운 경남 4곳만 임계값을 넘고 경북 2곳은 이내 → 동시성 0.67 → 재학습 → 새 오차 8.39% 로 v2 승격. 우기 패턴만 바뀐 A 는 재학습하지 않는다.</a:t>
+              <a:t>같은 일사량에서 더운 시간대 발전이 과거보다 줄어든 상태가 3주 이어진다. 더운 경남 4곳만 임계값을 넘고 경북 2곳은 이내라 동시성 0.67로 모델 드리프트. 재학습 후 새 오차 8.39%로 v2 승격. 우기 패턴만 바뀐 A는 재학습하지 않는다.</a:t>
             </a:r>
             <a:endParaRPr lang="en-US" sz="1050" dirty="0"/>
           </a:p>
@@ -8778,7 +8774,7 @@
       </p:sp>
       <p:sp>
         <p:nvSpPr>
-          <p:cNvPr id="10" name="Shape 7"/>
+          <p:cNvPr id="11" name="Shape 7"/>
           <p:cNvSpPr/>
           <p:nvPr/>
         </p:nvSpPr>
@@ -8812,7 +8808,7 @@
       </p:sp>
       <p:sp>
         <p:nvSpPr>
-          <p:cNvPr id="11" name="Text 8"/>
+          <p:cNvPr id="12" name="Text 8"/>
           <p:cNvSpPr txBox="1"/>
           <p:nvPr/>
         </p:nvSpPr>
@@ -8851,7 +8847,7 @@
       </p:sp>
       <p:sp>
         <p:nvSpPr>
-          <p:cNvPr id="12" name="Text 9"/>
+          <p:cNvPr id="13" name="Text 9"/>
           <p:cNvSpPr txBox="1"/>
           <p:nvPr/>
         </p:nvSpPr>
@@ -8882,7 +8878,7 @@
                 <a:ea typeface="Malgun Gothic" pitchFamily="34" charset="-122"/>
                 <a:cs typeface="Malgun Gothic" pitchFamily="34" charset="-120"/>
               </a:rPr>
-              <a:t>2026-04~07 넉 달 동안 오차 10.6~11.6%, 실제가 기대보다 20% 많음. 구름·먼지·고장은 발전을 더 만들지 못하므로 틀린 쪽은 모델의 기준. 학습 끝에 고장 구간이 섞였거나 수리 후 "정상"이 위로 바뀐 것. PR &gt; 1.15 규칙이 한 곳이어도 재학습으로 보낸다.</a:t>
+              <a:t>2026년 4~7월 넉 달 동안 오차 10.6~11.6%, 실제가 기대보다 20% 많다. 구름·먼지·고장은 발전을 더 만들지 못하므로 틀린 쪽은 모델의 기준이다. 학습 끝에 고장 구간이 섞였거나 수리 후 "정상"이 위로 바뀐 것. PR &gt; 1.15 규칙은 한 곳이어도 재학습으로 보낸다.</a:t>
             </a:r>
             <a:endParaRPr lang="en-US" sz="1050" dirty="0"/>
           </a:p>
@@ -8890,14 +8886,14 @@
       </p:sp>
       <p:sp>
         <p:nvSpPr>
-          <p:cNvPr id="13" name="Shape 10"/>
+          <p:cNvPr id="14" name="Shape 10"/>
           <p:cNvSpPr/>
           <p:nvPr/>
         </p:nvSpPr>
         <p:spPr>
           <a:xfrm>
             <a:off x="548640" y="5349240"/>
-            <a:ext cx="6949440" cy="310896"/>
+            <a:ext cx="6949440" cy="329184"/>
           </a:xfrm>
           <a:prstGeom prst="roundRect">
             <a:avLst>
@@ -8917,13 +8913,13 @@
       </p:sp>
       <p:sp>
         <p:nvSpPr>
-          <p:cNvPr id="14" name="Shape 11"/>
+          <p:cNvPr id="15" name="Shape 11"/>
           <p:cNvSpPr/>
           <p:nvPr/>
         </p:nvSpPr>
         <p:spPr>
           <a:xfrm>
-            <a:off x="676656" y="5458968"/>
+            <a:off x="685800" y="5468112"/>
             <a:ext cx="91440" cy="91440"/>
           </a:xfrm>
           <a:prstGeom prst="ellipse">
@@ -8942,14 +8938,14 @@
       </p:sp>
       <p:sp>
         <p:nvSpPr>
-          <p:cNvPr id="15" name="Text 12"/>
+          <p:cNvPr id="16" name="Text 12"/>
           <p:cNvSpPr txBox="1"/>
           <p:nvPr/>
         </p:nvSpPr>
         <p:spPr>
           <a:xfrm>
-            <a:off x="822960" y="5349240"/>
-            <a:ext cx="6620256" cy="310896"/>
+            <a:off x="841248" y="5349240"/>
+            <a:ext cx="6583680" cy="329184"/>
           </a:xfrm>
           <a:prstGeom prst="rect">
             <a:avLst/>
@@ -8965,7 +8961,7 @@
               <a:buNone/>
             </a:pPr>
             <a:r>
-              <a:rPr lang="en-US" sz="1050" b="1" dirty="0">
+              <a:rPr lang="en-US" sz="1100" b="1" dirty="0">
                 <a:solidFill>
                   <a:srgbClr val="3B5BDB"/>
                 </a:solidFill>
@@ -8975,13 +8971,13 @@
               </a:rPr>
               <a:t>발전소는 기대보다 덜 만들 이유는 많지만 더 만들 이유는 없다 → 위로 틀리면 모델을 의심한다</a:t>
             </a:r>
-            <a:endParaRPr lang="en-US" sz="1050" dirty="0"/>
+            <a:endParaRPr lang="en-US" sz="1100" dirty="0"/>
           </a:p>
         </p:txBody>
       </p:sp>
       <p:sp>
         <p:nvSpPr>
-          <p:cNvPr id="16" name="Text 13"/>
+          <p:cNvPr id="17" name="Text 13"/>
           <p:cNvSpPr txBox="1"/>
           <p:nvPr/>
         </p:nvSpPr>
@@ -9012,7 +9008,7 @@
                 <a:ea typeface="Malgun Gothic" pitchFamily="34" charset="-122"/>
                 <a:cs typeface="Malgun Gothic" pitchFamily="34" charset="-120"/>
               </a:rPr>
-              <a:t>같은 20% 손실을 장마 창에 넣어도 임계값 미달 → 기후 시나리오는 맑은 폭염 창에 두었다</a:t>
+              <a:t>같은 20% 손실을 장마 창에 넣어도 임계값에 못 미친다 → 기후 시나리오는 맑은 폭염 창에 두었다</a:t>
             </a:r>
             <a:endParaRPr lang="en-US" sz="1000" dirty="0"/>
           </a:p>
@@ -9032,7 +9028,7 @@
     <p:bg>
       <p:bgPr>
         <a:solidFill>
-          <a:srgbClr val="F6F7FB"/>
+          <a:srgbClr val="FFFFFF"/>
         </a:solidFill>
       </p:bgPr>
     </p:bg>
@@ -9058,8 +9054,8 @@
         </p:nvSpPr>
         <p:spPr>
           <a:xfrm>
-            <a:off x="548640" y="347472"/>
-            <a:ext cx="10241280" cy="640080"/>
+            <a:off x="548640" y="365760"/>
+            <a:ext cx="10332720" cy="640080"/>
           </a:xfrm>
           <a:prstGeom prst="rect">
             <a:avLst/>
@@ -9075,7 +9071,7 @@
               <a:buNone/>
             </a:pPr>
             <a:r>
-              <a:rPr lang="en-US" sz="2600" b="1" dirty="0">
+              <a:rPr lang="en-US" sz="2700" b="1" dirty="0">
                 <a:solidFill>
                   <a:srgbClr val="1A1F2B"/>
                 </a:solidFill>
@@ -9085,7 +9081,7 @@
               </a:rPr>
               <a:t>실행 증빙 ① 대시보드: 설비는 멈추고, 모델 드리프트는 끝까지</a:t>
             </a:r>
-            <a:endParaRPr lang="en-US" sz="2600" dirty="0"/>
+            <a:endParaRPr lang="en-US" sz="2700" dirty="0"/>
           </a:p>
         </p:txBody>
       </p:sp>
@@ -9097,8 +9093,8 @@
         </p:nvSpPr>
         <p:spPr>
           <a:xfrm>
-            <a:off x="548640" y="960120"/>
-            <a:ext cx="10607040" cy="384048"/>
+            <a:off x="548640" y="987552"/>
+            <a:ext cx="10789920" cy="384048"/>
           </a:xfrm>
           <a:prstGeom prst="rect">
             <a:avLst/>
@@ -9122,7 +9118,7 @@
                 <a:ea typeface="Malgun Gothic" pitchFamily="34" charset="-122"/>
                 <a:cs typeface="Malgun Gothic" pitchFamily="34" charset="-120"/>
               </a:rPr>
-              <a:t>serving_app/static/index.html · 버튼 한 번으로 실적 구간 투입 → 판정 → 파이프라인 8단계 표시 (2026-10-01 실제 실행 캡처)</a:t>
+              <a:t>serving_app/static/index.html. 버튼 한 번으로 실적 구간 투입 → 판정 → 파이프라인 8단계 표시 (2026-10-01 실제 실행 캡처)</a:t>
             </a:r>
             <a:endParaRPr lang="en-US" sz="1300" dirty="0"/>
           </a:p>
@@ -9136,8 +9132,8 @@
         </p:nvSpPr>
         <p:spPr>
           <a:xfrm>
-            <a:off x="11155680" y="384048"/>
-            <a:ext cx="548640" cy="365760"/>
+            <a:off x="11155680" y="411480"/>
+            <a:ext cx="502920" cy="365760"/>
           </a:xfrm>
           <a:prstGeom prst="rect">
             <a:avLst/>
@@ -9153,7 +9149,7 @@
               <a:buNone/>
             </a:pPr>
             <a:r>
-              <a:rPr lang="en-US" sz="1200" dirty="0">
+              <a:rPr lang="en-US" sz="1100" dirty="0">
                 <a:solidFill>
                   <a:srgbClr val="8A93A6"/>
                 </a:solidFill>
@@ -9163,7 +9159,7 @@
               </a:rPr>
               <a:t>13</a:t>
             </a:r>
-            <a:endParaRPr lang="en-US" sz="1200" dirty="0"/>
+            <a:endParaRPr lang="en-US" sz="1100" dirty="0"/>
           </a:p>
         </p:txBody>
       </p:sp>
@@ -9176,7 +9172,7 @@
         <p:spPr>
           <a:xfrm>
             <a:off x="548640" y="6446520"/>
-            <a:ext cx="5486400" cy="274320"/>
+            <a:ext cx="6400800" cy="274320"/>
           </a:xfrm>
           <a:prstGeom prst="rect">
             <a:avLst/>
@@ -9200,7 +9196,7 @@
                 <a:ea typeface="Malgun Gothic" pitchFamily="34" charset="-122"/>
                 <a:cs typeface="Malgun Gothic" pitchFamily="34" charset="-120"/>
               </a:rPr>
-              <a:t>해아림 · 서빙 → MLOps → AIOps</a:t>
+              <a:t>해아림 · 태양광 시간별 발전량 예측 · 서빙 → MLOps → AIOps</a:t>
             </a:r>
             <a:endParaRPr lang="en-US" sz="900" dirty="0"/>
           </a:p>
@@ -9263,7 +9259,7 @@
         <p:spPr>
           <a:xfrm>
             <a:off x="548640" y="4617720"/>
-            <a:ext cx="5440680" cy="310896"/>
+            <a:ext cx="5440680" cy="329184"/>
           </a:xfrm>
           <a:prstGeom prst="roundRect">
             <a:avLst>
@@ -9289,7 +9285,7 @@
         </p:nvSpPr>
         <p:spPr>
           <a:xfrm>
-            <a:off x="676656" y="4727448"/>
+            <a:off x="685800" y="4736592"/>
             <a:ext cx="91440" cy="91440"/>
           </a:xfrm>
           <a:prstGeom prst="ellipse">
@@ -9314,8 +9310,8 @@
         </p:nvSpPr>
         <p:spPr>
           <a:xfrm>
-            <a:off x="822960" y="4617720"/>
-            <a:ext cx="5111496" cy="310896"/>
+            <a:off x="841248" y="4617720"/>
+            <a:ext cx="5074920" cy="329184"/>
           </a:xfrm>
           <a:prstGeom prst="rect">
             <a:avLst/>
@@ -9331,7 +9327,7 @@
               <a:buNone/>
             </a:pPr>
             <a:r>
-              <a:rPr lang="en-US" sz="1050" b="1" dirty="0">
+              <a:rPr lang="en-US" sz="1100" b="1" dirty="0">
                 <a:solidFill>
                   <a:srgbClr val="D64545"/>
                 </a:solidFill>
@@ -9339,9 +9335,9 @@
                 <a:ea typeface="Malgun Gothic" pitchFamily="34" charset="-122"/>
                 <a:cs typeface="Malgun Gothic" pitchFamily="34" charset="-120"/>
               </a:rPr>
-              <a:t>설비 고장 ×0.5 → equipment · 운영자 알림, 재학습 트리거 대기</a:t>
+              <a:t>설비 고장 ×0.5 → 설비 이상 · 운영자 알림, 재학습 트리거 대기</a:t>
             </a:r>
-            <a:endParaRPr lang="en-US" sz="1050" dirty="0"/>
+            <a:endParaRPr lang="en-US" sz="1100" dirty="0"/>
           </a:p>
         </p:txBody>
       </p:sp>
@@ -9354,7 +9350,7 @@
         <p:spPr>
           <a:xfrm>
             <a:off x="6172200" y="4617720"/>
-            <a:ext cx="5440680" cy="310896"/>
+            <a:ext cx="5440680" cy="329184"/>
           </a:xfrm>
           <a:prstGeom prst="roundRect">
             <a:avLst>
@@ -9380,7 +9376,7 @@
         </p:nvSpPr>
         <p:spPr>
           <a:xfrm>
-            <a:off x="6300216" y="4727448"/>
+            <a:off x="6309360" y="4736592"/>
             <a:ext cx="91440" cy="91440"/>
           </a:xfrm>
           <a:prstGeom prst="ellipse">
@@ -9405,8 +9401,8 @@
         </p:nvSpPr>
         <p:spPr>
           <a:xfrm>
-            <a:off x="6446520" y="4617720"/>
-            <a:ext cx="5111496" cy="310896"/>
+            <a:off x="6464808" y="4617720"/>
+            <a:ext cx="5074920" cy="329184"/>
           </a:xfrm>
           <a:prstGeom prst="rect">
             <a:avLst/>
@@ -9422,7 +9418,7 @@
               <a:buNone/>
             </a:pPr>
             <a:r>
-              <a:rPr lang="en-US" sz="1050" b="1" dirty="0">
+              <a:rPr lang="en-US" sz="1100" b="1" dirty="0">
                 <a:solidFill>
                   <a:srgbClr val="1B9E6A"/>
                 </a:solidFill>
@@ -9430,9 +9426,9 @@
                 <a:ea typeface="Malgun Gothic" pitchFamily="34" charset="-122"/>
                 <a:cs typeface="Malgun Gothic" pitchFamily="34" charset="-120"/>
               </a:rPr>
-              <a:t>기후 B → model_drift · 백그라운드 재학습 → 게이트 → v2 승격, 8단계 완료</a:t>
+              <a:t>기후 B → 모델 드리프트 · 백그라운드 재학습 → 게이트 → v2 승격, 8단계 완료</a:t>
             </a:r>
-            <a:endParaRPr lang="en-US" sz="1050" dirty="0"/>
+            <a:endParaRPr lang="en-US" sz="1100" dirty="0"/>
           </a:p>
         </p:txBody>
       </p:sp>
@@ -9469,7 +9465,7 @@
                 <a:ea typeface="Malgun Gothic" pitchFamily="34" charset="-122"/>
                 <a:cs typeface="Malgun Gothic" pitchFamily="34" charset="-120"/>
               </a:rPr>
-              <a:t>상태 줄: 오차 16.29%, PR 0.66, D-1 예보 입력 오차 14.58%. 파이프라인은 4단계(원인 분류)에서 멈추고 재학습 트리거는 "대기 중". aiops.log 에는 [WARN] + [ALERT] 두 줄.</a:t>
+              <a:t>상태 줄: 오차 16.29%, PR 0.66, D-1 예보 입력 오차 14.58%. 파이프라인은 4단계(원인 분류)에서 멈추고 재학습 트리거는 "대기 중"이다. aiops.log에는 [WARN]과 [ALERT] 두 줄이 남는다.</a:t>
             </a:r>
             <a:endParaRPr lang="en-US" sz="1050" dirty="0"/>
           </a:p>
@@ -9508,7 +9504,7 @@
                 <a:ea typeface="Malgun Gothic" pitchFamily="34" charset="-122"/>
                 <a:cs typeface="Malgun Gothic" pitchFamily="34" charset="-120"/>
               </a:rPr>
-              <a:t>상태 줄: new_error 8.39% 로 새 버전 승격. 8단계 모두 "완료". 상단 배지는 학습 중 "재학습 running" 으로 바뀌었다가 끝나면 모델 버전이 v2 로 바뀐다.</a:t>
+              <a:t>상태 줄: new_error 8.39%로 새 버전 승격. 8단계 모두 "완료"다. 상단 배지는 학습 중 "재학습 running"으로 바뀌었다가 끝나면 모델 버전이 v2로 바뀐다.</a:t>
             </a:r>
             <a:endParaRPr lang="en-US" sz="1050" dirty="0"/>
           </a:p>
@@ -9528,7 +9524,7 @@
     <p:bg>
       <p:bgPr>
         <a:solidFill>
-          <a:srgbClr val="F6F7FB"/>
+          <a:srgbClr val="FFFFFF"/>
         </a:solidFill>
       </p:bgPr>
     </p:bg>
@@ -9554,8 +9550,8 @@
         </p:nvSpPr>
         <p:spPr>
           <a:xfrm>
-            <a:off x="548640" y="347472"/>
-            <a:ext cx="10241280" cy="640080"/>
+            <a:off x="548640" y="365760"/>
+            <a:ext cx="10332720" cy="640080"/>
           </a:xfrm>
           <a:prstGeom prst="rect">
             <a:avLst/>
@@ -9571,7 +9567,7 @@
               <a:buNone/>
             </a:pPr>
             <a:r>
-              <a:rPr lang="en-US" sz="2600" b="1" dirty="0">
+              <a:rPr lang="en-US" sz="2700" b="1" dirty="0">
                 <a:solidFill>
                   <a:srgbClr val="1A1F2B"/>
                 </a:solidFill>
@@ -9579,9 +9575,9 @@
                 <a:ea typeface="Malgun Gothic" pitchFamily="34" charset="-122"/>
                 <a:cs typeface="Malgun Gothic" pitchFamily="34" charset="-120"/>
               </a:rPr>
-              <a:t>실행 증빙 ② 학습 중에도 응답하고, 로그가 순서대로 남는다</a:t>
+              <a:t>실행 증빙 ② 학습 중에도 응답하고, 로그는 순서대로 남는다</a:t>
             </a:r>
-            <a:endParaRPr lang="en-US" sz="2600" dirty="0"/>
+            <a:endParaRPr lang="en-US" sz="2700" dirty="0"/>
           </a:p>
         </p:txBody>
       </p:sp>
@@ -9593,8 +9589,8 @@
         </p:nvSpPr>
         <p:spPr>
           <a:xfrm>
-            <a:off x="548640" y="960120"/>
-            <a:ext cx="10607040" cy="384048"/>
+            <a:off x="548640" y="987552"/>
+            <a:ext cx="10789920" cy="384048"/>
           </a:xfrm>
           <a:prstGeom prst="rect">
             <a:avLst/>
@@ -9618,7 +9614,7 @@
                 <a:ea typeface="Malgun Gothic" pitchFamily="34" charset="-122"/>
                 <a:cs typeface="Malgun Gothic" pitchFamily="34" charset="-120"/>
               </a:rPr>
-              <a:t>/health 가 재학습 running 을 보여주는 동안 /predict 는 production-v1 로 응답. 끝나면 aiops.log 에 [OK] promoted</a:t>
+              <a:t>/health가 재학습 running을 보여주는 동안 /predict는 production-v1로 응답한다. 끝나면 aiops.log에 [OK] promoted가 남는다</a:t>
             </a:r>
             <a:endParaRPr lang="en-US" sz="1300" dirty="0"/>
           </a:p>
@@ -9632,8 +9628,8 @@
         </p:nvSpPr>
         <p:spPr>
           <a:xfrm>
-            <a:off x="11155680" y="384048"/>
-            <a:ext cx="548640" cy="365760"/>
+            <a:off x="11155680" y="411480"/>
+            <a:ext cx="502920" cy="365760"/>
           </a:xfrm>
           <a:prstGeom prst="rect">
             <a:avLst/>
@@ -9649,7 +9645,7 @@
               <a:buNone/>
             </a:pPr>
             <a:r>
-              <a:rPr lang="en-US" sz="1200" dirty="0">
+              <a:rPr lang="en-US" sz="1100" dirty="0">
                 <a:solidFill>
                   <a:srgbClr val="8A93A6"/>
                 </a:solidFill>
@@ -9659,7 +9655,7 @@
               </a:rPr>
               <a:t>14</a:t>
             </a:r>
-            <a:endParaRPr lang="en-US" sz="1200" dirty="0"/>
+            <a:endParaRPr lang="en-US" sz="1100" dirty="0"/>
           </a:p>
         </p:txBody>
       </p:sp>
@@ -9672,7 +9668,7 @@
         <p:spPr>
           <a:xfrm>
             <a:off x="548640" y="6446520"/>
-            <a:ext cx="5486400" cy="274320"/>
+            <a:ext cx="6400800" cy="274320"/>
           </a:xfrm>
           <a:prstGeom prst="rect">
             <a:avLst/>
@@ -9696,7 +9692,7 @@
                 <a:ea typeface="Malgun Gothic" pitchFamily="34" charset="-122"/>
                 <a:cs typeface="Malgun Gothic" pitchFamily="34" charset="-120"/>
               </a:rPr>
-              <a:t>해아림 · 서빙 → MLOps → AIOps</a:t>
+              <a:t>해아림 · 태양광 시간별 발전량 예측 · 서빙 → MLOps → AIOps</a:t>
             </a:r>
             <a:endParaRPr lang="en-US" sz="900" dirty="0"/>
           </a:p>
@@ -9743,7 +9739,7 @@
             </a:avLst>
           </a:prstGeom>
           <a:solidFill>
-            <a:srgbClr val="F0F2F7"/>
+            <a:srgbClr val="F3F5F9"/>
           </a:solidFill>
           <a:ln w="9525">
             <a:solidFill>
@@ -9793,7 +9789,7 @@
                 <a:ea typeface="Consolas" pitchFamily="34" charset="-122"/>
                 <a:cs typeface="Consolas" pitchFamily="34" charset="-120"/>
               </a:rPr>
-              <a:t>2026-10-01 17:00:50,968 [WARNING] [WARN] drift detected (cause=equipment, plant=samcheonpo_2, err=16.29% (thr 10.36%), pr_recent=0.464, pr_before=0.766, fleet_share=0.0)</a:t>
+              <a:t>17:00:50,968 [WARNING] [WARN] drift detected (cause=equipment, plant=samcheonpo_2, err=16.29% (thr 10.36%), pr_recent=0.464, pr_before=0.766, fleet_share=0.0)</a:t>
             </a:r>
             <a:endParaRPr lang="en-US" sz="750" dirty="0"/>
           </a:p>
@@ -9810,7 +9806,7 @@
                 <a:ea typeface="Consolas" pitchFamily="34" charset="-122"/>
                 <a:cs typeface="Consolas" pitchFamily="34" charset="-120"/>
               </a:rPr>
-              <a:t>2026-10-01 17:00:50,968 [WARNING] [ALERT] equipment anomaly suspected at samcheonpo_2 (PR 0.464) - retrain blocked, operator notified</a:t>
+              <a:t>17:00:50,968 [WARNING] [ALERT] equipment anomaly suspected at samcheonpo_2 (PR 0.464) - retrain blocked, operator notified</a:t>
             </a:r>
             <a:endParaRPr lang="en-US" sz="750" dirty="0"/>
           </a:p>
@@ -9827,7 +9823,7 @@
                 <a:ea typeface="Consolas" pitchFamily="34" charset="-122"/>
                 <a:cs typeface="Consolas" pitchFamily="34" charset="-120"/>
               </a:rPr>
-              <a:t>2026-10-01 17:00:57,357 [WARNING] [WARN] drift detected (cause=equipment, plant=yeongheung5_1, err=11.69% (thr 10.36%), pr_recent=0.678, pr_before=0.653, fleet_share=0.5)</a:t>
+              <a:t>17:00:57,357 [WARNING] [WARN] drift detected (cause=equipment, plant=yeongheung5_1, err=11.69% (thr 10.36%), pr_recent=0.678, pr_before=0.653, fleet_share=0.5)</a:t>
             </a:r>
             <a:endParaRPr lang="en-US" sz="750" dirty="0"/>
           </a:p>
@@ -9844,7 +9840,7 @@
                 <a:ea typeface="Consolas" pitchFamily="34" charset="-122"/>
                 <a:cs typeface="Consolas" pitchFamily="34" charset="-120"/>
               </a:rPr>
-              <a:t>2026-10-01 17:00:57,357 [WARNING] [ALERT] equipment anomaly suspected at yeongheung5_1 (PR 0.678) - retrain blocked, operator notified</a:t>
+              <a:t>17:00:57,357 [WARNING] [ALERT] equipment anomaly suspected at yeongheung5_1 (PR 0.678) - retrain blocked, operator notified</a:t>
             </a:r>
             <a:endParaRPr lang="en-US" sz="750" dirty="0"/>
           </a:p>
@@ -9861,7 +9857,7 @@
                 <a:ea typeface="Consolas" pitchFamily="34" charset="-122"/>
                 <a:cs typeface="Consolas" pitchFamily="34" charset="-120"/>
               </a:rPr>
-              <a:t>2026-10-01 17:01:24,477 [WARNING] [WARN] drift detected - triggering retrain (cause=model_drift, plant=samcheonpo_2, err=12.92% (thr 10.36%), pr_recent=0.712, pr_before=0.75, fleet_share=0.67)</a:t>
+              <a:t>17:01:24,477 [WARNING] [WARN] drift detected - triggering retrain (cause=model_drift, plant=samcheonpo_2, err=12.92% (thr 10.36%), pr_recent=0.712, pr_before=0.75, fleet_share=0.67)</a:t>
             </a:r>
             <a:endParaRPr lang="en-US" sz="750" dirty="0"/>
           </a:p>
@@ -9878,7 +9874,7 @@
                 <a:ea typeface="Consolas" pitchFamily="34" charset="-122"/>
                 <a:cs typeface="Consolas" pitchFamily="34" charset="-120"/>
               </a:rPr>
-              <a:t>2026-10-01 17:01:24,479 [INFO] [INFO] retrain triggered (window=last_30_days, plants=doosan_1,gyeongsang_1,samcheonpo_2,samcheonpo_3, job=345ed0baa11d)</a:t>
+              <a:t>17:01:24,479 [INFO] [INFO] retrain triggered (window=last_30_days, plants=doosan_1,gyeongsang_1,samcheonpo_2,samcheonpo_3, job=345ed0baa11d)</a:t>
             </a:r>
             <a:endParaRPr lang="en-US" sz="750" dirty="0"/>
           </a:p>
@@ -9895,7 +9891,7 @@
                 <a:ea typeface="Consolas" pitchFamily="34" charset="-122"/>
                 <a:cs typeface="Consolas" pitchFamily="34" charset="-120"/>
               </a:rPr>
-              <a:t>2026-10-01 17:01:41,314 [INFO] [OK] new_error=8.39% - production promoted: Haearim_Hourly v2</a:t>
+              <a:t>17:01:41,314 [INFO] [OK] new_error=8.39% - production promoted: Haearim_Hourly v2</a:t>
             </a:r>
             <a:endParaRPr lang="en-US" sz="750" dirty="0"/>
           </a:p>
@@ -9912,7 +9908,7 @@
                 <a:ea typeface="Consolas" pitchFamily="34" charset="-122"/>
                 <a:cs typeface="Consolas" pitchFamily="34" charset="-120"/>
               </a:rPr>
-              <a:t>2026-10-01 17:01:56,483 [WARNING] [WARN] drift detected (cause=equipment, plant=samcheonpo_2, err=11.59% (thr 10.36%), pr_recent=0.574, pr_before=0.935, fleet_share=0.5)</a:t>
+              <a:t>17:01:56,483 [WARNING] [WARN] drift detected (cause=equipment, plant=samcheonpo_2, err=11.59% (thr 10.36%), pr_recent=0.574, pr_before=0.935, fleet_share=0.5)</a:t>
             </a:r>
             <a:endParaRPr lang="en-US" sz="750" dirty="0"/>
           </a:p>
@@ -9929,7 +9925,7 @@
                 <a:ea typeface="Consolas" pitchFamily="34" charset="-122"/>
                 <a:cs typeface="Consolas" pitchFamily="34" charset="-120"/>
               </a:rPr>
-              <a:t>2026-10-01 17:01:56,484 [WARNING] [ALERT] equipment anomaly suspected at samcheonpo_2 (PR 0.574) - retrain blocked, operator notified</a:t>
+              <a:t>17:01:56,484 [WARNING] [ALERT] equipment anomaly suspected at samcheonpo_2 (PR 0.574) - retrain blocked, operator notified</a:t>
             </a:r>
             <a:endParaRPr lang="en-US" sz="750" dirty="0"/>
           </a:p>
@@ -10026,7 +10022,7 @@
                 <a:ea typeface="Malgun Gothic" pitchFamily="34" charset="-122"/>
                 <a:cs typeface="Malgun Gothic" pitchFamily="34" charset="-120"/>
               </a:rPr>
-              <a:t>/predict 응답 model_version</a:t>
+              <a:t>/predict 응답의 model_version</a:t>
             </a:r>
             <a:endParaRPr lang="en-US" sz="1150" dirty="0"/>
           </a:p>
@@ -10119,7 +10115,7 @@
     <p:bg>
       <p:bgPr>
         <a:solidFill>
-          <a:srgbClr val="F6F7FB"/>
+          <a:srgbClr val="FFFFFF"/>
         </a:solidFill>
       </p:bgPr>
     </p:bg>
@@ -10145,8 +10141,8 @@
         </p:nvSpPr>
         <p:spPr>
           <a:xfrm>
-            <a:off x="548640" y="347472"/>
-            <a:ext cx="10241280" cy="640080"/>
+            <a:off x="548640" y="365760"/>
+            <a:ext cx="10332720" cy="640080"/>
           </a:xfrm>
           <a:prstGeom prst="rect">
             <a:avLst/>
@@ -10162,7 +10158,7 @@
               <a:buNone/>
             </a:pPr>
             <a:r>
-              <a:rPr lang="en-US" sz="2600" b="1" dirty="0">
+              <a:rPr lang="en-US" sz="2700" b="1" dirty="0">
                 <a:solidFill>
                   <a:srgbClr val="1A1F2B"/>
                 </a:solidFill>
@@ -10172,7 +10168,7 @@
               </a:rPr>
               <a:t>운영 API 계약</a:t>
             </a:r>
-            <a:endParaRPr lang="en-US" sz="2600" dirty="0"/>
+            <a:endParaRPr lang="en-US" sz="2700" dirty="0"/>
           </a:p>
         </p:txBody>
       </p:sp>
@@ -10184,8 +10180,8 @@
         </p:nvSpPr>
         <p:spPr>
           <a:xfrm>
-            <a:off x="548640" y="960120"/>
-            <a:ext cx="10607040" cy="384048"/>
+            <a:off x="548640" y="987552"/>
+            <a:ext cx="10789920" cy="384048"/>
           </a:xfrm>
           <a:prstGeom prst="rect">
             <a:avLst/>
@@ -10209,7 +10205,7 @@
                 <a:ea typeface="Malgun Gothic" pitchFamily="34" charset="-122"/>
                 <a:cs typeface="Malgun Gothic" pitchFamily="34" charset="-120"/>
               </a:rPr>
-              <a:t>FastAPI + Pydantic 검증. Swagger /docs 는 CDN 없이도 열린다 (사내망·샌드박스)</a:t>
+              <a:t>FastAPI와 Pydantic 검증. Swagger /docs는 CDN 없이도 열린다 (사내망·샌드박스)</a:t>
             </a:r>
             <a:endParaRPr lang="en-US" sz="1300" dirty="0"/>
           </a:p>
@@ -10223,8 +10219,8 @@
         </p:nvSpPr>
         <p:spPr>
           <a:xfrm>
-            <a:off x="11155680" y="384048"/>
-            <a:ext cx="548640" cy="365760"/>
+            <a:off x="11155680" y="411480"/>
+            <a:ext cx="502920" cy="365760"/>
           </a:xfrm>
           <a:prstGeom prst="rect">
             <a:avLst/>
@@ -10240,7 +10236,7 @@
               <a:buNone/>
             </a:pPr>
             <a:r>
-              <a:rPr lang="en-US" sz="1200" dirty="0">
+              <a:rPr lang="en-US" sz="1100" dirty="0">
                 <a:solidFill>
                   <a:srgbClr val="8A93A6"/>
                 </a:solidFill>
@@ -10250,7 +10246,7 @@
               </a:rPr>
               <a:t>15</a:t>
             </a:r>
-            <a:endParaRPr lang="en-US" sz="1200" dirty="0"/>
+            <a:endParaRPr lang="en-US" sz="1100" dirty="0"/>
           </a:p>
         </p:txBody>
       </p:sp>
@@ -10263,7 +10259,7 @@
         <p:spPr>
           <a:xfrm>
             <a:off x="548640" y="6446520"/>
-            <a:ext cx="5486400" cy="274320"/>
+            <a:ext cx="6400800" cy="274320"/>
           </a:xfrm>
           <a:prstGeom prst="rect">
             <a:avLst/>
@@ -10287,7 +10283,7 @@
                 <a:ea typeface="Malgun Gothic" pitchFamily="34" charset="-122"/>
                 <a:cs typeface="Malgun Gothic" pitchFamily="34" charset="-120"/>
               </a:rPr>
-              <a:t>해아림 · 서빙 → MLOps → AIOps</a:t>
+              <a:t>해아림 · 태양광 시간별 발전량 예측 · 서빙 → MLOps → AIOps</a:t>
             </a:r>
             <a:endParaRPr lang="en-US" sz="900" dirty="0"/>
           </a:p>
@@ -10386,7 +10382,7 @@
                       <a:tailEnd type="none" w="med" len="med"/>
                     </a:lnB>
                     <a:solidFill>
-                      <a:srgbClr val="F0F2F7"/>
+                      <a:srgbClr val="F3F5F9"/>
                     </a:solidFill>
                   </a:tcPr>
                 </a:tc>
@@ -10454,7 +10450,7 @@
                       <a:tailEnd type="none" w="med" len="med"/>
                     </a:lnB>
                     <a:solidFill>
-                      <a:srgbClr val="F0F2F7"/>
+                      <a:srgbClr val="F3F5F9"/>
                     </a:solidFill>
                   </a:tcPr>
                 </a:tc>
@@ -10522,7 +10518,7 @@
                       <a:tailEnd type="none" w="med" len="med"/>
                     </a:lnB>
                     <a:solidFill>
-                      <a:srgbClr val="F0F2F7"/>
+                      <a:srgbClr val="F3F5F9"/>
                     </a:solidFill>
                   </a:tcPr>
                 </a:tc>
@@ -10590,7 +10586,7 @@
                       <a:tailEnd type="none" w="med" len="med"/>
                     </a:lnB>
                     <a:solidFill>
-                      <a:srgbClr val="F0F2F7"/>
+                      <a:srgbClr val="F3F5F9"/>
                     </a:solidFill>
                   </a:tcPr>
                 </a:tc>
@@ -10955,7 +10951,7 @@
                           <a:ea typeface="Malgun Gothic" pitchFamily="34" charset="-122"/>
                           <a:cs typeface="Malgun Gothic" pitchFamily="34" charset="-120"/>
                         </a:rPr>
-                        <a:t>CSV/.gz (plant_id, time, generation_kwh)</a:t>
+                        <a:t>CSV 또는 .gz (plant_id, time, generation_kwh)</a:t>
                       </a:r>
                       <a:endParaRPr lang="en-US" sz="1000" dirty="0">
                         <a:latin typeface="Malgun Gothic" charset="0"/>
@@ -11023,7 +11019,7 @@
                           <a:ea typeface="Malgun Gothic" pitchFamily="34" charset="-122"/>
                           <a:cs typeface="Malgun Gothic" pitchFamily="34" charset="-120"/>
                         </a:rPr>
-                        <a:t>rows, rejected_rows · 형식·중복·미등록·범위 위반은 400</a:t>
+                        <a:t>rows, rejected_rows. 형식·중복·미등록·범위 위반은 400</a:t>
                       </a:r>
                       <a:endParaRPr lang="en-US" sz="1000" dirty="0">
                         <a:latin typeface="Malgun Gothic" charset="0"/>
@@ -11571,7 +11567,7 @@
                           <a:ea typeface="Malgun Gothic" pitchFamily="34" charset="-122"/>
                           <a:cs typeface="Malgun Gothic" pitchFamily="34" charset="-120"/>
                         </a:rPr>
-                        <a:t>days[] (오차·PR·d1_error·forecast_gap), summary, drift_check</a:t>
+                        <a:t>days[](오차·PR·d1_error·forecast_gap), summary, drift_check</a:t>
                       </a:r>
                       <a:endParaRPr lang="en-US" sz="1000" dirty="0">
                         <a:latin typeface="Malgun Gothic" charset="0"/>
@@ -12260,7 +12256,7 @@
             </a:avLst>
           </a:prstGeom>
           <a:solidFill>
-            <a:srgbClr val="F0F2F7"/>
+            <a:srgbClr val="F3F5F9"/>
           </a:solidFill>
           <a:ln w="9525">
             <a:solidFill>
@@ -12347,7 +12343,7 @@
     <p:bg>
       <p:bgPr>
         <a:solidFill>
-          <a:srgbClr val="F6F7FB"/>
+          <a:srgbClr val="FFFFFF"/>
         </a:solidFill>
       </p:bgPr>
     </p:bg>
@@ -12373,8 +12369,8 @@
         </p:nvSpPr>
         <p:spPr>
           <a:xfrm>
-            <a:off x="548640" y="347472"/>
-            <a:ext cx="10241280" cy="640080"/>
+            <a:off x="548640" y="365760"/>
+            <a:ext cx="10332720" cy="640080"/>
           </a:xfrm>
           <a:prstGeom prst="rect">
             <a:avLst/>
@@ -12390,7 +12386,7 @@
               <a:buNone/>
             </a:pPr>
             <a:r>
-              <a:rPr lang="en-US" sz="2600" b="1" dirty="0">
+              <a:rPr lang="en-US" sz="2700" b="1" dirty="0">
                 <a:solidFill>
                   <a:srgbClr val="1A1F2B"/>
                 </a:solidFill>
@@ -12400,7 +12396,7 @@
               </a:rPr>
               <a:t>한계와 다음 단계</a:t>
             </a:r>
-            <a:endParaRPr lang="en-US" sz="2600" dirty="0"/>
+            <a:endParaRPr lang="en-US" sz="2700" dirty="0"/>
           </a:p>
         </p:txBody>
       </p:sp>
@@ -12412,8 +12408,8 @@
         </p:nvSpPr>
         <p:spPr>
           <a:xfrm>
-            <a:off x="548640" y="960120"/>
-            <a:ext cx="10607040" cy="384048"/>
+            <a:off x="548640" y="987552"/>
+            <a:ext cx="10789920" cy="384048"/>
           </a:xfrm>
           <a:prstGeom prst="rect">
             <a:avLst/>
@@ -12437,7 +12433,7 @@
                 <a:ea typeface="Malgun Gothic" pitchFamily="34" charset="-122"/>
                 <a:cs typeface="Malgun Gothic" pitchFamily="34" charset="-120"/>
               </a:rPr>
-              <a:t>모의임을 밝히고, 운영 투입 전에 확인할 것을 적는다</a:t>
+              <a:t>모의임을 밝히고, 운영에 넣기 전에 확인할 것을 적는다</a:t>
             </a:r>
             <a:endParaRPr lang="en-US" sz="1300" dirty="0"/>
           </a:p>
@@ -12451,8 +12447,8 @@
         </p:nvSpPr>
         <p:spPr>
           <a:xfrm>
-            <a:off x="11155680" y="384048"/>
-            <a:ext cx="548640" cy="365760"/>
+            <a:off x="11155680" y="411480"/>
+            <a:ext cx="502920" cy="365760"/>
           </a:xfrm>
           <a:prstGeom prst="rect">
             <a:avLst/>
@@ -12468,7 +12464,7 @@
               <a:buNone/>
             </a:pPr>
             <a:r>
-              <a:rPr lang="en-US" sz="1200" dirty="0">
+              <a:rPr lang="en-US" sz="1100" dirty="0">
                 <a:solidFill>
                   <a:srgbClr val="8A93A6"/>
                 </a:solidFill>
@@ -12478,7 +12474,7 @@
               </a:rPr>
               <a:t>16</a:t>
             </a:r>
-            <a:endParaRPr lang="en-US" sz="1200" dirty="0"/>
+            <a:endParaRPr lang="en-US" sz="1100" dirty="0"/>
           </a:p>
         </p:txBody>
       </p:sp>
@@ -12491,7 +12487,7 @@
         <p:spPr>
           <a:xfrm>
             <a:off x="548640" y="6446520"/>
-            <a:ext cx="5486400" cy="274320"/>
+            <a:ext cx="6400800" cy="274320"/>
           </a:xfrm>
           <a:prstGeom prst="rect">
             <a:avLst/>
@@ -12515,7 +12511,7 @@
                 <a:ea typeface="Malgun Gothic" pitchFamily="34" charset="-122"/>
                 <a:cs typeface="Malgun Gothic" pitchFamily="34" charset="-120"/>
               </a:rPr>
-              <a:t>해아림 · 서빙 → MLOps → AIOps</a:t>
+              <a:t>해아림 · 태양광 시간별 발전량 예측 · 서빙 → MLOps → AIOps</a:t>
             </a:r>
             <a:endParaRPr lang="en-US" sz="900" dirty="0"/>
           </a:p>
@@ -12570,11 +12566,11 @@
             <a:avLst/>
           </a:prstGeom>
           <a:solidFill>
-            <a:srgbClr val="EEF1F6"/>
+            <a:srgbClr val="F3F5F9"/>
           </a:solidFill>
           <a:ln w="12700">
             <a:solidFill>
-              <a:srgbClr val="EEF1F6"/>
+              <a:srgbClr val="F3F5F9"/>
             </a:solidFill>
             <a:prstDash val="solid"/>
           </a:ln>
@@ -12596,8 +12592,8 @@
         </p:blipFill>
         <p:spPr>
           <a:xfrm>
-            <a:off x="867583" y="1727119"/>
-            <a:ext cx="294803" cy="294803"/>
+            <a:off x="873252" y="1732788"/>
+            <a:ext cx="283464" cy="283464"/>
           </a:xfrm>
           <a:prstGeom prst="rect">
             <a:avLst/>
@@ -12676,7 +12672,7 @@
                 <a:ea typeface="Malgun Gothic" pitchFamily="34" charset="-122"/>
                 <a:cs typeface="Malgun Gothic" pitchFamily="34" charset="-120"/>
               </a:rPr>
-              <a:t>지금은 D-1 24:00 까지 쓴다. 제출이 D-1 10시이므로 09:00 마감(15시간 공백)으로 바꾸면 조건이 정직해지고 오차는 조금 오른다.</a:t>
+              <a:t>지금은 D-1 24:00까지 쓴다. 제출이 D-1 10시이므로 09:00 마감(15시간 공백)으로 바꾸면 조건이 정직해지고 오차는 조금 오른다.</a:t>
             </a:r>
             <a:endParaRPr lang="en-US" sz="1050" dirty="0"/>
           </a:p>
@@ -12731,11 +12727,11 @@
             <a:avLst/>
           </a:prstGeom>
           <a:solidFill>
-            <a:srgbClr val="EEF1F6"/>
+            <a:srgbClr val="F3F5F9"/>
           </a:solidFill>
           <a:ln w="12700">
             <a:solidFill>
-              <a:srgbClr val="EEF1F6"/>
+              <a:srgbClr val="F3F5F9"/>
             </a:solidFill>
             <a:prstDash val="solid"/>
           </a:ln>
@@ -12757,8 +12753,8 @@
         </p:blipFill>
         <p:spPr>
           <a:xfrm>
-            <a:off x="867583" y="2687239"/>
-            <a:ext cx="294803" cy="294803"/>
+            <a:off x="873252" y="2692908"/>
+            <a:ext cx="283464" cy="283464"/>
           </a:xfrm>
           <a:prstGeom prst="rect">
             <a:avLst/>
@@ -12837,7 +12833,7 @@
                 <a:ea typeface="Malgun Gothic" pitchFamily="34" charset="-122"/>
                 <a:cs typeface="Malgun Gothic" pitchFamily="34" charset="-120"/>
               </a:rPr>
-              <a:t>판정은 관측 기상 예측 오차(8.29%) 기준. 서빙 조건(9.85%)으로 옮기면 임계값도 같이 다시 잡아야 한다. d1_error 는 이미 기록 중.</a:t>
+              <a:t>판정은 관측 기상 예측 오차(8.29%) 기준이다. 서빙 조건(9.85%)으로 옮기면 임계값도 다시 잡아야 한다. d1_error는 이미 기록하고 있다.</a:t>
             </a:r>
             <a:endParaRPr lang="en-US" sz="1050" dirty="0"/>
           </a:p>
@@ -12892,11 +12888,11 @@
             <a:avLst/>
           </a:prstGeom>
           <a:solidFill>
-            <a:srgbClr val="EEF1F6"/>
+            <a:srgbClr val="F3F5F9"/>
           </a:solidFill>
           <a:ln w="12700">
             <a:solidFill>
-              <a:srgbClr val="EEF1F6"/>
+              <a:srgbClr val="F3F5F9"/>
             </a:solidFill>
             <a:prstDash val="solid"/>
           </a:ln>
@@ -12918,8 +12914,8 @@
         </p:blipFill>
         <p:spPr>
           <a:xfrm>
-            <a:off x="867583" y="3647359"/>
-            <a:ext cx="294803" cy="294803"/>
+            <a:off x="873252" y="3653028"/>
+            <a:ext cx="283464" cy="283464"/>
           </a:xfrm>
           <a:prstGeom prst="rect">
             <a:avLst/>
@@ -12998,7 +12994,7 @@
                 <a:ea typeface="Malgun Gothic" pitchFamily="34" charset="-122"/>
                 <a:cs typeface="Malgun Gothic" pitchFamily="34" charset="-120"/>
               </a:rPr>
-              <a:t>plants.csv 용량은 시간 피크 추정값. 공식 용량과 좌표, 영흥#5·광양항·삼천포2 운영 이력을 대조해야 사례가 확정된다.</a:t>
+              <a:t>plants.csv의 용량은 시간 피크 추정값이다. 공식 용량과 좌표, 영흥#5·광양항·삼천포2의 운영 이력을 대조해야 사례가 확정된다.</a:t>
             </a:r>
             <a:endParaRPr lang="en-US" sz="1050" dirty="0"/>
           </a:p>
@@ -13053,11 +13049,11 @@
             <a:avLst/>
           </a:prstGeom>
           <a:solidFill>
-            <a:srgbClr val="EEF1F6"/>
+            <a:srgbClr val="F3F5F9"/>
           </a:solidFill>
           <a:ln w="12700">
             <a:solidFill>
-              <a:srgbClr val="EEF1F6"/>
+              <a:srgbClr val="F3F5F9"/>
             </a:solidFill>
             <a:prstDash val="solid"/>
           </a:ln>
@@ -13079,8 +13075,8 @@
         </p:blipFill>
         <p:spPr>
           <a:xfrm>
-            <a:off x="867583" y="4607479"/>
-            <a:ext cx="294803" cy="294803"/>
+            <a:off x="873252" y="4613148"/>
+            <a:ext cx="283464" cy="283464"/>
           </a:xfrm>
           <a:prstGeom prst="rect">
             <a:avLst/>
@@ -13159,7 +13155,7 @@
                 <a:ea typeface="Malgun Gothic" pitchFamily="34" charset="-122"/>
                 <a:cs typeface="Malgun Gothic" pitchFamily="34" charset="-120"/>
               </a:rPr>
-              <a:t>드리프트가 아니라 모델 성능 한계. 불확실한 날의 예측을 보수적으로 만드는 손실·예보로 학습이 다음 과제.</a:t>
+              <a:t>드리프트가 아니라 모델 성능의 한계다. 불확실한 날의 예측을 보수적으로 만드는 손실과 예보로 학습하는 것이 다음 과제다.</a:t>
             </a:r>
             <a:endParaRPr lang="en-US" sz="1050" dirty="0"/>
           </a:p>
@@ -13214,11 +13210,11 @@
             <a:avLst/>
           </a:prstGeom>
           <a:solidFill>
-            <a:srgbClr val="EEF1F6"/>
+            <a:srgbClr val="F3F5F9"/>
           </a:solidFill>
           <a:ln w="12700">
             <a:solidFill>
-              <a:srgbClr val="EEF1F6"/>
+              <a:srgbClr val="F3F5F9"/>
             </a:solidFill>
             <a:prstDash val="solid"/>
           </a:ln>
@@ -13240,8 +13236,8 @@
         </p:blipFill>
         <p:spPr>
           <a:xfrm>
-            <a:off x="867583" y="5567599"/>
-            <a:ext cx="294803" cy="294803"/>
+            <a:off x="873252" y="5573268"/>
+            <a:ext cx="283464" cy="283464"/>
           </a:xfrm>
           <a:prstGeom prst="rect">
             <a:avLst/>
@@ -13320,7 +13316,7 @@
                 <a:ea typeface="Malgun Gothic" pitchFamily="34" charset="-122"/>
                 <a:cs typeface="Malgun Gothic" pitchFamily="34" charset="-120"/>
               </a:rPr>
-              <a:t>출력제어(특정 시간대만 깎임, 제도 변화 → 재학습)와 황사(지역 동시지만 일시적 → 재학습 금지)로 동시성 규칙의 경계를 보강.</a:t>
+              <a:t>출력제어(특정 시간대만 깎임, 제도 변화 → 재학습)와 황사(지역 동시지만 일시적 → 재학습 금지)로 동시성 규칙의 경계를 보강한다.</a:t>
             </a:r>
             <a:endParaRPr lang="en-US" sz="1050" dirty="0"/>
           </a:p>
@@ -13340,7 +13336,7 @@
     <p:bg>
       <p:bgPr>
         <a:solidFill>
-          <a:srgbClr val="F6F7FB"/>
+          <a:srgbClr val="FFFFFF"/>
         </a:solidFill>
       </p:bgPr>
     </p:bg>
@@ -13366,8 +13362,8 @@
         </p:nvSpPr>
         <p:spPr>
           <a:xfrm>
-            <a:off x="548640" y="347472"/>
-            <a:ext cx="10241280" cy="640080"/>
+            <a:off x="548640" y="365760"/>
+            <a:ext cx="10332720" cy="640080"/>
           </a:xfrm>
           <a:prstGeom prst="rect">
             <a:avLst/>
@@ -13383,7 +13379,7 @@
               <a:buNone/>
             </a:pPr>
             <a:r>
-              <a:rPr lang="en-US" sz="2600" b="1" dirty="0">
+              <a:rPr lang="en-US" sz="2700" b="1" dirty="0">
                 <a:solidFill>
                   <a:srgbClr val="1A1F2B"/>
                 </a:solidFill>
@@ -13393,7 +13389,7 @@
               </a:rPr>
               <a:t>역할 분담과 실행 안내</a:t>
             </a:r>
-            <a:endParaRPr lang="en-US" sz="2600" dirty="0"/>
+            <a:endParaRPr lang="en-US" sz="2700" dirty="0"/>
           </a:p>
         </p:txBody>
       </p:sp>
@@ -13405,8 +13401,8 @@
         </p:nvSpPr>
         <p:spPr>
           <a:xfrm>
-            <a:off x="548640" y="960120"/>
-            <a:ext cx="10607040" cy="384048"/>
+            <a:off x="548640" y="987552"/>
+            <a:ext cx="10789920" cy="384048"/>
           </a:xfrm>
           <a:prstGeom prst="rect">
             <a:avLst/>
@@ -13430,7 +13426,7 @@
                 <a:ea typeface="Malgun Gothic" pitchFamily="34" charset="-122"/>
                 <a:cs typeface="Malgun Gothic" pitchFamily="34" charset="-120"/>
               </a:rPr>
-              <a:t>저장소 github.com/leemingi0906/model-serving · 팀 공유 zip 해아림_v2_team.zip · 3~5분이면 같은 화면이 뜬다</a:t>
+              <a:t>저장소 github.com/leemingi0906/model-serving · 팀 공유 zip Haearim_v2_team.zip · 3~5분이면 같은 화면이 뜬다</a:t>
             </a:r>
             <a:endParaRPr lang="en-US" sz="1300" dirty="0"/>
           </a:p>
@@ -13444,8 +13440,8 @@
         </p:nvSpPr>
         <p:spPr>
           <a:xfrm>
-            <a:off x="11155680" y="384048"/>
-            <a:ext cx="548640" cy="365760"/>
+            <a:off x="11155680" y="411480"/>
+            <a:ext cx="502920" cy="365760"/>
           </a:xfrm>
           <a:prstGeom prst="rect">
             <a:avLst/>
@@ -13461,7 +13457,7 @@
               <a:buNone/>
             </a:pPr>
             <a:r>
-              <a:rPr lang="en-US" sz="1200" dirty="0">
+              <a:rPr lang="en-US" sz="1100" dirty="0">
                 <a:solidFill>
                   <a:srgbClr val="8A93A6"/>
                 </a:solidFill>
@@ -13471,7 +13467,7 @@
               </a:rPr>
               <a:t>17</a:t>
             </a:r>
-            <a:endParaRPr lang="en-US" sz="1200" dirty="0"/>
+            <a:endParaRPr lang="en-US" sz="1100" dirty="0"/>
           </a:p>
         </p:txBody>
       </p:sp>
@@ -13484,7 +13480,7 @@
         <p:spPr>
           <a:xfrm>
             <a:off x="548640" y="6446520"/>
-            <a:ext cx="5486400" cy="274320"/>
+            <a:ext cx="6400800" cy="274320"/>
           </a:xfrm>
           <a:prstGeom prst="rect">
             <a:avLst/>
@@ -13508,7 +13504,7 @@
                 <a:ea typeface="Malgun Gothic" pitchFamily="34" charset="-122"/>
                 <a:cs typeface="Malgun Gothic" pitchFamily="34" charset="-120"/>
               </a:rPr>
-              <a:t>해아림 · 서빙 → MLOps → AIOps</a:t>
+              <a:t>해아림 · 태양광 시간별 발전량 예측 · 서빙 → MLOps → AIOps</a:t>
             </a:r>
             <a:endParaRPr lang="en-US" sz="900" dirty="0"/>
           </a:p>
@@ -13607,7 +13603,7 @@
                       <a:tailEnd type="none" w="med" len="med"/>
                     </a:lnB>
                     <a:solidFill>
-                      <a:srgbClr val="F0F2F7"/>
+                      <a:srgbClr val="F3F5F9"/>
                     </a:solidFill>
                   </a:tcPr>
                 </a:tc>
@@ -13675,7 +13671,7 @@
                       <a:tailEnd type="none" w="med" len="med"/>
                     </a:lnB>
                     <a:solidFill>
-                      <a:srgbClr val="F0F2F7"/>
+                      <a:srgbClr val="F3F5F9"/>
                     </a:solidFill>
                   </a:tcPr>
                 </a:tc>
@@ -13743,7 +13739,7 @@
                       <a:tailEnd type="none" w="med" len="med"/>
                     </a:lnB>
                     <a:solidFill>
-                      <a:srgbClr val="F0F2F7"/>
+                      <a:srgbClr val="F3F5F9"/>
                     </a:solidFill>
                   </a:tcPr>
                 </a:tc>
@@ -13811,7 +13807,7 @@
                       <a:tailEnd type="none" w="med" len="med"/>
                     </a:lnB>
                     <a:solidFill>
-                      <a:srgbClr val="F0F2F7"/>
+                      <a:srgbClr val="F3F5F9"/>
                     </a:solidFill>
                   </a:tcPr>
                 </a:tc>
@@ -13902,7 +13898,7 @@
                           <a:ea typeface="Malgun Gothic" pitchFamily="34" charset="-122"/>
                           <a:cs typeface="Malgun Gothic" pitchFamily="34" charset="-120"/>
                         </a:rPr>
-                        <a:t>시각 정렬·이용률·레지스트리·업로드 검증·기획안</a:t>
+                        <a:t>시각 정렬, 이용률, 레지스트리, 업로드 검증, 기획안</a:t>
                       </a:r>
                       <a:endParaRPr lang="en-US" sz="1000" dirty="0">
                         <a:latin typeface="Malgun Gothic" charset="0"/>
@@ -14176,7 +14172,7 @@
                           <a:ea typeface="Malgun Gothic" pitchFamily="34" charset="-122"/>
                           <a:cs typeface="Malgun Gothic" pitchFamily="34" charset="-120"/>
                         </a:rPr>
-                        <a:t>LSTM 구조·낮 가중 손실·게이트·MLflow alias·--register-local</a:t>
+                        <a:t>LSTM 구조, 낮 가중 손실, 게이트, MLflow alias, --register-local</a:t>
                       </a:r>
                       <a:endParaRPr lang="en-US" sz="1000" dirty="0">
                         <a:latin typeface="Malgun Gothic" charset="0"/>
@@ -14450,7 +14446,7 @@
                           <a:ea typeface="Malgun Gothic" pitchFamily="34" charset="-122"/>
                           <a:cs typeface="Malgun Gothic" pitchFamily="34" charset="-120"/>
                         </a:rPr>
-                        <a:t>스키마·/predict·모델 스냅샷 교체·오프라인 Swagger</a:t>
+                        <a:t>스키마, /predict, 모델 스냅샷 교체, 오프라인 Swagger</a:t>
                       </a:r>
                       <a:endParaRPr lang="en-US" sz="1000" dirty="0">
                         <a:latin typeface="Malgun Gothic" charset="0"/>
@@ -14586,7 +14582,7 @@
                           <a:ea typeface="Malgun Gothic" pitchFamily="34" charset="-122"/>
                           <a:cs typeface="Malgun Gothic" pitchFamily="34" charset="-120"/>
                         </a:rPr>
-                        <a:t>24h 응답, model_version v1 → v2, 학습 중 응답</a:t>
+                        <a:t>24시간 응답, model_version v1 → v2, 학습 중 응답</a:t>
                       </a:r>
                       <a:endParaRPr lang="en-US" sz="1000" dirty="0">
                         <a:latin typeface="Malgun Gothic" charset="0"/>
@@ -14724,7 +14720,7 @@
                           <a:ea typeface="Malgun Gothic" pitchFamily="34" charset="-122"/>
                           <a:cs typeface="Malgun Gothic" pitchFamily="34" charset="-120"/>
                         </a:rPr>
-                        <a:t>원인 분류·재학습 트리거·백그라운드 작업·시나리오 9개·대시보드</a:t>
+                        <a:t>원인 분류, 재학습 트리거, 백그라운드 작업, 시나리오 9개, 대시보드</a:t>
                       </a:r>
                       <a:endParaRPr lang="en-US" sz="1000" dirty="0">
                         <a:latin typeface="Malgun Gothic" charset="0"/>
@@ -14860,7 +14856,7 @@
                           <a:ea typeface="Malgun Gothic" pitchFamily="34" charset="-122"/>
                           <a:cs typeface="Malgun Gothic" pitchFamily="34" charset="-120"/>
                         </a:rPr>
-                        <a:t>aiops.log, 새 클론 재현 로그 43</a:t>
+                        <a:t>aiops.log, 새 클론 재현 로그</a:t>
                       </a:r>
                       <a:endParaRPr lang="en-US" sz="1000" dirty="0">
                         <a:latin typeface="Malgun Gothic" charset="0"/>
@@ -14933,7 +14929,7 @@
             </a:avLst>
           </a:prstGeom>
           <a:solidFill>
-            <a:srgbClr val="F0F2F7"/>
+            <a:srgbClr val="F3F5F9"/>
           </a:solidFill>
           <a:ln w="9525">
             <a:solidFill>
@@ -14983,7 +14979,7 @@
                 <a:ea typeface="Malgun Gothic" pitchFamily="34" charset="-122"/>
                 <a:cs typeface="Malgun Gothic" pitchFamily="34" charset="-120"/>
               </a:rPr>
-              <a:t>팀원 PC 에서 (TEAM_GUIDE.md)</a:t>
+              <a:t>팀원 PC에서 (TEAM_GUIDE.md)</a:t>
             </a:r>
             <a:endParaRPr lang="en-US" sz="1250" dirty="0"/>
           </a:p>
@@ -15073,7 +15069,7 @@
                 <a:ea typeface="Consolas" pitchFamily="34" charset="-122"/>
                 <a:cs typeface="Consolas" pitchFamily="34" charset="-120"/>
               </a:rPr>
-              <a:t>python -m pytest -q              # 계약 테스트 13개</a:t>
+              <a:t>python -m pytest -q              # 계약 테스트 14개</a:t>
             </a:r>
             <a:endParaRPr lang="en-US" sz="950" dirty="0"/>
           </a:p>
@@ -15113,7 +15109,7 @@
             </a:avLst>
           </a:prstGeom>
           <a:solidFill>
-            <a:srgbClr val="F0F2F7"/>
+            <a:srgbClr val="F3F5F9"/>
           </a:solidFill>
           <a:ln w="9525">
             <a:solidFill>
@@ -15241,7 +15237,7 @@
                 <a:ea typeface="Malgun Gothic" pitchFamily="34" charset="-122"/>
                 <a:cs typeface="Malgun Gothic" pitchFamily="34" charset="-120"/>
               </a:rPr>
-              <a:t>재학습은 데이터를 더 넣는 일이 아니라, 모델이 잘못 알고 있는 것을 바로잡는 일이다. 그래서 원인을 먼저 가린다.</a:t>
+              <a:t>재학습은 데이터를 더 넣는 일이 아니라 모델이 잘못 알고 있는 것을 바로잡는 일이다. 그래서 원인을 먼저 가린다.</a:t>
             </a:r>
             <a:endParaRPr lang="en-US" sz="1100" dirty="0"/>
           </a:p>
@@ -15261,7 +15257,7 @@
     <p:bg>
       <p:bgPr>
         <a:solidFill>
-          <a:srgbClr val="F6F7FB"/>
+          <a:srgbClr val="FFFFFF"/>
         </a:solidFill>
       </p:bgPr>
     </p:bg>
@@ -15287,8 +15283,8 @@
         </p:nvSpPr>
         <p:spPr>
           <a:xfrm>
-            <a:off x="548640" y="347472"/>
-            <a:ext cx="10241280" cy="640080"/>
+            <a:off x="548640" y="365760"/>
+            <a:ext cx="10332720" cy="640080"/>
           </a:xfrm>
           <a:prstGeom prst="rect">
             <a:avLst/>
@@ -15304,7 +15300,7 @@
               <a:buNone/>
             </a:pPr>
             <a:r>
-              <a:rPr lang="en-US" sz="2600" b="1" dirty="0">
+              <a:rPr lang="en-US" sz="2700" b="1" dirty="0">
                 <a:solidFill>
                   <a:srgbClr val="1A1F2B"/>
                 </a:solidFill>
@@ -15312,9 +15308,9 @@
                 <a:ea typeface="Malgun Gothic" pitchFamily="34" charset="-122"/>
                 <a:cs typeface="Malgun Gothic" pitchFamily="34" charset="-120"/>
               </a:rPr>
-              <a:t>예측제도는 "맞힌 날"만 돈을 준다</a:t>
+              <a:t>예측제도는 "맞힌 날"에만 돈을 준다</a:t>
             </a:r>
-            <a:endParaRPr lang="en-US" sz="2600" dirty="0"/>
+            <a:endParaRPr lang="en-US" sz="2700" dirty="0"/>
           </a:p>
         </p:txBody>
       </p:sp>
@@ -15326,8 +15322,8 @@
         </p:nvSpPr>
         <p:spPr>
           <a:xfrm>
-            <a:off x="548640" y="960120"/>
-            <a:ext cx="10607040" cy="384048"/>
+            <a:off x="548640" y="987552"/>
+            <a:ext cx="10789920" cy="384048"/>
           </a:xfrm>
           <a:prstGeom prst="rect">
             <a:avLst/>
@@ -15351,7 +15347,7 @@
                 <a:ea typeface="Malgun Gothic" pitchFamily="34" charset="-122"/>
                 <a:cs typeface="Malgun Gothic" pitchFamily="34" charset="-120"/>
               </a:rPr>
-              <a:t>재생에너지 발전량 예측제도: 하루 전 10시에 다음 날 24시간을 제출하고, 일 오차율 8% 이내인 날만 정산</a:t>
+              <a:t>재생에너지 발전량 예측제도: 하루 전 10시에 다음 날 24시간을 제출하고, 일 오차율 8% 이내인 날만 정산한다</a:t>
             </a:r>
             <a:endParaRPr lang="en-US" sz="1300" dirty="0"/>
           </a:p>
@@ -15365,8 +15361,8 @@
         </p:nvSpPr>
         <p:spPr>
           <a:xfrm>
-            <a:off x="11155680" y="384048"/>
-            <a:ext cx="548640" cy="365760"/>
+            <a:off x="11155680" y="411480"/>
+            <a:ext cx="502920" cy="365760"/>
           </a:xfrm>
           <a:prstGeom prst="rect">
             <a:avLst/>
@@ -15382,7 +15378,7 @@
               <a:buNone/>
             </a:pPr>
             <a:r>
-              <a:rPr lang="en-US" sz="1200" dirty="0">
+              <a:rPr lang="en-US" sz="1100" dirty="0">
                 <a:solidFill>
                   <a:srgbClr val="8A93A6"/>
                 </a:solidFill>
@@ -15392,7 +15388,7 @@
               </a:rPr>
               <a:t>02</a:t>
             </a:r>
-            <a:endParaRPr lang="en-US" sz="1200" dirty="0"/>
+            <a:endParaRPr lang="en-US" sz="1100" dirty="0"/>
           </a:p>
         </p:txBody>
       </p:sp>
@@ -15405,7 +15401,7 @@
         <p:spPr>
           <a:xfrm>
             <a:off x="548640" y="6446520"/>
-            <a:ext cx="5486400" cy="274320"/>
+            <a:ext cx="6400800" cy="274320"/>
           </a:xfrm>
           <a:prstGeom prst="rect">
             <a:avLst/>
@@ -15429,7 +15425,7 @@
                 <a:ea typeface="Malgun Gothic" pitchFamily="34" charset="-122"/>
                 <a:cs typeface="Malgun Gothic" pitchFamily="34" charset="-120"/>
               </a:rPr>
-              <a:t>해아림 · 서빙 → MLOps → AIOps</a:t>
+              <a:t>해아림 · 태양광 시간별 발전량 예측 · 서빙 → MLOps → AIOps</a:t>
             </a:r>
             <a:endParaRPr lang="en-US" sz="900" dirty="0"/>
           </a:p>
@@ -15437,7 +15433,7 @@
       </p:sp>
       <p:sp>
         <p:nvSpPr>
-          <p:cNvPr id="6" name="Shape 4"/>
+          <p:cNvPr id="7" name="Shape 4"/>
           <p:cNvSpPr/>
           <p:nvPr/>
         </p:nvSpPr>
@@ -15471,14 +15467,14 @@
       </p:sp>
       <p:sp>
         <p:nvSpPr>
-          <p:cNvPr id="7" name="Text 5"/>
+          <p:cNvPr id="8" name="Text 5"/>
           <p:cNvSpPr txBox="1"/>
           <p:nvPr/>
         </p:nvSpPr>
         <p:spPr>
           <a:xfrm>
-            <a:off x="731520" y="1691640"/>
-            <a:ext cx="3200400" cy="737006"/>
+            <a:off x="749808" y="1682496"/>
+            <a:ext cx="3163824" cy="708660"/>
           </a:xfrm>
           <a:prstGeom prst="rect">
             <a:avLst/>
@@ -15510,14 +15506,14 @@
       </p:sp>
       <p:sp>
         <p:nvSpPr>
-          <p:cNvPr id="8" name="Text 6"/>
+          <p:cNvPr id="9" name="Text 6"/>
           <p:cNvSpPr txBox="1"/>
           <p:nvPr/>
         </p:nvSpPr>
         <p:spPr>
           <a:xfrm>
-            <a:off x="731520" y="2376526"/>
-            <a:ext cx="3200400" cy="538582"/>
+            <a:off x="749808" y="2404872"/>
+            <a:ext cx="3163824" cy="510235"/>
           </a:xfrm>
           <a:prstGeom prst="rect">
             <a:avLst/>
@@ -15541,7 +15537,7 @@
                 <a:ea typeface="Malgun Gothic" pitchFamily="34" charset="-122"/>
                 <a:cs typeface="Malgun Gothic" pitchFamily="34" charset="-120"/>
               </a:rPr>
-              <a:t>정산 조건 · 6% 이하 4원/kWh, 6~8% 3원/kWh (2025년부터 12% → 8%)</a:t>
+              <a:t>정산 조건. 6% 이하 4원/kWh, 6~8% 3원/kWh. 2025년부터 허용 오차 12% → 8%</a:t>
             </a:r>
             <a:endParaRPr lang="en-US" sz="1100" dirty="0"/>
           </a:p>
@@ -15549,7 +15545,7 @@
       </p:sp>
       <p:sp>
         <p:nvSpPr>
-          <p:cNvPr id="9" name="Shape 7"/>
+          <p:cNvPr id="10" name="Shape 7"/>
           <p:cNvSpPr/>
           <p:nvPr/>
         </p:nvSpPr>
@@ -15583,14 +15579,14 @@
       </p:sp>
       <p:sp>
         <p:nvSpPr>
-          <p:cNvPr id="10" name="Text 8"/>
+          <p:cNvPr id="11" name="Text 8"/>
           <p:cNvSpPr txBox="1"/>
           <p:nvPr/>
         </p:nvSpPr>
         <p:spPr>
           <a:xfrm>
-            <a:off x="4498848" y="1691640"/>
-            <a:ext cx="3200400" cy="737006"/>
+            <a:off x="4517136" y="1682496"/>
+            <a:ext cx="3163824" cy="708660"/>
           </a:xfrm>
           <a:prstGeom prst="rect">
             <a:avLst/>
@@ -15622,14 +15618,14 @@
       </p:sp>
       <p:sp>
         <p:nvSpPr>
-          <p:cNvPr id="11" name="Text 9"/>
+          <p:cNvPr id="12" name="Text 9"/>
           <p:cNvSpPr txBox="1"/>
           <p:nvPr/>
         </p:nvSpPr>
         <p:spPr>
           <a:xfrm>
-            <a:off x="4498848" y="2376526"/>
-            <a:ext cx="3200400" cy="538582"/>
+            <a:off x="4517136" y="2404872"/>
+            <a:ext cx="3163824" cy="510235"/>
           </a:xfrm>
           <a:prstGeom prst="rect">
             <a:avLst/>
@@ -15653,7 +15649,7 @@
                 <a:ea typeface="Malgun Gothic" pitchFamily="34" charset="-122"/>
                 <a:cs typeface="Malgun Gothic" pitchFamily="34" charset="-120"/>
               </a:rPr>
-              <a:t>제출 마감 · 그 시각에 아는 것은 과거 실적과 기상 예보뿐</a:t>
+              <a:t>제출 마감. 이때 아는 것은 과거 실적과 기상 예보뿐</a:t>
             </a:r>
             <a:endParaRPr lang="en-US" sz="1100" dirty="0"/>
           </a:p>
@@ -15661,7 +15657,7 @@
       </p:sp>
       <p:sp>
         <p:nvSpPr>
-          <p:cNvPr id="12" name="Shape 10"/>
+          <p:cNvPr id="13" name="Shape 10"/>
           <p:cNvSpPr/>
           <p:nvPr/>
         </p:nvSpPr>
@@ -15695,14 +15691,14 @@
       </p:sp>
       <p:sp>
         <p:nvSpPr>
-          <p:cNvPr id="13" name="Text 11"/>
+          <p:cNvPr id="14" name="Text 11"/>
           <p:cNvSpPr txBox="1"/>
           <p:nvPr/>
         </p:nvSpPr>
         <p:spPr>
           <a:xfrm>
-            <a:off x="8266176" y="1691640"/>
-            <a:ext cx="3200400" cy="737006"/>
+            <a:off x="8284464" y="1682496"/>
+            <a:ext cx="3163824" cy="708660"/>
           </a:xfrm>
           <a:prstGeom prst="rect">
             <a:avLst/>
@@ -15734,14 +15730,14 @@
       </p:sp>
       <p:sp>
         <p:nvSpPr>
-          <p:cNvPr id="14" name="Text 12"/>
+          <p:cNvPr id="15" name="Text 12"/>
           <p:cNvSpPr txBox="1"/>
           <p:nvPr/>
         </p:nvSpPr>
         <p:spPr>
           <a:xfrm>
-            <a:off x="8266176" y="2376526"/>
-            <a:ext cx="3200400" cy="538582"/>
+            <a:off x="8284464" y="2404872"/>
+            <a:ext cx="3163824" cy="510235"/>
           </a:xfrm>
           <a:prstGeom prst="rect">
             <a:avLst/>
@@ -15765,7 +15761,7 @@
                 <a:ea typeface="Malgun Gothic" pitchFamily="34" charset="-122"/>
                 <a:cs typeface="Malgun Gothic" pitchFamily="34" charset="-120"/>
               </a:rPr>
-              <a:t>중개사업자(VPP)는 매일 발전소 수십 곳의 시간별 예측을 만들어야 함</a:t>
+              <a:t>중개사업자(VPP)는 매일 발전소 수십 곳의 시간별 예측을 제출</a:t>
             </a:r>
             <a:endParaRPr lang="en-US" sz="1100" dirty="0"/>
           </a:p>
@@ -15773,7 +15769,7 @@
       </p:sp>
       <p:sp>
         <p:nvSpPr>
-          <p:cNvPr id="15" name="Shape 13"/>
+          <p:cNvPr id="16" name="Shape 13"/>
           <p:cNvSpPr/>
           <p:nvPr/>
         </p:nvSpPr>
@@ -15807,7 +15803,7 @@
       </p:sp>
       <p:sp>
         <p:nvSpPr>
-          <p:cNvPr id="16" name="Text 14"/>
+          <p:cNvPr id="17" name="Text 14"/>
           <p:cNvSpPr txBox="1"/>
           <p:nvPr/>
         </p:nvSpPr>
@@ -15846,7 +15842,7 @@
       </p:sp>
       <p:sp>
         <p:nvSpPr>
-          <p:cNvPr id="17" name="Text 15"/>
+          <p:cNvPr id="18" name="Text 15"/>
           <p:cNvSpPr txBox="1"/>
           <p:nvPr/>
         </p:nvSpPr>
@@ -15867,7 +15863,7 @@
           <a:p>
             <a:pPr marL="177800" indent="-177800">
               <a:spcAft>
-                <a:spcPts val="600"/>
+                <a:spcPts val="700"/>
               </a:spcAft>
               <a:buSzPct val="100000"/>
               <a:buChar char="•"/>
@@ -15881,14 +15877,14 @@
                 <a:ea typeface="Malgun Gothic" pitchFamily="34" charset="-122"/>
                 <a:cs typeface="Malgun Gothic" pitchFamily="34" charset="-120"/>
               </a:rPr>
-              <a:t>예측이 틀렸는데 원인을 모른다. 날씨였나, 설비가 고장 났나, 모델이 낡았나.</a:t>
+              <a:t>예측이 틀렸는데 원인을 모른다. 날씨였는지, 설비가 고장 났는지, 모델이 낡았는지.</a:t>
             </a:r>
             <a:endParaRPr lang="en-US" sz="1250" dirty="0"/>
           </a:p>
           <a:p>
             <a:pPr marL="177800" indent="-177800">
               <a:spcAft>
-                <a:spcPts val="600"/>
+                <a:spcPts val="700"/>
               </a:spcAft>
               <a:buSzPct val="100000"/>
               <a:buChar char="•"/>
@@ -15902,14 +15898,14 @@
                 <a:ea typeface="Malgun Gothic" pitchFamily="34" charset="-122"/>
                 <a:cs typeface="Malgun Gothic" pitchFamily="34" charset="-120"/>
               </a:rPr>
-              <a:t>오차가 커질 때마다 재학습하면 고장 난 발전소를 "정상"으로 배운다.</a:t>
+              <a:t>오차가 커질 때마다 재학습하면 고장 난 발전소를 "정상"으로 학습한다.</a:t>
             </a:r>
             <a:endParaRPr lang="en-US" sz="1250" dirty="0"/>
           </a:p>
           <a:p>
             <a:pPr marL="177800" indent="-177800">
               <a:spcAft>
-                <a:spcPts val="600"/>
+                <a:spcPts val="700"/>
               </a:spcAft>
               <a:buSzPct val="100000"/>
               <a:buChar char="•"/>
@@ -15923,7 +15919,7 @@
                 <a:ea typeface="Malgun Gothic" pitchFamily="34" charset="-122"/>
                 <a:cs typeface="Malgun Gothic" pitchFamily="34" charset="-120"/>
               </a:rPr>
-              <a:t>설비 점검이 필요한 발전소를 예측 오차 속에서 골라낼 방법이 없다.</a:t>
+              <a:t>점검이 필요한 발전소를 예측 오차만으로는 골라낼 수 없다.</a:t>
             </a:r>
             <a:endParaRPr lang="en-US" sz="1250" dirty="0"/>
           </a:p>
@@ -15931,7 +15927,7 @@
       </p:sp>
       <p:sp>
         <p:nvSpPr>
-          <p:cNvPr id="18" name="Shape 16"/>
+          <p:cNvPr id="19" name="Shape 16"/>
           <p:cNvSpPr/>
           <p:nvPr/>
         </p:nvSpPr>
@@ -15965,7 +15961,7 @@
       </p:sp>
       <p:sp>
         <p:nvSpPr>
-          <p:cNvPr id="19" name="Text 17"/>
+          <p:cNvPr id="20" name="Text 17"/>
           <p:cNvSpPr txBox="1"/>
           <p:nvPr/>
         </p:nvSpPr>
@@ -15996,7 +15992,7 @@
                 <a:ea typeface="Malgun Gothic" pitchFamily="34" charset="-122"/>
                 <a:cs typeface="Malgun Gothic" pitchFamily="34" charset="-120"/>
               </a:rPr>
-              <a:t>해아림가 답하는 질문</a:t>
+              <a:t>해아림이 답하는 것</a:t>
             </a:r>
             <a:endParaRPr lang="en-US" sz="1500" dirty="0"/>
           </a:p>
@@ -16004,7 +16000,7 @@
       </p:sp>
       <p:sp>
         <p:nvSpPr>
-          <p:cNvPr id="20" name="Text 18"/>
+          <p:cNvPr id="21" name="Text 18"/>
           <p:cNvSpPr txBox="1"/>
           <p:nvPr/>
         </p:nvSpPr>
@@ -16025,7 +16021,7 @@
           <a:p>
             <a:pPr marL="177800" indent="-177800">
               <a:spcAft>
-                <a:spcPts val="600"/>
+                <a:spcPts val="700"/>
               </a:spcAft>
               <a:buSzPct val="100000"/>
               <a:buChar char="•"/>
@@ -16039,14 +16035,14 @@
                 <a:ea typeface="Malgun Gothic" pitchFamily="34" charset="-122"/>
                 <a:cs typeface="Malgun Gothic" pitchFamily="34" charset="-120"/>
               </a:rPr>
-              <a:t>내일 24시간 발전량을 제도 포맷으로 API 한 번에.</a:t>
+              <a:t>내일 24시간 발전량을 제도 포맷으로 API 한 번에 돌려준다.</a:t>
             </a:r>
             <a:endParaRPr lang="en-US" sz="1250" dirty="0"/>
           </a:p>
           <a:p>
             <a:pPr marL="177800" indent="-177800">
               <a:spcAft>
-                <a:spcPts val="600"/>
+                <a:spcPts val="700"/>
               </a:spcAft>
               <a:buSzPct val="100000"/>
               <a:buChar char="•"/>
@@ -16060,14 +16056,14 @@
                 <a:ea typeface="Malgun Gothic" pitchFamily="34" charset="-122"/>
                 <a:cs typeface="Malgun Gothic" pitchFamily="34" charset="-120"/>
               </a:rPr>
-              <a:t>오차가 커지면 원인을 날씨 / 설비 / 모델로 자동 분류.</a:t>
+              <a:t>오차가 커지면 원인을 날씨 / 설비 / 모델로 자동 분류한다.</a:t>
             </a:r>
             <a:endParaRPr lang="en-US" sz="1250" dirty="0"/>
           </a:p>
           <a:p>
             <a:pPr marL="177800" indent="-177800">
               <a:spcAft>
-                <a:spcPts val="600"/>
+                <a:spcPts val="700"/>
               </a:spcAft>
               <a:buSzPct val="100000"/>
               <a:buChar char="•"/>
@@ -16081,14 +16077,14 @@
                 <a:ea typeface="Malgun Gothic" pitchFamily="34" charset="-122"/>
                 <a:cs typeface="Malgun Gothic" pitchFamily="34" charset="-120"/>
               </a:rPr>
-              <a:t>모델 탓일 때만 재학습하고, 게이트를 통과한 모델만 교체.</a:t>
+              <a:t>모델 탓일 때만 재학습하고, 게이트를 통과한 모델만 교체한다.</a:t>
             </a:r>
             <a:endParaRPr lang="en-US" sz="1250" dirty="0"/>
           </a:p>
           <a:p>
             <a:pPr marL="177800" indent="-177800">
               <a:spcAft>
-                <a:spcPts val="600"/>
+                <a:spcPts val="700"/>
               </a:spcAft>
               <a:buSzPct val="100000"/>
               <a:buChar char="•"/>
@@ -16102,7 +16098,7 @@
                 <a:ea typeface="Malgun Gothic" pitchFamily="34" charset="-122"/>
                 <a:cs typeface="Malgun Gothic" pitchFamily="34" charset="-120"/>
               </a:rPr>
-              <a:t>설비 탓이면 재학습을 막고 점검 알림.</a:t>
+              <a:t>설비 탓이면 재학습을 막고 점검 알림을 보낸다.</a:t>
             </a:r>
             <a:endParaRPr lang="en-US" sz="1250" dirty="0"/>
           </a:p>
@@ -16122,7 +16118,7 @@
     <p:bg>
       <p:bgPr>
         <a:solidFill>
-          <a:srgbClr val="F6F7FB"/>
+          <a:srgbClr val="FFFFFF"/>
         </a:solidFill>
       </p:bgPr>
     </p:bg>
@@ -16148,8 +16144,8 @@
         </p:nvSpPr>
         <p:spPr>
           <a:xfrm>
-            <a:off x="548640" y="347472"/>
-            <a:ext cx="10241280" cy="640080"/>
+            <a:off x="548640" y="365760"/>
+            <a:ext cx="10332720" cy="640080"/>
           </a:xfrm>
           <a:prstGeom prst="rect">
             <a:avLst/>
@@ -16165,7 +16161,7 @@
               <a:buNone/>
             </a:pPr>
             <a:r>
-              <a:rPr lang="en-US" sz="2600" b="1" dirty="0">
+              <a:rPr lang="en-US" sz="2700" b="1" dirty="0">
                 <a:solidFill>
                   <a:srgbClr val="1A1F2B"/>
                 </a:solidFill>
@@ -16175,7 +16171,7 @@
               </a:rPr>
               <a:t>제공 기능과 고객이 얻는 것</a:t>
             </a:r>
-            <a:endParaRPr lang="en-US" sz="2600" dirty="0"/>
+            <a:endParaRPr lang="en-US" sz="2700" dirty="0"/>
           </a:p>
         </p:txBody>
       </p:sp>
@@ -16187,8 +16183,8 @@
         </p:nvSpPr>
         <p:spPr>
           <a:xfrm>
-            <a:off x="548640" y="960120"/>
-            <a:ext cx="10607040" cy="384048"/>
+            <a:off x="548640" y="987552"/>
+            <a:ext cx="10789920" cy="384048"/>
           </a:xfrm>
           <a:prstGeom prst="rect">
             <a:avLst/>
@@ -16212,7 +16208,7 @@
                 <a:ea typeface="Malgun Gothic" pitchFamily="34" charset="-122"/>
                 <a:cs typeface="Malgun Gothic" pitchFamily="34" charset="-120"/>
               </a:rPr>
-              <a:t>전력중개사업자(VPP)와 발전소 운영자를 위한 B2B API + 운영 대시보드</a:t>
+              <a:t>전력중개사업자(VPP)와 발전소 운영자를 위한 B2B API와 운영 대시보드</a:t>
             </a:r>
             <a:endParaRPr lang="en-US" sz="1300" dirty="0"/>
           </a:p>
@@ -16226,8 +16222,8 @@
         </p:nvSpPr>
         <p:spPr>
           <a:xfrm>
-            <a:off x="11155680" y="384048"/>
-            <a:ext cx="548640" cy="365760"/>
+            <a:off x="11155680" y="411480"/>
+            <a:ext cx="502920" cy="365760"/>
           </a:xfrm>
           <a:prstGeom prst="rect">
             <a:avLst/>
@@ -16243,7 +16239,7 @@
               <a:buNone/>
             </a:pPr>
             <a:r>
-              <a:rPr lang="en-US" sz="1200" dirty="0">
+              <a:rPr lang="en-US" sz="1100" dirty="0">
                 <a:solidFill>
                   <a:srgbClr val="8A93A6"/>
                 </a:solidFill>
@@ -16253,7 +16249,7 @@
               </a:rPr>
               <a:t>03</a:t>
             </a:r>
-            <a:endParaRPr lang="en-US" sz="1200" dirty="0"/>
+            <a:endParaRPr lang="en-US" sz="1100" dirty="0"/>
           </a:p>
         </p:txBody>
       </p:sp>
@@ -16266,7 +16262,7 @@
         <p:spPr>
           <a:xfrm>
             <a:off x="548640" y="6446520"/>
-            <a:ext cx="5486400" cy="274320"/>
+            <a:ext cx="6400800" cy="274320"/>
           </a:xfrm>
           <a:prstGeom prst="rect">
             <a:avLst/>
@@ -16290,7 +16286,7 @@
                 <a:ea typeface="Malgun Gothic" pitchFamily="34" charset="-122"/>
                 <a:cs typeface="Malgun Gothic" pitchFamily="34" charset="-120"/>
               </a:rPr>
-              <a:t>해아림 · 서빙 → MLOps → AIOps</a:t>
+              <a:t>해아림 · 태양광 시간별 발전량 예측 · 서빙 → MLOps → AIOps</a:t>
             </a:r>
             <a:endParaRPr lang="en-US" sz="900" dirty="0"/>
           </a:p>
@@ -16371,8 +16367,8 @@
         </p:blipFill>
         <p:spPr>
           <a:xfrm>
-            <a:off x="930859" y="1945843"/>
-            <a:ext cx="332842" cy="332842"/>
+            <a:off x="937260" y="1952244"/>
+            <a:ext cx="320040" cy="320040"/>
           </a:xfrm>
           <a:prstGeom prst="rect">
             <a:avLst/>
@@ -16388,7 +16384,7 @@
         <p:spPr>
           <a:xfrm>
             <a:off x="1645920" y="1764792"/>
-            <a:ext cx="3108960" cy="365760"/>
+            <a:ext cx="3291840" cy="365760"/>
           </a:xfrm>
           <a:prstGeom prst="rect">
             <a:avLst/>
@@ -16451,7 +16447,7 @@
                 <a:ea typeface="Malgun Gothic" pitchFamily="34" charset="-122"/>
                 <a:cs typeface="Malgun Gothic" pitchFamily="34" charset="-120"/>
               </a:rPr>
-              <a:t>POST /predict · 72h 실적 + 24h 예보 → hourly_kwh[24], model_version. 제출 자료 준비 시간을 없앤다.</a:t>
+              <a:t>POST /predict. 72시간 실적과 24시간 예보를 보내면 hourly_kwh[24]와 model_version을 돌려준다. 제출 자료 준비 시간이 사라진다.</a:t>
             </a:r>
             <a:endParaRPr lang="en-US" sz="1150" dirty="0"/>
           </a:p>
@@ -16532,8 +16528,8 @@
         </p:blipFill>
         <p:spPr>
           <a:xfrm>
-            <a:off x="930859" y="3134563"/>
-            <a:ext cx="332842" cy="332842"/>
+            <a:off x="937260" y="3140964"/>
+            <a:ext cx="320040" cy="320040"/>
           </a:xfrm>
           <a:prstGeom prst="rect">
             <a:avLst/>
@@ -16549,7 +16545,7 @@
         <p:spPr>
           <a:xfrm>
             <a:off x="1645920" y="2953512"/>
-            <a:ext cx="3108960" cy="365760"/>
+            <a:ext cx="3291840" cy="365760"/>
           </a:xfrm>
           <a:prstGeom prst="rect">
             <a:avLst/>
@@ -16612,7 +16608,7 @@
                 <a:ea typeface="Malgun Gothic" pitchFamily="34" charset="-122"/>
                 <a:cs typeface="Malgun Gothic" pitchFamily="34" charset="-120"/>
               </a:rPr>
-              <a:t>POST /data/upload · 컬럼·시각·중복·용량 검증 후 저장. 실적이 들어오면 날짜별 오차율·PR 을 계산해 누적.</a:t>
+              <a:t>POST /data/upload. 컬럼·시각·중복·용량을 검증한 뒤 저장한다. 실적이 들어오면 날짜별 오차율과 PR을 계산해 누적한다.</a:t>
             </a:r>
             <a:endParaRPr lang="en-US" sz="1150" dirty="0"/>
           </a:p>
@@ -16693,8 +16689,8 @@
         </p:blipFill>
         <p:spPr>
           <a:xfrm>
-            <a:off x="930859" y="4323283"/>
-            <a:ext cx="332842" cy="332842"/>
+            <a:off x="937260" y="4329684"/>
+            <a:ext cx="320040" cy="320040"/>
           </a:xfrm>
           <a:prstGeom prst="rect">
             <a:avLst/>
@@ -16710,7 +16706,7 @@
         <p:spPr>
           <a:xfrm>
             <a:off x="1645920" y="4142232"/>
-            <a:ext cx="3108960" cy="365760"/>
+            <a:ext cx="3291840" cy="365760"/>
           </a:xfrm>
           <a:prstGeom prst="rect">
             <a:avLst/>
@@ -16773,7 +16769,7 @@
                 <a:ea typeface="Malgun Gothic" pitchFamily="34" charset="-122"/>
                 <a:cs typeface="Malgun Gothic" pitchFamily="34" charset="-120"/>
               </a:rPr>
-              <a:t>21일 오차율 &gt; 임계값이면 PR·동시성·모양으로 날씨 / 설비 / 오염 / 모델 드리프트 분류. 모델일 때만 재학습.</a:t>
+              <a:t>21일 오차율이 임계값을 넘으면 PR·동시성·모양으로 날씨 / 설비 / 오염 / 모델 드리프트를 가른다. 모델일 때만 재학습한다.</a:t>
             </a:r>
             <a:endParaRPr lang="en-US" sz="1150" dirty="0"/>
           </a:p>
@@ -16854,8 +16850,8 @@
         </p:blipFill>
         <p:spPr>
           <a:xfrm>
-            <a:off x="930859" y="5512003"/>
-            <a:ext cx="332842" cy="332842"/>
+            <a:off x="937260" y="5518404"/>
+            <a:ext cx="320040" cy="320040"/>
           </a:xfrm>
           <a:prstGeom prst="rect">
             <a:avLst/>
@@ -16871,7 +16867,7 @@
         <p:spPr>
           <a:xfrm>
             <a:off x="1645920" y="5330952"/>
-            <a:ext cx="3108960" cy="365760"/>
+            <a:ext cx="3291840" cy="365760"/>
           </a:xfrm>
           <a:prstGeom prst="rect">
             <a:avLst/>
@@ -16934,7 +16930,7 @@
                 <a:ea typeface="Malgun Gothic" pitchFamily="34" charset="-122"/>
                 <a:cs typeface="Malgun Gothic" pitchFamily="34" charset="-120"/>
               </a:rPr>
-              <a:t>그 발전소만 PR &lt; 0.75 이면 [ALERT]. 재학습을 막아 고장을 정상으로 학습하지 않는다.</a:t>
+              <a:t>그 발전소만 PR이 0.75 아래면 [ALERT]를 남기고 재학습을 막는다. 고장을 정상으로 학습하지 않는다.</a:t>
             </a:r>
             <a:endParaRPr lang="en-US" sz="1150" dirty="0"/>
           </a:p>
@@ -16954,7 +16950,7 @@
     <p:bg>
       <p:bgPr>
         <a:solidFill>
-          <a:srgbClr val="F6F7FB"/>
+          <a:srgbClr val="FFFFFF"/>
         </a:solidFill>
       </p:bgPr>
     </p:bg>
@@ -16980,8 +16976,8 @@
         </p:nvSpPr>
         <p:spPr>
           <a:xfrm>
-            <a:off x="548640" y="347472"/>
-            <a:ext cx="10241280" cy="640080"/>
+            <a:off x="548640" y="365760"/>
+            <a:ext cx="10332720" cy="640080"/>
           </a:xfrm>
           <a:prstGeom prst="rect">
             <a:avLst/>
@@ -16997,7 +16993,7 @@
               <a:buNone/>
             </a:pPr>
             <a:r>
-              <a:rPr lang="en-US" sz="2600" b="1" dirty="0">
+              <a:rPr lang="en-US" sz="2700" b="1" dirty="0">
                 <a:solidFill>
                   <a:srgbClr val="1A1F2B"/>
                 </a:solidFill>
@@ -17007,7 +17003,7 @@
               </a:rPr>
               <a:t>실제 데이터로 만들었다</a:t>
             </a:r>
-            <a:endParaRPr lang="en-US" sz="2600" dirty="0"/>
+            <a:endParaRPr lang="en-US" sz="2700" dirty="0"/>
           </a:p>
         </p:txBody>
       </p:sp>
@@ -17019,8 +17015,8 @@
         </p:nvSpPr>
         <p:spPr>
           <a:xfrm>
-            <a:off x="548640" y="960120"/>
-            <a:ext cx="10607040" cy="384048"/>
+            <a:off x="548640" y="987552"/>
+            <a:ext cx="10789920" cy="384048"/>
           </a:xfrm>
           <a:prstGeom prst="rect">
             <a:avLst/>
@@ -17044,7 +17040,7 @@
                 <a:ea typeface="Malgun Gothic" pitchFamily="34" charset="-122"/>
                 <a:cs typeface="Malgun Gothic" pitchFamily="34" charset="-120"/>
               </a:rPr>
-              <a:t>공개 발전 실적 + Open-Meteo 기상. 합성 데이터가 아니라 발전소 10곳의 3.7년치 시간별 실적</a:t>
+              <a:t>공개 발전 실적과 Open-Meteo 기상. 합성 데이터가 아니라 발전소 10곳의 3.7년치 시간별 실적이다</a:t>
             </a:r>
             <a:endParaRPr lang="en-US" sz="1300" dirty="0"/>
           </a:p>
@@ -17058,8 +17054,8 @@
         </p:nvSpPr>
         <p:spPr>
           <a:xfrm>
-            <a:off x="11155680" y="384048"/>
-            <a:ext cx="548640" cy="365760"/>
+            <a:off x="11155680" y="411480"/>
+            <a:ext cx="502920" cy="365760"/>
           </a:xfrm>
           <a:prstGeom prst="rect">
             <a:avLst/>
@@ -17075,7 +17071,7 @@
               <a:buNone/>
             </a:pPr>
             <a:r>
-              <a:rPr lang="en-US" sz="1200" dirty="0">
+              <a:rPr lang="en-US" sz="1100" dirty="0">
                 <a:solidFill>
                   <a:srgbClr val="8A93A6"/>
                 </a:solidFill>
@@ -17085,7 +17081,7 @@
               </a:rPr>
               <a:t>04</a:t>
             </a:r>
-            <a:endParaRPr lang="en-US" sz="1200" dirty="0"/>
+            <a:endParaRPr lang="en-US" sz="1100" dirty="0"/>
           </a:p>
         </p:txBody>
       </p:sp>
@@ -17098,7 +17094,7 @@
         <p:spPr>
           <a:xfrm>
             <a:off x="548640" y="6446520"/>
-            <a:ext cx="5486400" cy="274320"/>
+            <a:ext cx="6400800" cy="274320"/>
           </a:xfrm>
           <a:prstGeom prst="rect">
             <a:avLst/>
@@ -17122,7 +17118,7 @@
                 <a:ea typeface="Malgun Gothic" pitchFamily="34" charset="-122"/>
                 <a:cs typeface="Malgun Gothic" pitchFamily="34" charset="-120"/>
               </a:rPr>
-              <a:t>해아림 · 서빙 → MLOps → AIOps</a:t>
+              <a:t>해아림 · 태양광 시간별 발전량 예측 · 서빙 → MLOps → AIOps</a:t>
             </a:r>
             <a:endParaRPr lang="en-US" sz="900" dirty="0"/>
           </a:p>
@@ -17130,7 +17126,7 @@
       </p:sp>
       <p:sp>
         <p:nvSpPr>
-          <p:cNvPr id="6" name="Shape 4"/>
+          <p:cNvPr id="7" name="Shape 4"/>
           <p:cNvSpPr/>
           <p:nvPr/>
         </p:nvSpPr>
@@ -17164,14 +17160,14 @@
       </p:sp>
       <p:sp>
         <p:nvSpPr>
-          <p:cNvPr id="7" name="Text 5"/>
+          <p:cNvPr id="8" name="Text 5"/>
           <p:cNvSpPr txBox="1"/>
           <p:nvPr/>
         </p:nvSpPr>
         <p:spPr>
           <a:xfrm>
-            <a:off x="731520" y="1691640"/>
-            <a:ext cx="2286000" cy="618134"/>
+            <a:off x="749808" y="1682496"/>
+            <a:ext cx="2249424" cy="594360"/>
           </a:xfrm>
           <a:prstGeom prst="rect">
             <a:avLst/>
@@ -17203,14 +17199,14 @@
       </p:sp>
       <p:sp>
         <p:nvSpPr>
-          <p:cNvPr id="8" name="Text 6"/>
+          <p:cNvPr id="9" name="Text 6"/>
           <p:cNvSpPr txBox="1"/>
           <p:nvPr/>
         </p:nvSpPr>
         <p:spPr>
           <a:xfrm>
-            <a:off x="731520" y="2243938"/>
-            <a:ext cx="2286000" cy="451714"/>
+            <a:off x="749808" y="2267712"/>
+            <a:ext cx="2249424" cy="427939"/>
           </a:xfrm>
           <a:prstGeom prst="rect">
             <a:avLst/>
@@ -17242,7 +17238,7 @@
       </p:sp>
       <p:sp>
         <p:nvSpPr>
-          <p:cNvPr id="9" name="Shape 7"/>
+          <p:cNvPr id="10" name="Shape 7"/>
           <p:cNvSpPr/>
           <p:nvPr/>
         </p:nvSpPr>
@@ -17276,14 +17272,14 @@
       </p:sp>
       <p:sp>
         <p:nvSpPr>
-          <p:cNvPr id="10" name="Text 8"/>
+          <p:cNvPr id="11" name="Text 8"/>
           <p:cNvSpPr txBox="1"/>
           <p:nvPr/>
         </p:nvSpPr>
         <p:spPr>
           <a:xfrm>
-            <a:off x="3520440" y="1691640"/>
-            <a:ext cx="2286000" cy="618134"/>
+            <a:off x="3538728" y="1682496"/>
+            <a:ext cx="2249424" cy="594360"/>
           </a:xfrm>
           <a:prstGeom prst="rect">
             <a:avLst/>
@@ -17315,14 +17311,14 @@
       </p:sp>
       <p:sp>
         <p:nvSpPr>
-          <p:cNvPr id="11" name="Text 9"/>
+          <p:cNvPr id="12" name="Text 9"/>
           <p:cNvSpPr txBox="1"/>
           <p:nvPr/>
         </p:nvSpPr>
         <p:spPr>
           <a:xfrm>
-            <a:off x="3520440" y="2243938"/>
-            <a:ext cx="2286000" cy="451714"/>
+            <a:off x="3538728" y="2267712"/>
+            <a:ext cx="2249424" cy="427939"/>
           </a:xfrm>
           <a:prstGeom prst="rect">
             <a:avLst/>
@@ -17346,7 +17342,7 @@
                 <a:ea typeface="Malgun Gothic" pitchFamily="34" charset="-122"/>
                 <a:cs typeface="Malgun Gothic" pitchFamily="34" charset="-120"/>
               </a:rPr>
-              <a:t>2023-01 ~ 2026-08, 321,336 행</a:t>
+              <a:t>2023-01 ~ 2026-08, 321,336행</a:t>
             </a:r>
             <a:endParaRPr lang="en-US" sz="1100" dirty="0"/>
           </a:p>
@@ -17354,7 +17350,7 @@
       </p:sp>
       <p:sp>
         <p:nvSpPr>
-          <p:cNvPr id="12" name="Shape 10"/>
+          <p:cNvPr id="13" name="Shape 10"/>
           <p:cNvSpPr/>
           <p:nvPr/>
         </p:nvSpPr>
@@ -17388,14 +17384,14 @@
       </p:sp>
       <p:sp>
         <p:nvSpPr>
-          <p:cNvPr id="13" name="Text 11"/>
+          <p:cNvPr id="14" name="Text 11"/>
           <p:cNvSpPr txBox="1"/>
           <p:nvPr/>
         </p:nvSpPr>
         <p:spPr>
           <a:xfrm>
-            <a:off x="6309360" y="1691640"/>
-            <a:ext cx="2286000" cy="618134"/>
+            <a:off x="6327648" y="1682496"/>
+            <a:ext cx="2249424" cy="594360"/>
           </a:xfrm>
           <a:prstGeom prst="rect">
             <a:avLst/>
@@ -17419,7 +17415,7 @@
                 <a:ea typeface="Malgun Gothic" pitchFamily="34" charset="-122"/>
                 <a:cs typeface="Malgun Gothic" pitchFamily="34" charset="-120"/>
               </a:rPr>
-              <a:t>7 위치</a:t>
+              <a:t>7개 위치</a:t>
             </a:r>
             <a:endParaRPr lang="en-US" sz="3000" dirty="0"/>
           </a:p>
@@ -17427,14 +17423,14 @@
       </p:sp>
       <p:sp>
         <p:nvSpPr>
-          <p:cNvPr id="14" name="Text 12"/>
+          <p:cNvPr id="15" name="Text 12"/>
           <p:cNvSpPr txBox="1"/>
           <p:nvPr/>
         </p:nvSpPr>
         <p:spPr>
           <a:xfrm>
-            <a:off x="6309360" y="2243938"/>
-            <a:ext cx="2286000" cy="451714"/>
+            <a:off x="6327648" y="2267712"/>
+            <a:ext cx="2249424" cy="427939"/>
           </a:xfrm>
           <a:prstGeom prst="rect">
             <a:avLst/>
@@ -17458,7 +17454,7 @@
                 <a:ea typeface="Malgun Gothic" pitchFamily="34" charset="-122"/>
                 <a:cs typeface="Malgun Gothic" pitchFamily="34" charset="-120"/>
               </a:rPr>
-              <a:t>Open-Meteo 관측·하루 전 예보 (일사량·운량·기온)</a:t>
+              <a:t>Open-Meteo 관측과 하루 전 예보 (일사량·운량·기온)</a:t>
             </a:r>
             <a:endParaRPr lang="en-US" sz="1100" dirty="0"/>
           </a:p>
@@ -17466,7 +17462,7 @@
       </p:sp>
       <p:sp>
         <p:nvSpPr>
-          <p:cNvPr id="15" name="Shape 13"/>
+          <p:cNvPr id="16" name="Shape 13"/>
           <p:cNvSpPr/>
           <p:nvPr/>
         </p:nvSpPr>
@@ -17500,14 +17496,14 @@
       </p:sp>
       <p:sp>
         <p:nvSpPr>
-          <p:cNvPr id="16" name="Text 14"/>
+          <p:cNvPr id="17" name="Text 14"/>
           <p:cNvSpPr txBox="1"/>
           <p:nvPr/>
         </p:nvSpPr>
         <p:spPr>
           <a:xfrm>
-            <a:off x="9098280" y="1691640"/>
-            <a:ext cx="2331720" cy="618134"/>
+            <a:off x="9116568" y="1682496"/>
+            <a:ext cx="2295144" cy="594360"/>
           </a:xfrm>
           <a:prstGeom prst="rect">
             <a:avLst/>
@@ -17539,14 +17535,14 @@
       </p:sp>
       <p:sp>
         <p:nvSpPr>
-          <p:cNvPr id="17" name="Text 15"/>
+          <p:cNvPr id="18" name="Text 15"/>
           <p:cNvSpPr txBox="1"/>
           <p:nvPr/>
         </p:nvSpPr>
         <p:spPr>
           <a:xfrm>
-            <a:off x="9098280" y="2243938"/>
-            <a:ext cx="2331720" cy="451714"/>
+            <a:off x="9116568" y="2267712"/>
+            <a:ext cx="2295144" cy="427939"/>
           </a:xfrm>
           <a:prstGeom prst="rect">
             <a:avLst/>
@@ -17600,8 +17596,8 @@
               <a:tblPr/>
               <a:tblGrid>
                 <a:gridCol w="1463040"/>
-                <a:gridCol w="5120640"/>
-                <a:gridCol w="4480560"/>
+                <a:gridCol w="5303520"/>
+                <a:gridCol w="4297680"/>
               </a:tblGrid>
               <a:tr h="457200">
                 <a:tc>
@@ -17668,7 +17664,7 @@
                       <a:tailEnd type="none" w="med" len="med"/>
                     </a:lnB>
                     <a:solidFill>
-                      <a:srgbClr val="F0F2F7"/>
+                      <a:srgbClr val="F3F5F9"/>
                     </a:solidFill>
                   </a:tcPr>
                 </a:tc>
@@ -17736,7 +17732,7 @@
                       <a:tailEnd type="none" w="med" len="med"/>
                     </a:lnB>
                     <a:solidFill>
-                      <a:srgbClr val="F0F2F7"/>
+                      <a:srgbClr val="F3F5F9"/>
                     </a:solidFill>
                   </a:tcPr>
                 </a:tc>
@@ -17804,7 +17800,7 @@
                       <a:tailEnd type="none" w="med" len="med"/>
                     </a:lnB>
                     <a:solidFill>
-                      <a:srgbClr val="F0F2F7"/>
+                      <a:srgbClr val="F3F5F9"/>
                     </a:solidFill>
                   </a:tcPr>
                 </a:tc>
@@ -17963,7 +17959,7 @@
                           <a:ea typeface="Malgun Gothic" pitchFamily="34" charset="-122"/>
                           <a:cs typeface="Malgun Gothic" pitchFamily="34" charset="-120"/>
                         </a:rPr>
-                        <a:t>발전소 10곳을 한 모델로 통합 (용량이 달라도 같은 척도)</a:t>
+                        <a:t>용량이 다른 발전소 10곳을 한 모델로 통합</a:t>
                       </a:r>
                       <a:endParaRPr lang="en-US" sz="1050" dirty="0">
                         <a:latin typeface="Malgun Gothic" charset="0"/>
@@ -18101,7 +18097,7 @@
                           <a:ea typeface="Malgun Gothic" pitchFamily="34" charset="-122"/>
                           <a:cs typeface="Malgun Gothic" pitchFamily="34" charset="-120"/>
                         </a:rPr>
-                        <a:t>발전 "N시" = N-1~N 구간, 기상은 TN:00 직전 1시간 평균, 24:00 → 다음날 T00:00</a:t>
+                        <a:t>발전 "N시" = N-1~N시 구간, 기상은 N시 직전 1시간 평균, 24:00은 다음날 00:00</a:t>
                       </a:r>
                       <a:endParaRPr lang="en-US" sz="1050" dirty="0">
                         <a:latin typeface="Malgun Gothic" charset="0"/>
@@ -18169,7 +18165,7 @@
                           <a:ea typeface="Malgun Gothic" pitchFamily="34" charset="-122"/>
                           <a:cs typeface="Malgun Gothic" pitchFamily="34" charset="-120"/>
                         </a:rPr>
-                        <a:t>발전·기상 피크가 어긋나지 않게</a:t>
+                        <a:t>발전과 기상의 피크가 어긋나지 않게</a:t>
                       </a:r>
                       <a:endParaRPr lang="en-US" sz="1050" dirty="0">
                         <a:latin typeface="Malgun Gothic" charset="0"/>
@@ -18307,7 +18303,7 @@
                           <a:ea typeface="Malgun Gothic" pitchFamily="34" charset="-122"/>
                           <a:cs typeface="Malgun Gothic" pitchFamily="34" charset="-120"/>
                         </a:rPr>
-                        <a:t>시간별 급변 25~52%, 피크 3~4h 지연, 장기 정지</a:t>
+                        <a:t>시간별 급변 25~52%, 피크 3~4시간 지연, 장기 정지</a:t>
                       </a:r>
                       <a:endParaRPr lang="en-US" sz="1050" dirty="0">
                         <a:latin typeface="Malgun Gothic" charset="0"/>
@@ -18513,7 +18509,7 @@
                           <a:ea typeface="Malgun Gothic" pitchFamily="34" charset="-122"/>
                           <a:cs typeface="Malgun Gothic" pitchFamily="34" charset="-120"/>
                         </a:rPr>
-                        <a:t>시간 피크로 추정 (공식값은 plants.csv 에 채우면 반영)</a:t>
+                        <a:t>시간 피크로 추정 (공식값은 plants.csv에 넣으면 그대로 반영)</a:t>
                       </a:r>
                       <a:endParaRPr lang="en-US" sz="1050" dirty="0">
                         <a:latin typeface="Malgun Gothic" charset="0"/>
@@ -18581,7 +18577,7 @@
                           <a:ea typeface="Malgun Gothic" pitchFamily="34" charset="-122"/>
                           <a:cs typeface="Malgun Gothic" pitchFamily="34" charset="-120"/>
                         </a:rPr>
-                        <a:t>오차율 분모라 공식값 확인이 필요</a:t>
+                        <a:t>오차율의 분모이므로 공식값 확인이 필요</a:t>
                       </a:r>
                       <a:endParaRPr lang="en-US" sz="1050" dirty="0">
                         <a:latin typeface="Malgun Gothic" charset="0"/>
@@ -18719,7 +18715,7 @@
                           <a:ea typeface="Malgun Gothic" pitchFamily="34" charset="-122"/>
                           <a:cs typeface="Malgun Gothic" pitchFamily="34" charset="-120"/>
                         </a:rPr>
-                        <a:t>학습은 관측 기상, 평가·서빙은 하루 전 예보도 함께</a:t>
+                        <a:t>학습은 관측 기상, 평가와 서빙은 하루 전 예보도 함께</a:t>
                       </a:r>
                       <a:endParaRPr lang="en-US" sz="1050" dirty="0">
                         <a:latin typeface="Malgun Gothic" charset="0"/>
@@ -18857,7 +18853,7 @@
     <p:bg>
       <p:bgPr>
         <a:solidFill>
-          <a:srgbClr val="F6F7FB"/>
+          <a:srgbClr val="FFFFFF"/>
         </a:solidFill>
       </p:bgPr>
     </p:bg>
@@ -18883,8 +18879,8 @@
         </p:nvSpPr>
         <p:spPr>
           <a:xfrm>
-            <a:off x="548640" y="347472"/>
-            <a:ext cx="10241280" cy="640080"/>
+            <a:off x="548640" y="365760"/>
+            <a:ext cx="10332720" cy="640080"/>
           </a:xfrm>
           <a:prstGeom prst="rect">
             <a:avLst/>
@@ -18900,7 +18896,7 @@
               <a:buNone/>
             </a:pPr>
             <a:r>
-              <a:rPr lang="en-US" sz="2600" b="1" dirty="0">
+              <a:rPr lang="en-US" sz="2700" b="1" dirty="0">
                 <a:solidFill>
                   <a:srgbClr val="1A1F2B"/>
                 </a:solidFill>
@@ -18910,7 +18906,7 @@
               </a:rPr>
               <a:t>시간별 통합 모델 구조</a:t>
             </a:r>
-            <a:endParaRPr lang="en-US" sz="2600" dirty="0"/>
+            <a:endParaRPr lang="en-US" sz="2700" dirty="0"/>
           </a:p>
         </p:txBody>
       </p:sp>
@@ -18922,8 +18918,8 @@
         </p:nvSpPr>
         <p:spPr>
           <a:xfrm>
-            <a:off x="548640" y="960120"/>
-            <a:ext cx="10607040" cy="384048"/>
+            <a:off x="548640" y="987552"/>
+            <a:ext cx="10789920" cy="384048"/>
           </a:xfrm>
           <a:prstGeom prst="rect">
             <a:avLst/>
@@ -18961,8 +18957,8 @@
         </p:nvSpPr>
         <p:spPr>
           <a:xfrm>
-            <a:off x="11155680" y="384048"/>
-            <a:ext cx="548640" cy="365760"/>
+            <a:off x="11155680" y="411480"/>
+            <a:ext cx="502920" cy="365760"/>
           </a:xfrm>
           <a:prstGeom prst="rect">
             <a:avLst/>
@@ -18978,7 +18974,7 @@
               <a:buNone/>
             </a:pPr>
             <a:r>
-              <a:rPr lang="en-US" sz="1200" dirty="0">
+              <a:rPr lang="en-US" sz="1100" dirty="0">
                 <a:solidFill>
                   <a:srgbClr val="8A93A6"/>
                 </a:solidFill>
@@ -18988,7 +18984,7 @@
               </a:rPr>
               <a:t>05</a:t>
             </a:r>
-            <a:endParaRPr lang="en-US" sz="1200" dirty="0"/>
+            <a:endParaRPr lang="en-US" sz="1100" dirty="0"/>
           </a:p>
         </p:txBody>
       </p:sp>
@@ -19001,7 +18997,7 @@
         <p:spPr>
           <a:xfrm>
             <a:off x="548640" y="6446520"/>
-            <a:ext cx="5486400" cy="274320"/>
+            <a:ext cx="6400800" cy="274320"/>
           </a:xfrm>
           <a:prstGeom prst="rect">
             <a:avLst/>
@@ -19025,7 +19021,7 @@
                 <a:ea typeface="Malgun Gothic" pitchFamily="34" charset="-122"/>
                 <a:cs typeface="Malgun Gothic" pitchFamily="34" charset="-120"/>
               </a:rPr>
-              <a:t>해아림 · 서빙 → MLOps → AIOps</a:t>
+              <a:t>해아림 · 태양광 시간별 발전량 예측 · 서빙 → MLOps → AIOps</a:t>
             </a:r>
             <a:endParaRPr lang="en-US" sz="900" dirty="0"/>
           </a:p>
@@ -19048,7 +19044,7 @@
             </a:avLst>
           </a:prstGeom>
           <a:solidFill>
-            <a:srgbClr val="F0F2F7"/>
+            <a:srgbClr val="F3F5F9"/>
           </a:solidFill>
           <a:ln w="9525">
             <a:solidFill>
@@ -19160,7 +19156,7 @@
             </a:avLst>
           </a:prstGeom>
           <a:solidFill>
-            <a:srgbClr val="F0F2F7"/>
+            <a:srgbClr val="F3F5F9"/>
           </a:solidFill>
           <a:ln w="9525">
             <a:solidFill>
@@ -19249,7 +19245,7 @@
                 <a:ea typeface="Malgun Gothic" pitchFamily="34" charset="-122"/>
                 <a:cs typeface="Malgun Gothic" pitchFamily="34" charset="-120"/>
               </a:rPr>
-              <a:t>일사량 · 운량 · 기온 + sin 태양고도</a:t>
+              <a:t>일사량 · 운량 · 기온 + sin(태양고도)</a:t>
             </a:r>
             <a:endParaRPr lang="en-US" sz="1050" dirty="0"/>
           </a:p>
@@ -19272,7 +19268,7 @@
             </a:avLst>
           </a:prstGeom>
           <a:solidFill>
-            <a:srgbClr val="F0F2F7"/>
+            <a:srgbClr val="F3F5F9"/>
           </a:solidFill>
           <a:ln w="9525">
             <a:solidFill>
@@ -19384,7 +19380,7 @@
             </a:avLst>
           </a:prstGeom>
           <a:solidFill>
-            <a:srgbClr val="F0F2F7"/>
+            <a:srgbClr val="F3F5F9"/>
           </a:solidFill>
           <a:ln w="9525">
             <a:solidFill>
@@ -19496,7 +19492,7 @@
             </a:avLst>
           </a:prstGeom>
           <a:solidFill>
-            <a:srgbClr val="F0F2F7"/>
+            <a:srgbClr val="F3F5F9"/>
           </a:solidFill>
           <a:ln w="9525">
             <a:solidFill>
@@ -19608,7 +19604,7 @@
             </a:avLst>
           </a:prstGeom>
           <a:solidFill>
-            <a:srgbClr val="F0F2F7"/>
+            <a:srgbClr val="F3F5F9"/>
           </a:solidFill>
           <a:ln w="9525">
             <a:solidFill>
@@ -19720,7 +19716,7 @@
             </a:avLst>
           </a:prstGeom>
           <a:solidFill>
-            <a:srgbClr val="F0F2F7"/>
+            <a:srgbClr val="F3F5F9"/>
           </a:solidFill>
           <a:ln w="9525">
             <a:solidFill>
@@ -19809,7 +19805,7 @@
                 <a:ea typeface="Malgun Gothic" pitchFamily="34" charset="-122"/>
                 <a:cs typeface="Malgun Gothic" pitchFamily="34" charset="-120"/>
               </a:rPr>
-              <a:t>sigmoid, 낮 시간 가중 MAE (y ≥ 0.10 가중 1, 밤 0.15)</a:t>
+              <a:t>sigmoid 출력. 손실은 낮 시간 가중 MAE (이용률 10% 이상 가중 1, 그 외 0.15)</a:t>
             </a:r>
             <a:endParaRPr lang="en-US" sz="1050" dirty="0"/>
           </a:p>
@@ -19832,7 +19828,7 @@
             </a:avLst>
           </a:prstGeom>
           <a:solidFill>
-            <a:srgbClr val="F0F2F7"/>
+            <a:srgbClr val="F3F5F9"/>
           </a:solidFill>
           <a:ln w="9525">
             <a:solidFill>
@@ -19921,7 +19917,7 @@
                 <a:ea typeface="Malgun Gothic" pitchFamily="34" charset="-122"/>
                 <a:cs typeface="Malgun Gothic" pitchFamily="34" charset="-120"/>
               </a:rPr>
-              <a:t>hourly_kwh[24] · 태양고도 0 시간은 0 마스킹</a:t>
+              <a:t>hourly_kwh[24]. 태양고도가 0인 시간은 0으로 마스킹</a:t>
             </a:r>
             <a:endParaRPr lang="en-US" sz="1050" dirty="0"/>
           </a:p>
@@ -20097,14 +20093,48 @@
       </p:sp>
       <p:sp>
         <p:nvSpPr>
-          <p:cNvPr id="37" name="Text 35"/>
+          <p:cNvPr id="37" name="Shape 35"/>
+          <p:cNvSpPr/>
+          <p:nvPr/>
+        </p:nvSpPr>
+        <p:spPr>
+          <a:xfrm>
+            <a:off x="548640" y="5623560"/>
+            <a:ext cx="11064240" cy="658368"/>
+          </a:xfrm>
+          <a:prstGeom prst="roundRect">
+            <a:avLst>
+              <a:gd name="adj" fmla="val 16667"/>
+            </a:avLst>
+          </a:prstGeom>
+          <a:solidFill>
+            <a:srgbClr val="F3F5F9"/>
+          </a:solidFill>
+          <a:ln w="9525">
+            <a:solidFill>
+              <a:srgbClr val="DDE2EC"/>
+            </a:solidFill>
+            <a:prstDash val="solid"/>
+          </a:ln>
+          <a:effectLst>
+            <a:outerShdw sx="100000" sy="100000" kx="0" ky="0" algn="bl" rotWithShape="0" blurRad="50800" dist="12700" dir="5400000">
+              <a:srgbClr val="000000">
+                <a:alpha val="6000"/>
+              </a:srgbClr>
+            </a:outerShdw>
+          </a:effectLst>
+        </p:spPr>
+      </p:sp>
+      <p:sp>
+        <p:nvSpPr>
+          <p:cNvPr id="38" name="Text 36"/>
           <p:cNvSpPr txBox="1"/>
           <p:nvPr/>
         </p:nvSpPr>
         <p:spPr>
           <a:xfrm>
-            <a:off x="548640" y="5623560"/>
-            <a:ext cx="2743200" cy="320040"/>
+            <a:off x="731520" y="5742432"/>
+            <a:ext cx="2011680" cy="320040"/>
           </a:xfrm>
           <a:prstGeom prst="rect">
             <a:avLst/>
@@ -20136,13 +20166,13 @@
       </p:sp>
       <p:sp>
         <p:nvSpPr>
-          <p:cNvPr id="38" name="Text 36"/>
+          <p:cNvPr id="39" name="Text 37"/>
           <p:cNvSpPr txBox="1"/>
           <p:nvPr/>
         </p:nvSpPr>
         <p:spPr>
           <a:xfrm>
-            <a:off x="2926080" y="5623560"/>
+            <a:off x="2743200" y="5696712"/>
             <a:ext cx="8686800" cy="548640"/>
           </a:xfrm>
           <a:prstGeom prst="rect">
@@ -20167,7 +20197,7 @@
                 <a:ea typeface="Malgun Gothic" pitchFamily="34" charset="-122"/>
                 <a:cs typeface="Malgun Gothic" pitchFamily="34" charset="-120"/>
               </a:rPr>
-              <a:t>mse 8.98% → 낮 가중 MAE 8.33% → 발전소 임베딩 7.99% (실험). 학습 길이·피처 추가·앙상블은 효과 없음. 제도 오차율은 낮 시간만 세므로 손실도 낮에 집중.</a:t>
+              <a:t>mse 8.98% → 낮 가중 MAE 8.33% → 발전소 임베딩 7.99% (실험). 학습 길이, 피처 추가, 앙상블은 효과가 없었다. 제도 오차율은 낮 시간만 세므로 손실도 낮에 집중했다.</a:t>
             </a:r>
             <a:endParaRPr lang="en-US" sz="1100" dirty="0"/>
           </a:p>
@@ -20187,7 +20217,7 @@
     <p:bg>
       <p:bgPr>
         <a:solidFill>
-          <a:srgbClr val="F6F7FB"/>
+          <a:srgbClr val="FFFFFF"/>
         </a:solidFill>
       </p:bgPr>
     </p:bg>
@@ -20213,8 +20243,8 @@
         </p:nvSpPr>
         <p:spPr>
           <a:xfrm>
-            <a:off x="548640" y="347472"/>
-            <a:ext cx="10241280" cy="640080"/>
+            <a:off x="548640" y="365760"/>
+            <a:ext cx="10332720" cy="640080"/>
           </a:xfrm>
           <a:prstGeom prst="rect">
             <a:avLst/>
@@ -20230,7 +20260,7 @@
               <a:buNone/>
             </a:pPr>
             <a:r>
-              <a:rPr lang="en-US" sz="2600" b="1" dirty="0">
+              <a:rPr lang="en-US" sz="2700" b="1" dirty="0">
                 <a:solidFill>
                   <a:srgbClr val="1A1F2B"/>
                 </a:solidFill>
@@ -20240,7 +20270,7 @@
               </a:rPr>
               <a:t>기준선 대비 오차 절반, 서빙 조건까지 측정</a:t>
             </a:r>
-            <a:endParaRPr lang="en-US" sz="2600" dirty="0"/>
+            <a:endParaRPr lang="en-US" sz="2700" dirty="0"/>
           </a:p>
         </p:txBody>
       </p:sp>
@@ -20252,8 +20282,8 @@
         </p:nvSpPr>
         <p:spPr>
           <a:xfrm>
-            <a:off x="548640" y="960120"/>
-            <a:ext cx="10607040" cy="384048"/>
+            <a:off x="548640" y="987552"/>
+            <a:ext cx="10789920" cy="384048"/>
           </a:xfrm>
           <a:prstGeom prst="rect">
             <a:avLst/>
@@ -20277,7 +20307,7 @@
                 <a:ea typeface="Malgun Gothic" pitchFamily="34" charset="-122"/>
                 <a:cs typeface="Malgun Gothic" pitchFamily="34" charset="-120"/>
               </a:rPr>
-              <a:t>테스트 1년 · 발전소 10곳 · 3,534 발전소-일 · 일 오차율 = 용량 대비 시간 오차의 낮 시간 평균</a:t>
+              <a:t>테스트 1년 · 발전소 10곳 · 3,534 발전소-일. 일 오차율 = 용량 대비 시간 오차의 낮 시간 평균</a:t>
             </a:r>
             <a:endParaRPr lang="en-US" sz="1300" dirty="0"/>
           </a:p>
@@ -20291,8 +20321,8 @@
         </p:nvSpPr>
         <p:spPr>
           <a:xfrm>
-            <a:off x="11155680" y="384048"/>
-            <a:ext cx="548640" cy="365760"/>
+            <a:off x="11155680" y="411480"/>
+            <a:ext cx="502920" cy="365760"/>
           </a:xfrm>
           <a:prstGeom prst="rect">
             <a:avLst/>
@@ -20308,7 +20338,7 @@
               <a:buNone/>
             </a:pPr>
             <a:r>
-              <a:rPr lang="en-US" sz="1200" dirty="0">
+              <a:rPr lang="en-US" sz="1100" dirty="0">
                 <a:solidFill>
                   <a:srgbClr val="8A93A6"/>
                 </a:solidFill>
@@ -20318,7 +20348,7 @@
               </a:rPr>
               <a:t>06</a:t>
             </a:r>
-            <a:endParaRPr lang="en-US" sz="1200" dirty="0"/>
+            <a:endParaRPr lang="en-US" sz="1100" dirty="0"/>
           </a:p>
         </p:txBody>
       </p:sp>
@@ -20331,7 +20361,7 @@
         <p:spPr>
           <a:xfrm>
             <a:off x="548640" y="6446520"/>
-            <a:ext cx="5486400" cy="274320"/>
+            <a:ext cx="6400800" cy="274320"/>
           </a:xfrm>
           <a:prstGeom prst="rect">
             <a:avLst/>
@@ -20355,7 +20385,7 @@
                 <a:ea typeface="Malgun Gothic" pitchFamily="34" charset="-122"/>
                 <a:cs typeface="Malgun Gothic" pitchFamily="34" charset="-120"/>
               </a:rPr>
-              <a:t>해아림 · 서빙 → MLOps → AIOps</a:t>
+              <a:t>해아림 · 태양광 시간별 발전량 예측 · 서빙 → MLOps → AIOps</a:t>
             </a:r>
             <a:endParaRPr lang="en-US" sz="900" dirty="0"/>
           </a:p>
@@ -20363,13 +20393,13 @@
       </p:sp>
       <p:graphicFrame>
         <p:nvGraphicFramePr>
-          <p:cNvPr id="6" name="Chart 0" descr=""/>
+          <p:cNvPr id="7" name="Chart 0" descr=""/>
           <p:cNvGraphicFramePr/>
           <p:nvPr/>
         </p:nvGraphicFramePr>
         <p:xfrm>
           <a:off x="548640" y="1463040"/>
-          <a:ext cx="6583680" cy="3657600"/>
+          <a:ext cx="6675120" cy="3566160"/>
         </p:xfrm>
         <a:graphic xmlns:a="http://schemas.openxmlformats.org/drawingml/2006/main">
           <a:graphicData uri="http://schemas.openxmlformats.org/drawingml/2006/chart">
@@ -20379,7 +20409,7 @@
       </p:graphicFrame>
       <p:sp>
         <p:nvSpPr>
-          <p:cNvPr id="7" name="Shape 4"/>
+          <p:cNvPr id="8" name="Shape 4"/>
           <p:cNvSpPr/>
           <p:nvPr/>
         </p:nvSpPr>
@@ -20413,14 +20443,14 @@
       </p:sp>
       <p:sp>
         <p:nvSpPr>
-          <p:cNvPr id="8" name="Text 5"/>
+          <p:cNvPr id="9" name="Text 5"/>
           <p:cNvSpPr txBox="1"/>
           <p:nvPr/>
         </p:nvSpPr>
         <p:spPr>
           <a:xfrm>
-            <a:off x="7589520" y="1600200"/>
-            <a:ext cx="1645920" cy="594360"/>
+            <a:off x="7607808" y="1591056"/>
+            <a:ext cx="1609344" cy="571500"/>
           </a:xfrm>
           <a:prstGeom prst="rect">
             <a:avLst/>
@@ -20452,14 +20482,14 @@
       </p:sp>
       <p:sp>
         <p:nvSpPr>
-          <p:cNvPr id="9" name="Text 6"/>
+          <p:cNvPr id="10" name="Text 6"/>
           <p:cNvSpPr txBox="1"/>
           <p:nvPr/>
         </p:nvSpPr>
         <p:spPr>
           <a:xfrm>
-            <a:off x="7589520" y="2125980"/>
-            <a:ext cx="1645920" cy="434340"/>
+            <a:off x="7607808" y="2148840"/>
+            <a:ext cx="1609344" cy="411480"/>
           </a:xfrm>
           <a:prstGeom prst="rect">
             <a:avLst/>
@@ -20483,7 +20513,7 @@
                 <a:ea typeface="Malgun Gothic" pitchFamily="34" charset="-122"/>
                 <a:cs typeface="Malgun Gothic" pitchFamily="34" charset="-120"/>
               </a:rPr>
-              <a:t>운영 모델 일 오차율 (관측 기상)</a:t>
+              <a:t>운영 모델 일 오차율 (관측 기상 입력)</a:t>
             </a:r>
             <a:endParaRPr lang="en-US" sz="1100" dirty="0"/>
           </a:p>
@@ -20491,7 +20521,7 @@
       </p:sp>
       <p:sp>
         <p:nvSpPr>
-          <p:cNvPr id="10" name="Shape 7"/>
+          <p:cNvPr id="11" name="Shape 7"/>
           <p:cNvSpPr/>
           <p:nvPr/>
         </p:nvSpPr>
@@ -20525,14 +20555,14 @@
       </p:sp>
       <p:sp>
         <p:nvSpPr>
-          <p:cNvPr id="11" name="Text 8"/>
+          <p:cNvPr id="12" name="Text 8"/>
           <p:cNvSpPr txBox="1"/>
           <p:nvPr/>
         </p:nvSpPr>
         <p:spPr>
           <a:xfrm>
-            <a:off x="9784080" y="1600200"/>
-            <a:ext cx="1645920" cy="594360"/>
+            <a:off x="9802368" y="1591056"/>
+            <a:ext cx="1609344" cy="571500"/>
           </a:xfrm>
           <a:prstGeom prst="rect">
             <a:avLst/>
@@ -20564,14 +20594,14 @@
       </p:sp>
       <p:sp>
         <p:nvSpPr>
-          <p:cNvPr id="12" name="Text 9"/>
+          <p:cNvPr id="13" name="Text 9"/>
           <p:cNvSpPr txBox="1"/>
           <p:nvPr/>
         </p:nvSpPr>
         <p:spPr>
           <a:xfrm>
-            <a:off x="9784080" y="2125980"/>
-            <a:ext cx="1645920" cy="434340"/>
+            <a:off x="9802368" y="2148840"/>
+            <a:ext cx="1609344" cy="411480"/>
           </a:xfrm>
           <a:prstGeom prst="rect">
             <a:avLst/>
@@ -20603,7 +20633,7 @@
       </p:sp>
       <p:sp>
         <p:nvSpPr>
-          <p:cNvPr id="13" name="Shape 10"/>
+          <p:cNvPr id="14" name="Shape 10"/>
           <p:cNvSpPr/>
           <p:nvPr/>
         </p:nvSpPr>
@@ -20637,14 +20667,14 @@
       </p:sp>
       <p:sp>
         <p:nvSpPr>
-          <p:cNvPr id="14" name="Text 11"/>
+          <p:cNvPr id="15" name="Text 11"/>
           <p:cNvSpPr txBox="1"/>
           <p:nvPr/>
         </p:nvSpPr>
         <p:spPr>
           <a:xfrm>
-            <a:off x="7589520" y="2880360"/>
-            <a:ext cx="1645920" cy="594360"/>
+            <a:off x="7607808" y="2871216"/>
+            <a:ext cx="1609344" cy="571500"/>
           </a:xfrm>
           <a:prstGeom prst="rect">
             <a:avLst/>
@@ -20676,14 +20706,14 @@
       </p:sp>
       <p:sp>
         <p:nvSpPr>
-          <p:cNvPr id="15" name="Text 12"/>
+          <p:cNvPr id="16" name="Text 12"/>
           <p:cNvSpPr txBox="1"/>
           <p:nvPr/>
         </p:nvSpPr>
         <p:spPr>
           <a:xfrm>
-            <a:off x="7589520" y="3406140"/>
-            <a:ext cx="1645920" cy="434340"/>
+            <a:off x="7607808" y="3429000"/>
+            <a:ext cx="1609344" cy="411480"/>
           </a:xfrm>
           <a:prstGeom prst="rect">
             <a:avLst/>
@@ -20715,7 +20745,7 @@
       </p:sp>
       <p:sp>
         <p:nvSpPr>
-          <p:cNvPr id="16" name="Shape 13"/>
+          <p:cNvPr id="17" name="Shape 13"/>
           <p:cNvSpPr/>
           <p:nvPr/>
         </p:nvSpPr>
@@ -20749,14 +20779,14 @@
       </p:sp>
       <p:sp>
         <p:nvSpPr>
-          <p:cNvPr id="17" name="Text 14"/>
+          <p:cNvPr id="18" name="Text 14"/>
           <p:cNvSpPr txBox="1"/>
           <p:nvPr/>
         </p:nvSpPr>
         <p:spPr>
           <a:xfrm>
-            <a:off x="9784080" y="2880360"/>
-            <a:ext cx="1645920" cy="594360"/>
+            <a:off x="9802368" y="2871216"/>
+            <a:ext cx="1609344" cy="571500"/>
           </a:xfrm>
           <a:prstGeom prst="rect">
             <a:avLst/>
@@ -20788,14 +20818,14 @@
       </p:sp>
       <p:sp>
         <p:nvSpPr>
-          <p:cNvPr id="18" name="Text 15"/>
+          <p:cNvPr id="19" name="Text 15"/>
           <p:cNvSpPr txBox="1"/>
           <p:nvPr/>
         </p:nvSpPr>
         <p:spPr>
           <a:xfrm>
-            <a:off x="9784080" y="3406140"/>
-            <a:ext cx="1645920" cy="434340"/>
+            <a:off x="9802368" y="3429000"/>
+            <a:ext cx="1609344" cy="411480"/>
           </a:xfrm>
           <a:prstGeom prst="rect">
             <a:avLst/>
@@ -20827,18 +20857,18 @@
       </p:sp>
       <p:sp>
         <p:nvSpPr>
-          <p:cNvPr id="19" name="Shape 16"/>
+          <p:cNvPr id="20" name="Shape 16"/>
           <p:cNvSpPr/>
           <p:nvPr/>
         </p:nvSpPr>
         <p:spPr>
           <a:xfrm>
             <a:off x="7406640" y="4023360"/>
-            <a:ext cx="4206240" cy="1097280"/>
+            <a:ext cx="4206240" cy="1005840"/>
           </a:xfrm>
           <a:prstGeom prst="roundRect">
             <a:avLst>
-              <a:gd name="adj" fmla="val 10000"/>
+              <a:gd name="adj" fmla="val 10909"/>
             </a:avLst>
           </a:prstGeom>
           <a:solidFill>
@@ -20861,14 +20891,14 @@
       </p:sp>
       <p:sp>
         <p:nvSpPr>
-          <p:cNvPr id="20" name="Text 17"/>
+          <p:cNvPr id="21" name="Text 17"/>
           <p:cNvSpPr txBox="1"/>
           <p:nvPr/>
         </p:nvSpPr>
         <p:spPr>
           <a:xfrm>
             <a:off x="7589520" y="4133088"/>
-            <a:ext cx="3886200" cy="914400"/>
+            <a:ext cx="3886200" cy="822960"/>
           </a:xfrm>
           <a:prstGeom prst="rect">
             <a:avLst/>
@@ -20892,7 +20922,7 @@
                 <a:ea typeface="Malgun Gothic" pitchFamily="34" charset="-122"/>
                 <a:cs typeface="Malgun Gothic" pitchFamily="34" charset="-120"/>
               </a:rPr>
-              <a:t>예보 입력 격차 1.5%p 는 드리프트가 아니라 입력 품질의 몫. 재학습이 아니라 예보 파이프라인(소스·최신 런·예보로 학습)으로 줄이는 과제.</a:t>
+              <a:t>예보 입력 격차 1.5%p는 드리프트가 아니라 입력 품질의 몫이다. 예보 소스와 최신 런 사용, 예보로 학습하는 것이 다음 과제.</a:t>
             </a:r>
             <a:endParaRPr lang="en-US" sz="1050" dirty="0"/>
           </a:p>
@@ -20900,13 +20930,13 @@
       </p:sp>
       <p:graphicFrame>
         <p:nvGraphicFramePr>
-          <p:cNvPr id="21" name="Chart 1" descr=""/>
+          <p:cNvPr id="22" name="Chart 1" descr=""/>
           <p:cNvGraphicFramePr/>
           <p:nvPr/>
         </p:nvGraphicFramePr>
         <p:xfrm>
-          <a:off x="548640" y="5212080"/>
-          <a:ext cx="11064240" cy="1188720"/>
+          <a:off x="548640" y="5120640"/>
+          <a:ext cx="11064240" cy="1234440"/>
         </p:xfrm>
         <a:graphic xmlns:a="http://schemas.openxmlformats.org/drawingml/2006/main">
           <a:graphicData uri="http://schemas.openxmlformats.org/drawingml/2006/chart">
@@ -20928,7 +20958,7 @@
     <p:bg>
       <p:bgPr>
         <a:solidFill>
-          <a:srgbClr val="F6F7FB"/>
+          <a:srgbClr val="FFFFFF"/>
         </a:solidFill>
       </p:bgPr>
     </p:bg>
@@ -20954,8 +20984,8 @@
         </p:nvSpPr>
         <p:spPr>
           <a:xfrm>
-            <a:off x="548640" y="347472"/>
-            <a:ext cx="10241280" cy="640080"/>
+            <a:off x="548640" y="365760"/>
+            <a:ext cx="10332720" cy="640080"/>
           </a:xfrm>
           <a:prstGeom prst="rect">
             <a:avLst/>
@@ -20971,7 +21001,7 @@
               <a:buNone/>
             </a:pPr>
             <a:r>
-              <a:rPr lang="en-US" sz="2600" b="1" dirty="0">
+              <a:rPr lang="en-US" sz="2700" b="1" dirty="0">
                 <a:solidFill>
                   <a:srgbClr val="1A1F2B"/>
                 </a:solidFill>
@@ -20981,7 +21011,7 @@
               </a:rPr>
               <a:t>지표 하나로 통일하고, 게이트가 배포를 막는다</a:t>
             </a:r>
-            <a:endParaRPr lang="en-US" sz="2600" dirty="0"/>
+            <a:endParaRPr lang="en-US" sz="2700" dirty="0"/>
           </a:p>
         </p:txBody>
       </p:sp>
@@ -20993,8 +21023,8 @@
         </p:nvSpPr>
         <p:spPr>
           <a:xfrm>
-            <a:off x="548640" y="960120"/>
-            <a:ext cx="10607040" cy="384048"/>
+            <a:off x="548640" y="987552"/>
+            <a:ext cx="10789920" cy="384048"/>
           </a:xfrm>
           <a:prstGeom prst="rect">
             <a:avLst/>
@@ -21018,7 +21048,7 @@
                 <a:ea typeface="Malgun Gothic" pitchFamily="34" charset="-122"/>
                 <a:cs typeface="Malgun Gothic" pitchFamily="34" charset="-120"/>
               </a:rPr>
-              <a:t>학습 손실 · 배포 게이트 · 드리프트 임계값이 모두 같은 제도 오차율에서 나온다</a:t>
+              <a:t>학습 손실, 배포 게이트, 드리프트 임계값이 모두 같은 제도 오차율에서 나온다</a:t>
             </a:r>
             <a:endParaRPr lang="en-US" sz="1300" dirty="0"/>
           </a:p>
@@ -21032,8 +21062,8 @@
         </p:nvSpPr>
         <p:spPr>
           <a:xfrm>
-            <a:off x="11155680" y="384048"/>
-            <a:ext cx="548640" cy="365760"/>
+            <a:off x="11155680" y="411480"/>
+            <a:ext cx="502920" cy="365760"/>
           </a:xfrm>
           <a:prstGeom prst="rect">
             <a:avLst/>
@@ -21049,7 +21079,7 @@
               <a:buNone/>
             </a:pPr>
             <a:r>
-              <a:rPr lang="en-US" sz="1200" dirty="0">
+              <a:rPr lang="en-US" sz="1100" dirty="0">
                 <a:solidFill>
                   <a:srgbClr val="8A93A6"/>
                 </a:solidFill>
@@ -21059,7 +21089,7 @@
               </a:rPr>
               <a:t>07</a:t>
             </a:r>
-            <a:endParaRPr lang="en-US" sz="1200" dirty="0"/>
+            <a:endParaRPr lang="en-US" sz="1100" dirty="0"/>
           </a:p>
         </p:txBody>
       </p:sp>
@@ -21072,7 +21102,7 @@
         <p:spPr>
           <a:xfrm>
             <a:off x="548640" y="6446520"/>
-            <a:ext cx="5486400" cy="274320"/>
+            <a:ext cx="6400800" cy="274320"/>
           </a:xfrm>
           <a:prstGeom prst="rect">
             <a:avLst/>
@@ -21096,7 +21126,7 @@
                 <a:ea typeface="Malgun Gothic" pitchFamily="34" charset="-122"/>
                 <a:cs typeface="Malgun Gothic" pitchFamily="34" charset="-120"/>
               </a:rPr>
-              <a:t>해아림 · 서빙 → MLOps → AIOps</a:t>
+              <a:t>해아림 · 태양광 시간별 발전량 예측 · 서빙 → MLOps → AIOps</a:t>
             </a:r>
             <a:endParaRPr lang="en-US" sz="900" dirty="0"/>
           </a:p>
@@ -21111,11 +21141,11 @@
         <p:spPr>
           <a:xfrm>
             <a:off x="548640" y="1554480"/>
-            <a:ext cx="5120640" cy="2103120"/>
+            <a:ext cx="5120640" cy="2331720"/>
           </a:xfrm>
           <a:prstGeom prst="roundRect">
             <a:avLst>
-              <a:gd name="adj" fmla="val 5217"/>
+              <a:gd name="adj" fmla="val 4706"/>
             </a:avLst>
           </a:prstGeom>
           <a:solidFill>
@@ -21183,8 +21213,8 @@
         </p:nvSpPr>
         <p:spPr>
           <a:xfrm>
-            <a:off x="777240" y="2057400"/>
-            <a:ext cx="4663440" cy="1554480"/>
+            <a:off x="777240" y="2084832"/>
+            <a:ext cx="4663440" cy="1691640"/>
           </a:xfrm>
           <a:prstGeom prst="rect">
             <a:avLst/>
@@ -21225,7 +21255,7 @@
                 <a:ea typeface="Consolas" pitchFamily="34" charset="-122"/>
                 <a:cs typeface="Consolas" pitchFamily="34" charset="-120"/>
               </a:rPr>
-              <a:t>   발전량이 용량 10% 이상인 시간만 (낮 시간)</a:t>
+              <a:t>   발전량이 용량의 10% 이상인 시간만 (낮 시간)</a:t>
             </a:r>
             <a:endParaRPr lang="en-US" sz="1100" dirty="0"/>
           </a:p>
@@ -21242,7 +21272,7 @@
                 <a:ea typeface="Consolas" pitchFamily="34" charset="-122"/>
                 <a:cs typeface="Consolas" pitchFamily="34" charset="-120"/>
               </a:rPr>
-              <a:t>일 오차율 = 그 평균 → 8% 이하면 정산</a:t>
+              <a:t>일 오차율 = 시간 오차율의 평균 → 8% 이하면 정산</a:t>
             </a:r>
             <a:endParaRPr lang="en-US" sz="1100" dirty="0"/>
           </a:p>
@@ -21291,15 +21321,15 @@
         <p:spPr>
           <a:xfrm>
             <a:off x="5943600" y="1554480"/>
-            <a:ext cx="5669280" cy="676656"/>
+            <a:ext cx="5669280" cy="713232"/>
           </a:xfrm>
           <a:prstGeom prst="roundRect">
             <a:avLst>
-              <a:gd name="adj" fmla="val 16216"/>
+              <a:gd name="adj" fmla="val 15385"/>
             </a:avLst>
           </a:prstGeom>
           <a:solidFill>
-            <a:srgbClr val="F0F2F7"/>
+            <a:srgbClr val="F3F5F9"/>
           </a:solidFill>
           <a:ln w="9525">
             <a:solidFill>
@@ -21324,7 +21354,7 @@
         </p:nvSpPr>
         <p:spPr>
           <a:xfrm>
-            <a:off x="6126480" y="1664208"/>
+            <a:off x="6126480" y="1682496"/>
             <a:ext cx="1463040" cy="457200"/>
           </a:xfrm>
           <a:prstGeom prst="rect">
@@ -21363,7 +21393,7 @@
         </p:nvSpPr>
         <p:spPr>
           <a:xfrm>
-            <a:off x="7589520" y="1627632"/>
+            <a:off x="7589520" y="1645920"/>
             <a:ext cx="3931920" cy="274320"/>
           </a:xfrm>
           <a:prstGeom prst="rect">
@@ -21402,8 +21432,8 @@
         </p:nvSpPr>
         <p:spPr>
           <a:xfrm>
-            <a:off x="7589520" y="1920240"/>
-            <a:ext cx="3931920" cy="274320"/>
+            <a:off x="7589520" y="1938528"/>
+            <a:ext cx="3931920" cy="292608"/>
           </a:xfrm>
           <a:prstGeom prst="rect">
             <a:avLst/>
@@ -21427,7 +21457,7 @@
                 <a:ea typeface="Malgun Gothic" pitchFamily="34" charset="-122"/>
                 <a:cs typeface="Malgun Gothic" pitchFamily="34" charset="-120"/>
               </a:rPr>
-              <a:t>기준선(전날 그대로·일사량 선형 0.30) × 1.5. 실제 결과 0.579 로 통과</a:t>
+              <a:t>기준선(전날 그대로·일사량 선형 0.30)의 1.5배. 실제 0.579로 통과</a:t>
             </a:r>
             <a:endParaRPr lang="en-US" sz="900" dirty="0"/>
           </a:p>
@@ -21441,16 +21471,16 @@
         </p:nvSpPr>
         <p:spPr>
           <a:xfrm>
-            <a:off x="5943600" y="2304288"/>
-            <a:ext cx="5669280" cy="676656"/>
+            <a:off x="5943600" y="2350008"/>
+            <a:ext cx="5669280" cy="713232"/>
           </a:xfrm>
           <a:prstGeom prst="roundRect">
             <a:avLst>
-              <a:gd name="adj" fmla="val 16216"/>
+              <a:gd name="adj" fmla="val 15385"/>
             </a:avLst>
           </a:prstGeom>
           <a:solidFill>
-            <a:srgbClr val="F0F2F7"/>
+            <a:srgbClr val="F3F5F9"/>
           </a:solidFill>
           <a:ln w="9525">
             <a:solidFill>
@@ -21475,7 +21505,7 @@
         </p:nvSpPr>
         <p:spPr>
           <a:xfrm>
-            <a:off x="6126480" y="2414016"/>
+            <a:off x="6126480" y="2478024"/>
             <a:ext cx="1463040" cy="457200"/>
           </a:xfrm>
           <a:prstGeom prst="rect">
@@ -21514,7 +21544,7 @@
         </p:nvSpPr>
         <p:spPr>
           <a:xfrm>
-            <a:off x="7589520" y="2377440"/>
+            <a:off x="7589520" y="2441448"/>
             <a:ext cx="3931920" cy="274320"/>
           </a:xfrm>
           <a:prstGeom prst="rect">
@@ -21539,7 +21569,7 @@
                 <a:ea typeface="Malgun Gothic" pitchFamily="34" charset="-122"/>
                 <a:cs typeface="Malgun Gothic" pitchFamily="34" charset="-120"/>
               </a:rPr>
-              <a:t>현 Production 이상</a:t>
+              <a:t>현 운영 모델 이상</a:t>
             </a:r>
             <a:endParaRPr lang="en-US" sz="1050" dirty="0"/>
           </a:p>
@@ -21553,8 +21583,8 @@
         </p:nvSpPr>
         <p:spPr>
           <a:xfrm>
-            <a:off x="7589520" y="2670048"/>
-            <a:ext cx="3931920" cy="274320"/>
+            <a:off x="7589520" y="2734056"/>
+            <a:ext cx="3931920" cy="292608"/>
           </a:xfrm>
           <a:prstGeom prst="rect">
             <a:avLst/>
@@ -21592,16 +21622,16 @@
         </p:nvSpPr>
         <p:spPr>
           <a:xfrm>
-            <a:off x="5943600" y="3054096"/>
-            <a:ext cx="5669280" cy="676656"/>
+            <a:off x="5943600" y="3145536"/>
+            <a:ext cx="5669280" cy="713232"/>
           </a:xfrm>
           <a:prstGeom prst="roundRect">
             <a:avLst>
-              <a:gd name="adj" fmla="val 16216"/>
+              <a:gd name="adj" fmla="val 15385"/>
             </a:avLst>
           </a:prstGeom>
           <a:solidFill>
-            <a:srgbClr val="F0F2F7"/>
+            <a:srgbClr val="F3F5F9"/>
           </a:solidFill>
           <a:ln w="9525">
             <a:solidFill>
@@ -21626,7 +21656,7 @@
         </p:nvSpPr>
         <p:spPr>
           <a:xfrm>
-            <a:off x="6126480" y="3163824"/>
+            <a:off x="6126480" y="3273552"/>
             <a:ext cx="1463040" cy="457200"/>
           </a:xfrm>
           <a:prstGeom prst="rect">
@@ -21665,7 +21695,7 @@
         </p:nvSpPr>
         <p:spPr>
           <a:xfrm>
-            <a:off x="7589520" y="3127248"/>
+            <a:off x="7589520" y="3236976"/>
             <a:ext cx="3931920" cy="274320"/>
           </a:xfrm>
           <a:prstGeom prst="rect">
@@ -21690,7 +21720,7 @@
                 <a:ea typeface="Malgun Gothic" pitchFamily="34" charset="-122"/>
                 <a:cs typeface="Malgun Gothic" pitchFamily="34" charset="-120"/>
               </a:rPr>
-              <a:t>held-out 날짜에서 현 Production 보다 오차가 낮을 때만</a:t>
+              <a:t>남겨 둔 날짜에서 현 운영 모델보다 오차가 낮을 때만</a:t>
             </a:r>
             <a:endParaRPr lang="en-US" sz="1050" dirty="0"/>
           </a:p>
@@ -21704,8 +21734,8 @@
         </p:nvSpPr>
         <p:spPr>
           <a:xfrm>
-            <a:off x="7589520" y="3419856"/>
-            <a:ext cx="3931920" cy="274320"/>
+            <a:off x="7589520" y="3529584"/>
+            <a:ext cx="3931920" cy="292608"/>
           </a:xfrm>
           <a:prstGeom prst="rect">
             <a:avLst/>
@@ -21729,7 +21759,7 @@
                 <a:ea typeface="Malgun Gothic" pitchFamily="34" charset="-122"/>
                 <a:cs typeface="Malgun Gothic" pitchFamily="34" charset="-120"/>
               </a:rPr>
-              <a:t>최근 30일 중 뒤 20% 를 남겨 비교. 통과 못 하면 기존 버전 유지</a:t>
+              <a:t>최근 30일 중 뒤 20%를 평가용으로 남긴다. 통과 못 하면 기존 버전 유지</a:t>
             </a:r>
             <a:endParaRPr lang="en-US" sz="900" dirty="0"/>
           </a:p>
@@ -21743,12 +21773,12 @@
         </p:nvSpPr>
         <p:spPr>
           <a:xfrm>
-            <a:off x="548640" y="3886200"/>
-            <a:ext cx="11064240" cy="1920240"/>
+            <a:off x="548640" y="4114800"/>
+            <a:ext cx="11064240" cy="2057400"/>
           </a:xfrm>
           <a:prstGeom prst="roundRect">
             <a:avLst>
-              <a:gd name="adj" fmla="val 5714"/>
+              <a:gd name="adj" fmla="val 5333"/>
             </a:avLst>
           </a:prstGeom>
           <a:solidFill>
@@ -21777,7 +21807,7 @@
         </p:nvSpPr>
         <p:spPr>
           <a:xfrm>
-            <a:off x="777240" y="4023360"/>
+            <a:off x="777240" y="4251960"/>
             <a:ext cx="7315200" cy="320040"/>
           </a:xfrm>
           <a:prstGeom prst="rect">
@@ -21816,8 +21846,8 @@
         </p:nvSpPr>
         <p:spPr>
           <a:xfrm>
-            <a:off x="777240" y="4434840"/>
-            <a:ext cx="10607040" cy="1645920"/>
+            <a:off x="777240" y="4663440"/>
+            <a:ext cx="10607040" cy="1463040"/>
           </a:xfrm>
           <a:prstGeom prst="rect">
             <a:avLst/>
@@ -21831,7 +21861,7 @@
           <a:p>
             <a:pPr marL="177800" indent="-177800">
               <a:spcAft>
-                <a:spcPts val="600"/>
+                <a:spcPts val="700"/>
               </a:spcAft>
               <a:buSzPct val="100000"/>
               <a:buChar char="•"/>
@@ -21845,14 +21875,14 @@
                 <a:ea typeface="Malgun Gothic" pitchFamily="34" charset="-122"/>
                 <a:cs typeface="Malgun Gothic" pitchFamily="34" charset="-120"/>
               </a:rPr>
-              <a:t>임계값 = max(8%, 운영 모델 검증 오차 8.29% × 1.25) = 10.36%. 고정 8% 를 쓰면 실제 데이터에서는 평상시(8.3%)가 매일 드리프트가 된다.</a:t>
+              <a:t>임계값 = max(8%, 운영 모델 검증 오차 8.29% × 1.25) = 10.36%. 고정 8%를 쓰면 실제 데이터에서는 평상시(8.3%)가 매일 드리프트가 된다.</a:t>
             </a:r>
             <a:endParaRPr lang="en-US" sz="1250" dirty="0"/>
           </a:p>
           <a:p>
             <a:pPr marL="177800" indent="-177800">
               <a:spcAft>
-                <a:spcPts val="600"/>
+                <a:spcPts val="700"/>
               </a:spcAft>
               <a:buSzPct val="100000"/>
               <a:buChar char="•"/>
@@ -21866,14 +21896,14 @@
                 <a:ea typeface="Malgun Gothic" pitchFamily="34" charset="-122"/>
                 <a:cs typeface="Malgun Gothic" pitchFamily="34" charset="-120"/>
               </a:rPr>
-              <a:t>최근 21일 일 오차율 평균이 임계값을 넘을 때만 원인 분류로 넘어간다. 7일 미만이면 판단 보류.</a:t>
+              <a:t>최근 21일 일 오차율 평균이 임계값을 넘을 때만 원인 분류로 넘어간다. 기록이 7일 미만이면 판단을 보류한다.</a:t>
             </a:r>
             <a:endParaRPr lang="en-US" sz="1250" dirty="0"/>
           </a:p>
           <a:p>
             <a:pPr marL="177800" indent="-177800">
               <a:spcAft>
-                <a:spcPts val="600"/>
+                <a:spcPts val="700"/>
               </a:spcAft>
               <a:buSzPct val="100000"/>
               <a:buChar char="•"/>
@@ -21887,7 +21917,7 @@
                 <a:ea typeface="Malgun Gothic" pitchFamily="34" charset="-122"/>
                 <a:cs typeface="Malgun Gothic" pitchFamily="34" charset="-120"/>
               </a:rPr>
-              <a:t>서빙 조건의 오차(하루 전 예보 입력)와 예보 괴리(낮 시간 관측-예보 일사량 차이)를 같이 기록해 "예보가 빗나간 날" 을 설명한다.</a:t>
+              <a:t>서빙 조건의 오차(하루 전 예보 입력)와 예보 괴리(낮 시간 관측-예보 일사량 차이)를 함께 기록해 "예보가 빗나간 날"을 설명한다.</a:t>
             </a:r>
             <a:endParaRPr lang="en-US" sz="1250" dirty="0"/>
           </a:p>
@@ -21907,7 +21937,7 @@
     <p:bg>
       <p:bgPr>
         <a:solidFill>
-          <a:srgbClr val="F6F7FB"/>
+          <a:srgbClr val="FFFFFF"/>
         </a:solidFill>
       </p:bgPr>
     </p:bg>
@@ -21933,8 +21963,8 @@
         </p:nvSpPr>
         <p:spPr>
           <a:xfrm>
-            <a:off x="548640" y="347472"/>
-            <a:ext cx="10241280" cy="640080"/>
+            <a:off x="548640" y="365760"/>
+            <a:ext cx="10332720" cy="640080"/>
           </a:xfrm>
           <a:prstGeom prst="rect">
             <a:avLst/>
@@ -21950,7 +21980,7 @@
               <a:buNone/>
             </a:pPr>
             <a:r>
-              <a:rPr lang="en-US" sz="2600" b="1" dirty="0">
+              <a:rPr lang="en-US" sz="2700" b="1" dirty="0">
                 <a:solidFill>
                   <a:srgbClr val="1A1F2B"/>
                 </a:solidFill>
@@ -21958,9 +21988,9 @@
                 <a:ea typeface="Malgun Gothic" pitchFamily="34" charset="-122"/>
                 <a:cs typeface="Malgun Gothic" pitchFamily="34" charset="-120"/>
               </a:rPr>
-              <a:t>오차가 커졌다 ≠ 모델이 틀렸다</a:t>
+              <a:t>오차가 커졌다는 것과 모델이 틀렸다는 것은 다르다</a:t>
             </a:r>
-            <a:endParaRPr lang="en-US" sz="2600" dirty="0"/>
+            <a:endParaRPr lang="en-US" sz="2700" dirty="0"/>
           </a:p>
         </p:txBody>
       </p:sp>
@@ -21972,8 +22002,8 @@
         </p:nvSpPr>
         <p:spPr>
           <a:xfrm>
-            <a:off x="548640" y="960120"/>
-            <a:ext cx="10607040" cy="384048"/>
+            <a:off x="548640" y="987552"/>
+            <a:ext cx="10789920" cy="384048"/>
           </a:xfrm>
           <a:prstGeom prst="rect">
             <a:avLst/>
@@ -22011,8 +22041,8 @@
         </p:nvSpPr>
         <p:spPr>
           <a:xfrm>
-            <a:off x="11155680" y="384048"/>
-            <a:ext cx="548640" cy="365760"/>
+            <a:off x="11155680" y="411480"/>
+            <a:ext cx="502920" cy="365760"/>
           </a:xfrm>
           <a:prstGeom prst="rect">
             <a:avLst/>
@@ -22028,7 +22058,7 @@
               <a:buNone/>
             </a:pPr>
             <a:r>
-              <a:rPr lang="en-US" sz="1200" dirty="0">
+              <a:rPr lang="en-US" sz="1100" dirty="0">
                 <a:solidFill>
                   <a:srgbClr val="8A93A6"/>
                 </a:solidFill>
@@ -22038,7 +22068,7 @@
               </a:rPr>
               <a:t>08</a:t>
             </a:r>
-            <a:endParaRPr lang="en-US" sz="1200" dirty="0"/>
+            <a:endParaRPr lang="en-US" sz="1100" dirty="0"/>
           </a:p>
         </p:txBody>
       </p:sp>
@@ -22051,7 +22081,7 @@
         <p:spPr>
           <a:xfrm>
             <a:off x="548640" y="6446520"/>
-            <a:ext cx="5486400" cy="274320"/>
+            <a:ext cx="6400800" cy="274320"/>
           </a:xfrm>
           <a:prstGeom prst="rect">
             <a:avLst/>
@@ -22075,7 +22105,7 @@
                 <a:ea typeface="Malgun Gothic" pitchFamily="34" charset="-122"/>
                 <a:cs typeface="Malgun Gothic" pitchFamily="34" charset="-120"/>
               </a:rPr>
-              <a:t>해아림 · 서빙 → MLOps → AIOps</a:t>
+              <a:t>해아림 · 태양광 시간별 발전량 예측 · 서빙 → MLOps → AIOps</a:t>
             </a:r>
             <a:endParaRPr lang="en-US" sz="900" dirty="0"/>
           </a:p>
@@ -22083,22 +22113,22 @@
       </p:sp>
       <p:sp>
         <p:nvSpPr>
-          <p:cNvPr id="6" name="Shape 4"/>
+          <p:cNvPr id="7" name="Shape 4"/>
           <p:cNvSpPr/>
           <p:nvPr/>
         </p:nvSpPr>
         <p:spPr>
           <a:xfrm>
             <a:off x="548640" y="1554480"/>
-            <a:ext cx="2103120" cy="1920240"/>
+            <a:ext cx="2103120" cy="1965960"/>
           </a:xfrm>
           <a:prstGeom prst="roundRect">
             <a:avLst>
-              <a:gd name="adj" fmla="val 5714"/>
+              <a:gd name="adj" fmla="val 5581"/>
             </a:avLst>
           </a:prstGeom>
           <a:solidFill>
-            <a:srgbClr val="F0F2F7"/>
+            <a:srgbClr val="F3F5F9"/>
           </a:solidFill>
           <a:ln w="9525">
             <a:solidFill>
@@ -22117,7 +22147,7 @@
       </p:sp>
       <p:sp>
         <p:nvSpPr>
-          <p:cNvPr id="7" name="Text 5"/>
+          <p:cNvPr id="8" name="Text 5"/>
           <p:cNvSpPr txBox="1"/>
           <p:nvPr/>
         </p:nvSpPr>
@@ -22156,14 +22186,14 @@
       </p:sp>
       <p:sp>
         <p:nvSpPr>
-          <p:cNvPr id="8" name="Text 6"/>
+          <p:cNvPr id="9" name="Text 6"/>
           <p:cNvSpPr txBox="1"/>
           <p:nvPr/>
         </p:nvSpPr>
         <p:spPr>
           <a:xfrm>
             <a:off x="685800" y="2011680"/>
-            <a:ext cx="1828800" cy="777240"/>
+            <a:ext cx="1828800" cy="822960"/>
           </a:xfrm>
           <a:prstGeom prst="rect">
             <a:avLst/>
@@ -22187,7 +22217,7 @@
                 <a:ea typeface="Malgun Gothic" pitchFamily="34" charset="-122"/>
                 <a:cs typeface="Malgun Gothic" pitchFamily="34" charset="-120"/>
               </a:rPr>
-              <a:t>21일 오차율 &gt; 10.36% ?</a:t>
+              <a:t>21일 오차율이 10.36%를 넘는가</a:t>
             </a:r>
             <a:endParaRPr lang="en-US" sz="1050" dirty="0"/>
           </a:p>
@@ -22195,13 +22225,13 @@
       </p:sp>
       <p:sp>
         <p:nvSpPr>
-          <p:cNvPr id="9" name="Text 7"/>
+          <p:cNvPr id="10" name="Text 7"/>
           <p:cNvSpPr txBox="1"/>
           <p:nvPr/>
         </p:nvSpPr>
         <p:spPr>
           <a:xfrm>
-            <a:off x="685800" y="2834640"/>
+            <a:off x="685800" y="2880360"/>
             <a:ext cx="1828800" cy="548640"/>
           </a:xfrm>
           <a:prstGeom prst="rect">
@@ -22226,7 +22256,7 @@
                 <a:ea typeface="Malgun Gothic" pitchFamily="34" charset="-122"/>
                 <a:cs typeface="Malgun Gothic" pitchFamily="34" charset="-120"/>
               </a:rPr>
-              <a:t>아니오 → ok</a:t>
+              <a:t>아니오 → 정상</a:t>
             </a:r>
             <a:endParaRPr lang="en-US" sz="1000" dirty="0"/>
           </a:p>
@@ -22234,13 +22264,13 @@
       </p:sp>
       <p:sp>
         <p:nvSpPr>
-          <p:cNvPr id="10" name="Shape 8"/>
+          <p:cNvPr id="11" name="Shape 8"/>
           <p:cNvSpPr/>
           <p:nvPr/>
         </p:nvSpPr>
         <p:spPr>
           <a:xfrm>
-            <a:off x="2651760" y="2514600"/>
+            <a:off x="2651760" y="2532888"/>
             <a:ext cx="137160" cy="0"/>
           </a:xfrm>
           <a:prstGeom prst="line">
@@ -22258,22 +22288,22 @@
       </p:sp>
       <p:sp>
         <p:nvSpPr>
-          <p:cNvPr id="11" name="Shape 9"/>
+          <p:cNvPr id="12" name="Shape 9"/>
           <p:cNvSpPr/>
           <p:nvPr/>
         </p:nvSpPr>
         <p:spPr>
           <a:xfrm>
             <a:off x="2788920" y="1554480"/>
-            <a:ext cx="2103120" cy="1920240"/>
+            <a:ext cx="2103120" cy="1965960"/>
           </a:xfrm>
           <a:prstGeom prst="roundRect">
             <a:avLst>
-              <a:gd name="adj" fmla="val 5714"/>
+              <a:gd name="adj" fmla="val 5581"/>
             </a:avLst>
           </a:prstGeom>
           <a:solidFill>
-            <a:srgbClr val="F0F2F7"/>
+            <a:srgbClr val="F3F5F9"/>
           </a:solidFill>
           <a:ln w="9525">
             <a:solidFill>
@@ -22292,7 +22322,7 @@
       </p:sp>
       <p:sp>
         <p:nvSpPr>
-          <p:cNvPr id="12" name="Text 10"/>
+          <p:cNvPr id="13" name="Text 10"/>
           <p:cNvSpPr txBox="1"/>
           <p:nvPr/>
         </p:nvSpPr>
@@ -22331,14 +22361,14 @@
       </p:sp>
       <p:sp>
         <p:nvSpPr>
-          <p:cNvPr id="13" name="Text 11"/>
+          <p:cNvPr id="14" name="Text 11"/>
           <p:cNvSpPr txBox="1"/>
           <p:nvPr/>
         </p:nvSpPr>
         <p:spPr>
           <a:xfrm>
             <a:off x="2926080" y="2011680"/>
-            <a:ext cx="1828800" cy="777240"/>
+            <a:ext cx="1828800" cy="822960"/>
           </a:xfrm>
           <a:prstGeom prst="rect">
             <a:avLst/>
@@ -22362,7 +22392,7 @@
                 <a:ea typeface="Malgun Gothic" pitchFamily="34" charset="-122"/>
                 <a:cs typeface="Malgun Gothic" pitchFamily="34" charset="-120"/>
               </a:rPr>
-              <a:t>같은 시기(±7일) 다른 발전소도 절반 이상 초과? 또는 21일 PR &gt; 1.15?</a:t>
+              <a:t>같은 시기(±7일) 다른 발전소도 절반 이상 넘었나, 또는 21일 PR &gt; 1.15인가</a:t>
             </a:r>
             <a:endParaRPr lang="en-US" sz="1050" dirty="0"/>
           </a:p>
@@ -22370,13 +22400,13 @@
       </p:sp>
       <p:sp>
         <p:nvSpPr>
-          <p:cNvPr id="14" name="Text 12"/>
+          <p:cNvPr id="15" name="Text 12"/>
           <p:cNvSpPr txBox="1"/>
           <p:nvPr/>
         </p:nvSpPr>
         <p:spPr>
           <a:xfrm>
-            <a:off x="2926080" y="2834640"/>
+            <a:off x="2926080" y="2880360"/>
             <a:ext cx="1828800" cy="548640"/>
           </a:xfrm>
           <a:prstGeom prst="rect">
@@ -22401,7 +22431,7 @@
                 <a:ea typeface="Malgun Gothic" pitchFamily="34" charset="-122"/>
                 <a:cs typeface="Malgun Gothic" pitchFamily="34" charset="-120"/>
               </a:rPr>
-              <a:t>예 → model_drift → 재학습</a:t>
+              <a:t>예 → 모델 드리프트 → 재학습</a:t>
             </a:r>
             <a:endParaRPr lang="en-US" sz="1000" dirty="0"/>
           </a:p>
@@ -22409,13 +22439,13 @@
       </p:sp>
       <p:sp>
         <p:nvSpPr>
-          <p:cNvPr id="15" name="Shape 13"/>
+          <p:cNvPr id="16" name="Shape 13"/>
           <p:cNvSpPr/>
           <p:nvPr/>
         </p:nvSpPr>
         <p:spPr>
           <a:xfrm>
-            <a:off x="4892040" y="2514600"/>
+            <a:off x="4892040" y="2532888"/>
             <a:ext cx="137160" cy="0"/>
           </a:xfrm>
           <a:prstGeom prst="line">
@@ -22433,22 +22463,22 @@
       </p:sp>
       <p:sp>
         <p:nvSpPr>
-          <p:cNvPr id="16" name="Shape 14"/>
+          <p:cNvPr id="17" name="Shape 14"/>
           <p:cNvSpPr/>
           <p:nvPr/>
         </p:nvSpPr>
         <p:spPr>
           <a:xfrm>
             <a:off x="5029200" y="1554480"/>
-            <a:ext cx="2103120" cy="1920240"/>
+            <a:ext cx="2103120" cy="1965960"/>
           </a:xfrm>
           <a:prstGeom prst="roundRect">
             <a:avLst>
-              <a:gd name="adj" fmla="val 5714"/>
+              <a:gd name="adj" fmla="val 5581"/>
             </a:avLst>
           </a:prstGeom>
           <a:solidFill>
-            <a:srgbClr val="F0F2F7"/>
+            <a:srgbClr val="F3F5F9"/>
           </a:solidFill>
           <a:ln w="9525">
             <a:solidFill>
@@ -22467,7 +22497,7 @@
       </p:sp>
       <p:sp>
         <p:nvSpPr>
-          <p:cNvPr id="17" name="Text 15"/>
+          <p:cNvPr id="18" name="Text 15"/>
           <p:cNvSpPr txBox="1"/>
           <p:nvPr/>
         </p:nvSpPr>
@@ -22506,14 +22536,14 @@
       </p:sp>
       <p:sp>
         <p:nvSpPr>
-          <p:cNvPr id="18" name="Text 16"/>
+          <p:cNvPr id="19" name="Text 16"/>
           <p:cNvSpPr txBox="1"/>
           <p:nvPr/>
         </p:nvSpPr>
         <p:spPr>
           <a:xfrm>
             <a:off x="5166360" y="2011680"/>
-            <a:ext cx="1828800" cy="777240"/>
+            <a:ext cx="1828800" cy="822960"/>
           </a:xfrm>
           <a:prstGeom prst="rect">
             <a:avLst/>
@@ -22537,7 +22567,7 @@
                 <a:ea typeface="Malgun Gothic" pitchFamily="34" charset="-122"/>
                 <a:cs typeface="Malgun Gothic" pitchFamily="34" charset="-120"/>
               </a:rPr>
-              <a:t>60일+ 기록에서 PR 단조 하락?</a:t>
+              <a:t>60일 이상 기록에서 PR이 단조 하락하는가</a:t>
             </a:r>
             <a:endParaRPr lang="en-US" sz="1050" dirty="0"/>
           </a:p>
@@ -22545,13 +22575,13 @@
       </p:sp>
       <p:sp>
         <p:nvSpPr>
-          <p:cNvPr id="19" name="Text 17"/>
+          <p:cNvPr id="20" name="Text 17"/>
           <p:cNvSpPr txBox="1"/>
           <p:nvPr/>
         </p:nvSpPr>
         <p:spPr>
           <a:xfrm>
-            <a:off x="5166360" y="2834640"/>
+            <a:off x="5166360" y="2880360"/>
             <a:ext cx="1828800" cy="548640"/>
           </a:xfrm>
           <a:prstGeom prst="rect">
@@ -22576,7 +22606,7 @@
                 <a:ea typeface="Malgun Gothic" pitchFamily="34" charset="-122"/>
                 <a:cs typeface="Malgun Gothic" pitchFamily="34" charset="-120"/>
               </a:rPr>
-              <a:t>예 → soiling → 청소 권고</a:t>
+              <a:t>예 → 오염 → 청소 권고</a:t>
             </a:r>
             <a:endParaRPr lang="en-US" sz="1000" dirty="0"/>
           </a:p>
@@ -22584,13 +22614,13 @@
       </p:sp>
       <p:sp>
         <p:nvSpPr>
-          <p:cNvPr id="20" name="Shape 18"/>
+          <p:cNvPr id="21" name="Shape 18"/>
           <p:cNvSpPr/>
           <p:nvPr/>
         </p:nvSpPr>
         <p:spPr>
           <a:xfrm>
-            <a:off x="7132320" y="2514600"/>
+            <a:off x="7132320" y="2532888"/>
             <a:ext cx="137160" cy="0"/>
           </a:xfrm>
           <a:prstGeom prst="line">
@@ -22608,22 +22638,22 @@
       </p:sp>
       <p:sp>
         <p:nvSpPr>
-          <p:cNvPr id="21" name="Shape 19"/>
+          <p:cNvPr id="22" name="Shape 19"/>
           <p:cNvSpPr/>
           <p:nvPr/>
         </p:nvSpPr>
         <p:spPr>
           <a:xfrm>
             <a:off x="7269480" y="1554480"/>
-            <a:ext cx="2103120" cy="1920240"/>
+            <a:ext cx="2103120" cy="1965960"/>
           </a:xfrm>
           <a:prstGeom prst="roundRect">
             <a:avLst>
-              <a:gd name="adj" fmla="val 5714"/>
+              <a:gd name="adj" fmla="val 5581"/>
             </a:avLst>
           </a:prstGeom>
           <a:solidFill>
-            <a:srgbClr val="F0F2F7"/>
+            <a:srgbClr val="F3F5F9"/>
           </a:solidFill>
           <a:ln w="9525">
             <a:solidFill>
@@ -22642,7 +22672,7 @@
       </p:sp>
       <p:sp>
         <p:nvSpPr>
-          <p:cNvPr id="22" name="Text 20"/>
+          <p:cNvPr id="23" name="Text 20"/>
           <p:cNvSpPr txBox="1"/>
           <p:nvPr/>
         </p:nvSpPr>
@@ -22681,14 +22711,14 @@
       </p:sp>
       <p:sp>
         <p:nvSpPr>
-          <p:cNvPr id="23" name="Text 21"/>
+          <p:cNvPr id="24" name="Text 21"/>
           <p:cNvSpPr txBox="1"/>
           <p:nvPr/>
         </p:nvSpPr>
         <p:spPr>
           <a:xfrm>
             <a:off x="7406640" y="2011680"/>
-            <a:ext cx="1828800" cy="777240"/>
+            <a:ext cx="1828800" cy="822960"/>
           </a:xfrm>
           <a:prstGeom prst="rect">
             <a:avLst/>
@@ -22712,7 +22742,7 @@
                 <a:ea typeface="Malgun Gothic" pitchFamily="34" charset="-122"/>
                 <a:cs typeface="Malgun Gothic" pitchFamily="34" charset="-120"/>
               </a:rPr>
-              <a:t>최근 7일 PR &lt; 0.75 ?</a:t>
+              <a:t>최근 7일 PR이 0.75 아래인가</a:t>
             </a:r>
             <a:endParaRPr lang="en-US" sz="1050" dirty="0"/>
           </a:p>
@@ -22720,13 +22750,13 @@
       </p:sp>
       <p:sp>
         <p:nvSpPr>
-          <p:cNvPr id="24" name="Text 22"/>
+          <p:cNvPr id="25" name="Text 22"/>
           <p:cNvSpPr txBox="1"/>
           <p:nvPr/>
         </p:nvSpPr>
         <p:spPr>
           <a:xfrm>
-            <a:off x="7406640" y="2834640"/>
+            <a:off x="7406640" y="2880360"/>
             <a:ext cx="1828800" cy="548640"/>
           </a:xfrm>
           <a:prstGeom prst="rect">
@@ -22751,7 +22781,7 @@
                 <a:ea typeface="Malgun Gothic" pitchFamily="34" charset="-122"/>
                 <a:cs typeface="Malgun Gothic" pitchFamily="34" charset="-120"/>
               </a:rPr>
-              <a:t>예 → equipment → [ALERT], 재학습 차단</a:t>
+              <a:t>예 → 설비 이상 → [ALERT], 재학습 차단</a:t>
             </a:r>
             <a:endParaRPr lang="en-US" sz="1000" dirty="0"/>
           </a:p>
@@ -22759,13 +22789,13 @@
       </p:sp>
       <p:sp>
         <p:nvSpPr>
-          <p:cNvPr id="25" name="Shape 23"/>
+          <p:cNvPr id="26" name="Shape 23"/>
           <p:cNvSpPr/>
           <p:nvPr/>
         </p:nvSpPr>
         <p:spPr>
           <a:xfrm>
-            <a:off x="9372600" y="2514600"/>
+            <a:off x="9372600" y="2532888"/>
             <a:ext cx="137160" cy="0"/>
           </a:xfrm>
           <a:prstGeom prst="line">
@@ -22783,22 +22813,22 @@
       </p:sp>
       <p:sp>
         <p:nvSpPr>
-          <p:cNvPr id="26" name="Shape 24"/>
+          <p:cNvPr id="27" name="Shape 24"/>
           <p:cNvSpPr/>
           <p:nvPr/>
         </p:nvSpPr>
         <p:spPr>
           <a:xfrm>
             <a:off x="9509760" y="1554480"/>
-            <a:ext cx="2103120" cy="1920240"/>
+            <a:ext cx="2103120" cy="1965960"/>
           </a:xfrm>
           <a:prstGeom prst="roundRect">
             <a:avLst>
-              <a:gd name="adj" fmla="val 5714"/>
+              <a:gd name="adj" fmla="val 5581"/>
             </a:avLst>
           </a:prstGeom>
           <a:solidFill>
-            <a:srgbClr val="F0F2F7"/>
+            <a:srgbClr val="F3F5F9"/>
           </a:solidFill>
           <a:ln w="9525">
             <a:solidFill>
@@ -22817,7 +22847,7 @@
       </p:sp>
       <p:sp>
         <p:nvSpPr>
-          <p:cNvPr id="27" name="Text 25"/>
+          <p:cNvPr id="28" name="Text 25"/>
           <p:cNvSpPr txBox="1"/>
           <p:nvPr/>
         </p:nvSpPr>
@@ -22856,14 +22886,14 @@
       </p:sp>
       <p:sp>
         <p:nvSpPr>
-          <p:cNvPr id="28" name="Text 26"/>
+          <p:cNvPr id="29" name="Text 26"/>
           <p:cNvSpPr txBox="1"/>
           <p:nvPr/>
         </p:nvSpPr>
         <p:spPr>
           <a:xfrm>
             <a:off x="9646920" y="2011680"/>
-            <a:ext cx="1828800" cy="777240"/>
+            <a:ext cx="1828800" cy="822960"/>
           </a:xfrm>
           <a:prstGeom prst="rect">
             <a:avLst/>
@@ -22887,7 +22917,7 @@
                 <a:ea typeface="Malgun Gothic" pitchFamily="34" charset="-122"/>
                 <a:cs typeface="Malgun Gothic" pitchFamily="34" charset="-120"/>
               </a:rPr>
-              <a:t>PR 정상인데 오차만 큼</a:t>
+              <a:t>PR은 정상인데 오차만 큰가</a:t>
             </a:r>
             <a:endParaRPr lang="en-US" sz="1050" dirty="0"/>
           </a:p>
@@ -22895,13 +22925,13 @@
       </p:sp>
       <p:sp>
         <p:nvSpPr>
-          <p:cNvPr id="29" name="Text 27"/>
+          <p:cNvPr id="30" name="Text 27"/>
           <p:cNvSpPr txBox="1"/>
           <p:nvPr/>
         </p:nvSpPr>
         <p:spPr>
           <a:xfrm>
-            <a:off x="9646920" y="2834640"/>
+            <a:off x="9646920" y="2880360"/>
             <a:ext cx="1828800" cy="548640"/>
           </a:xfrm>
           <a:prstGeom prst="rect">
@@ -22926,7 +22956,7 @@
                 <a:ea typeface="Malgun Gothic" pitchFamily="34" charset="-122"/>
                 <a:cs typeface="Malgun Gothic" pitchFamily="34" charset="-120"/>
               </a:rPr>
-              <a:t>weather → 예보 품질 알림만</a:t>
+              <a:t>날씨 → 예보 품질 알림만</a:t>
             </a:r>
             <a:endParaRPr lang="en-US" sz="1000" dirty="0"/>
           </a:p>
@@ -22947,7 +22977,7 @@
           </p:nvPr>
         </p:nvGraphicFramePr>
         <p:xfrm>
-          <a:off x="548640" y="3749040"/>
+          <a:off x="548640" y="3794760"/>
           <a:ext cx="11064240" cy="914400"/>
         </p:xfrm>
         <a:graphic>
@@ -23027,7 +23057,7 @@
                       <a:tailEnd type="none" w="med" len="med"/>
                     </a:lnB>
                     <a:solidFill>
-                      <a:srgbClr val="F0F2F7"/>
+                      <a:srgbClr val="F3F5F9"/>
                     </a:solidFill>
                   </a:tcPr>
                 </a:tc>
@@ -23095,7 +23125,7 @@
                       <a:tailEnd type="none" w="med" len="med"/>
                     </a:lnB>
                     <a:solidFill>
-                      <a:srgbClr val="F0F2F7"/>
+                      <a:srgbClr val="F3F5F9"/>
                     </a:solidFill>
                   </a:tcPr>
                 </a:tc>
@@ -23116,7 +23146,7 @@
                           <a:ea typeface="Malgun Gothic" pitchFamily="34" charset="-122"/>
                           <a:cs typeface="Malgun Gothic" pitchFamily="34" charset="-120"/>
                         </a:rPr>
-                        <a:t>PR (실제 ÷ 관측기상 기대치)</a:t>
+                        <a:t>PR (실제 ÷ 관측 기상 기대치)</a:t>
                       </a:r>
                       <a:endParaRPr lang="en-US" sz="1000" dirty="0">
                         <a:latin typeface="Malgun Gothic" charset="0"/>
@@ -23163,7 +23193,7 @@
                       <a:tailEnd type="none" w="med" len="med"/>
                     </a:lnB>
                     <a:solidFill>
-                      <a:srgbClr val="F0F2F7"/>
+                      <a:srgbClr val="F3F5F9"/>
                     </a:solidFill>
                   </a:tcPr>
                 </a:tc>
@@ -23184,7 +23214,7 @@
                           <a:ea typeface="Malgun Gothic" pitchFamily="34" charset="-122"/>
                           <a:cs typeface="Malgun Gothic" pitchFamily="34" charset="-120"/>
                         </a:rPr>
-                        <a:t>몇 곳</a:t>
+                        <a:t>범위</a:t>
                       </a:r>
                       <a:endParaRPr lang="en-US" sz="1000" dirty="0">
                         <a:latin typeface="Malgun Gothic" charset="0"/>
@@ -23231,7 +23261,7 @@
                       <a:tailEnd type="none" w="med" len="med"/>
                     </a:lnB>
                     <a:solidFill>
-                      <a:srgbClr val="F0F2F7"/>
+                      <a:srgbClr val="F3F5F9"/>
                     </a:solidFill>
                   </a:tcPr>
                 </a:tc>
@@ -23299,7 +23329,7 @@
                       <a:tailEnd type="none" w="med" len="med"/>
                     </a:lnB>
                     <a:solidFill>
-                      <a:srgbClr val="F0F2F7"/>
+                      <a:srgbClr val="F3F5F9"/>
                     </a:solidFill>
                   </a:tcPr>
                 </a:tc>
@@ -23367,7 +23397,7 @@
                       <a:tailEnd type="none" w="med" len="med"/>
                     </a:lnB>
                     <a:solidFill>
-                      <a:srgbClr val="F0F2F7"/>
+                      <a:srgbClr val="F3F5F9"/>
                     </a:solidFill>
                   </a:tcPr>
                 </a:tc>
@@ -23936,7 +23966,7 @@
                           <a:ea typeface="Malgun Gothic" pitchFamily="34" charset="-122"/>
                           <a:cs typeface="Malgun Gothic" pitchFamily="34" charset="-120"/>
                         </a:rPr>
-                        <a:t>&lt; 0.75 급락</a:t>
+                        <a:t>0.75 아래로 급락</a:t>
                       </a:r>
                       <a:endParaRPr lang="en-US" sz="1000" dirty="0">
                         <a:latin typeface="Malgun Gothic" charset="0"/>
@@ -24278,7 +24308,7 @@
                           <a:ea typeface="Malgun Gothic" pitchFamily="34" charset="-122"/>
                           <a:cs typeface="Malgun Gothic" pitchFamily="34" charset="-120"/>
                         </a:rPr>
-                        <a:t>서서히</a:t>
+                        <a:t>서서히 커짐</a:t>
                       </a:r>
                       <a:endParaRPr lang="en-US" sz="1000" dirty="0">
                         <a:latin typeface="Malgun Gothic" charset="0"/>
@@ -24346,7 +24376,7 @@
                           <a:ea typeface="Malgun Gothic" pitchFamily="34" charset="-122"/>
                           <a:cs typeface="Malgun Gothic" pitchFamily="34" charset="-120"/>
                         </a:rPr>
-                        <a:t>0.75~0.92 단조 하락</a:t>
+                        <a:t>0.75~0.92, 단조 하락</a:t>
                       </a:r>
                       <a:endParaRPr lang="en-US" sz="1000" dirty="0">
                         <a:latin typeface="Malgun Gothic" charset="0"/>
@@ -24482,7 +24512,7 @@
                           <a:ea typeface="Malgun Gothic" pitchFamily="34" charset="-122"/>
                           <a:cs typeface="Malgun Gothic" pitchFamily="34" charset="-120"/>
                         </a:rPr>
-                        <a:t>몇 주~몇 달</a:t>
+                        <a:t>몇 주 ~ 몇 달</a:t>
                       </a:r>
                       <a:endParaRPr lang="en-US" sz="1000" dirty="0">
                         <a:latin typeface="Malgun Gothic" charset="0"/>
@@ -24756,7 +24786,7 @@
                           <a:ea typeface="Malgun Gothic" pitchFamily="34" charset="-122"/>
                           <a:cs typeface="Malgun Gothic" pitchFamily="34" charset="-120"/>
                         </a:rPr>
-                        <a:t>여러 곳 같은 방향, 또는 &gt; 1.15</a:t>
+                        <a:t>여러 곳이 같은 방향, 또는 1.15 초과</a:t>
                       </a:r>
                       <a:endParaRPr lang="en-US" sz="1000" dirty="0">
                         <a:latin typeface="Malgun Gothic" charset="0"/>
@@ -25440,7 +25470,7 @@
     <p:bg>
       <p:bgPr>
         <a:solidFill>
-          <a:srgbClr val="F6F7FB"/>
+          <a:srgbClr val="FFFFFF"/>
         </a:solidFill>
       </p:bgPr>
     </p:bg>
@@ -25466,8 +25496,8 @@
         </p:nvSpPr>
         <p:spPr>
           <a:xfrm>
-            <a:off x="548640" y="347472"/>
-            <a:ext cx="10241280" cy="640080"/>
+            <a:off x="548640" y="365760"/>
+            <a:ext cx="10332720" cy="640080"/>
           </a:xfrm>
           <a:prstGeom prst="rect">
             <a:avLst/>
@@ -25483,7 +25513,7 @@
               <a:buNone/>
             </a:pPr>
             <a:r>
-              <a:rPr lang="en-US" sz="2600" b="1" dirty="0">
+              <a:rPr lang="en-US" sz="2700" b="1" dirty="0">
                 <a:solidFill>
                   <a:srgbClr val="1A1F2B"/>
                 </a:solidFill>
@@ -25493,7 +25523,7 @@
               </a:rPr>
               <a:t>AIOps 파이프라인 8단계와 운영 안전장치</a:t>
             </a:r>
-            <a:endParaRPr lang="en-US" sz="2600" dirty="0"/>
+            <a:endParaRPr lang="en-US" sz="2700" dirty="0"/>
           </a:p>
         </p:txBody>
       </p:sp>
@@ -25505,8 +25535,8 @@
         </p:nvSpPr>
         <p:spPr>
           <a:xfrm>
-            <a:off x="548640" y="960120"/>
-            <a:ext cx="10607040" cy="384048"/>
+            <a:off x="548640" y="987552"/>
+            <a:ext cx="10789920" cy="384048"/>
           </a:xfrm>
           <a:prstGeom prst="rect">
             <a:avLst/>
@@ -25530,7 +25560,7 @@
                 <a:ea typeface="Malgun Gothic" pitchFamily="34" charset="-122"/>
                 <a:cs typeface="Malgun Gothic" pitchFamily="34" charset="-120"/>
               </a:rPr>
-              <a:t>대시보드가 aiops.log 의 [WARN] → [INFO] → [OK] 를 읽어 단계를 켠다. 재학습은 model_drift 일 때만 5단계로 넘어간다</a:t>
+              <a:t>대시보드는 aiops.log의 [WARN] → [INFO] → [OK]를 읽어 단계를 켠다. 모델 드리프트일 때만 5단계로 넘어간다</a:t>
             </a:r>
             <a:endParaRPr lang="en-US" sz="1300" dirty="0"/>
           </a:p>
@@ -25544,8 +25574,8 @@
         </p:nvSpPr>
         <p:spPr>
           <a:xfrm>
-            <a:off x="11155680" y="384048"/>
-            <a:ext cx="548640" cy="365760"/>
+            <a:off x="11155680" y="411480"/>
+            <a:ext cx="502920" cy="365760"/>
           </a:xfrm>
           <a:prstGeom prst="rect">
             <a:avLst/>
@@ -25561,7 +25591,7 @@
               <a:buNone/>
             </a:pPr>
             <a:r>
-              <a:rPr lang="en-US" sz="1200" dirty="0">
+              <a:rPr lang="en-US" sz="1100" dirty="0">
                 <a:solidFill>
                   <a:srgbClr val="8A93A6"/>
                 </a:solidFill>
@@ -25571,7 +25601,7 @@
               </a:rPr>
               <a:t>09</a:t>
             </a:r>
-            <a:endParaRPr lang="en-US" sz="1200" dirty="0"/>
+            <a:endParaRPr lang="en-US" sz="1100" dirty="0"/>
           </a:p>
         </p:txBody>
       </p:sp>
@@ -25584,7 +25614,7 @@
         <p:spPr>
           <a:xfrm>
             <a:off x="548640" y="6446520"/>
-            <a:ext cx="5486400" cy="274320"/>
+            <a:ext cx="6400800" cy="274320"/>
           </a:xfrm>
           <a:prstGeom prst="rect">
             <a:avLst/>
@@ -25608,7 +25638,7 @@
                 <a:ea typeface="Malgun Gothic" pitchFamily="34" charset="-122"/>
                 <a:cs typeface="Malgun Gothic" pitchFamily="34" charset="-120"/>
               </a:rPr>
-              <a:t>해아림 · 서빙 → MLOps → AIOps</a:t>
+              <a:t>해아림 · 태양광 시간별 발전량 예측 · 서빙 → MLOps → AIOps</a:t>
             </a:r>
             <a:endParaRPr lang="en-US" sz="900" dirty="0"/>
           </a:p>
@@ -26133,7 +26163,7 @@
                 <a:ea typeface="Malgun Gothic" pitchFamily="34" charset="-122"/>
                 <a:cs typeface="Malgun Gothic" pitchFamily="34" charset="-120"/>
               </a:rPr>
-              <a:t>model_drift 일 때만</a:t>
+              <a:t>모델 드리프트일 때만</a:t>
             </a:r>
             <a:endParaRPr lang="en-US" sz="900" dirty="0"/>
           </a:p>
@@ -26529,8 +26559,8 @@
         </p:blipFill>
         <p:spPr>
           <a:xfrm>
-            <a:off x="874166" y="3525926"/>
-            <a:ext cx="309067" cy="309067"/>
+            <a:off x="880110" y="3531870"/>
+            <a:ext cx="297180" cy="297180"/>
           </a:xfrm>
           <a:prstGeom prst="rect">
             <a:avLst/>
@@ -26609,7 +26639,7 @@
                 <a:ea typeface="Malgun Gothic" pitchFamily="34" charset="-122"/>
                 <a:cs typeface="Malgun Gothic" pitchFamily="34" charset="-120"/>
               </a:rPr>
-              <a:t>/jobs/current 로 상태 조회. 학습 중에도 /predict 는 기존 버전으로 응답. 진행 중이면 새 요청은 같은 작업으로 합친다.</a:t>
+              <a:t>/jobs/current로 상태를 본다. 학습 중에도 /predict는 기존 버전으로 응답하고, 진행 중이면 새 요청은 같은 작업으로 합친다.</a:t>
             </a:r>
             <a:endParaRPr lang="en-US" sz="1050" dirty="0"/>
           </a:p>
@@ -26690,8 +26720,8 @@
         </p:blipFill>
         <p:spPr>
           <a:xfrm>
-            <a:off x="6497726" y="3525926"/>
-            <a:ext cx="309067" cy="309067"/>
+            <a:off x="6503670" y="3531870"/>
+            <a:ext cx="297180" cy="297180"/>
           </a:xfrm>
           <a:prstGeom prst="rect">
             <a:avLst/>
@@ -26770,7 +26800,7 @@
                 <a:ea typeface="Malgun Gothic" pitchFamily="34" charset="-122"/>
                 <a:cs typeface="Malgun Gothic" pitchFamily="34" charset="-120"/>
               </a:rPr>
-              <a:t>승격 = alias 이동. 게이트에 걸리면 기존 버전 유지, 실패해도 서빙은 그대로.</a:t>
+              <a:t>승격은 alias 이동이다. 게이트에 걸리면 기존 버전을 유지하고, 학습이 실패해도 서빙은 그대로다.</a:t>
             </a:r>
             <a:endParaRPr lang="en-US" sz="1050" dirty="0"/>
           </a:p>
@@ -26851,8 +26881,8 @@
         </p:blipFill>
         <p:spPr>
           <a:xfrm>
-            <a:off x="874166" y="5080406"/>
-            <a:ext cx="309067" cy="309067"/>
+            <a:off x="880110" y="5086350"/>
+            <a:ext cx="297180" cy="297180"/>
           </a:xfrm>
           <a:prstGeom prst="rect">
             <a:avLst/>
@@ -26931,7 +26961,7 @@
                 <a:ea typeface="Malgun Gothic" pitchFamily="34" charset="-122"/>
                 <a:cs typeface="Malgun Gothic" pitchFamily="34" charset="-120"/>
               </a:rPr>
-              <a:t>같은 시기에 PR &lt; 0.75 인 발전소는 동시성에 묶여도 제외. 영흥#5를 섞으면 새 모델 오차가 10.41 → 10.95% 로 나빠지는 것을 확인.</a:t>
+              <a:t>같은 시기에 PR이 0.75 아래인 발전소는 동시성에 묶여도 제외한다. 영흥#5를 섞었을 때 새 모델 오차가 10.41%에서 10.95%로 나빠지는 것을 확인했다.</a:t>
             </a:r>
             <a:endParaRPr lang="en-US" sz="1050" dirty="0"/>
           </a:p>
@@ -27012,8 +27042,8 @@
         </p:blipFill>
         <p:spPr>
           <a:xfrm>
-            <a:off x="6497726" y="5080406"/>
-            <a:ext cx="309067" cy="309067"/>
+            <a:off x="6503670" y="5086350"/>
+            <a:ext cx="297180" cy="297180"/>
           </a:xfrm>
           <a:prstGeom prst="rect">
             <a:avLst/>
@@ -27092,7 +27122,7 @@
                 <a:ea typeface="Malgun Gothic" pitchFamily="34" charset="-122"/>
                 <a:cs typeface="Malgun Gothic" pitchFamily="34" charset="-120"/>
               </a:rPr>
-              <a:t>업로드는 컬럼·시각·중복·미등록 발전소·용량 범위를 검사해 거부. 계약 테스트 13개(pytest 0.2초). 새 클론에서 run_all.sh 로 전체 재현.</a:t>
+              <a:t>업로드는 컬럼·시각·중복·미등록 발전소·용량 범위를 검사해 거부한다. 계약 테스트 14개(pytest 0.2초). 새 클론에서 전체 재현.</a:t>
             </a:r>
             <a:endParaRPr lang="en-US" sz="1050" dirty="0"/>
           </a:p>
